--- a/plans/ppt/TW-SELFSELECT台股買賣自動化系統-W2-講稿版.pptx
+++ b/plans/ppt/TW-SELFSELECT台股買賣自動化系統-W2-講稿版.pptx
@@ -822,12 +822,12 @@
           </a:p>
           <a:p>
             <a:r>
-              <a:t>第二，基本上 TW-SELFSELECT 的所有程式，都是由 AI 也就是 Opencode 完成的——你不需要自己從零寫程式，你要做的是「看得懂」和「會下指令」。</a:t>
-            </a:r>
-          </a:p>
-          <a:p>
-            <a:r>
-              <a:t>第三，這頁新增了 PyCharm 偵錯的介紹。如果你想更深入了解 Python，可以繼續往下看怎麼用 PyCharm 進行偵錯。大部分的時候，Opencode 有辦法自行找問題並修改更正；只有極少數程式會卡死在某一個地方一直找不到原因，這時候人為使用 PyCharm 就能很快告訴 AI：程式是卡在哪裡。</a:t>
+              <a:t>第二，基本上 TW-SELFSELECT 的所有程式，都是由 AI 也就是 DSH 完成的——你不需要自己從零寫程式，你要做的是「看得懂」和「會下指令」。</a:t>
+            </a:r>
+          </a:p>
+          <a:p>
+            <a:r>
+              <a:t>第三，這頁新增了 PyCharm 偵錯的介紹。如果你想更深入了解 Python，可以繼續往下看怎麼用 PyCharm 進行偵錯。大部分的時候，DSH 有辦法自行找問題並修改更正；只有極少數程式會卡死在某一個地方一直找不到原因，這時候人為使用 PyCharm 就能很快告訴 AI：程式是卡在哪裡。</a:t>
             </a:r>
           </a:p>
           <a:p>
@@ -1613,7 +1613,7 @@
           </a:p>
           <a:p>
             <a:r>
-              <a:t>以下是使用 WSL 內 PyCharm 來偵錯的流程：先於 WSL 的 tw-autotrader 目錄中輸入 pycharm，開啟專案。</a:t>
+              <a:t>以下是使用 WSL 內 PyCharm 來偵錯的流程：先於 WSL 的 tw-selfselect 目錄中輸入 pycharm，開啟專案。</a:t>
             </a:r>
           </a:p>
           <a:p>
@@ -1715,7 +1715,7 @@
           </a:p>
           <a:p>
             <a:r>
-              <a:t>再把滑鼠游標移到左下的 icon 點擊 Terminal，快捷鍵是 Alt 加 F12，打開 Terminal 視窗。請注意 Terminal 出現：括號 venv，frank 帳號，tw-autotrader 目錄。如果前面沒有括號 venv，請在 Terminal 中執行 activate_venv 來啟用 .venv 目錄下的虛擬環境。</a:t>
+              <a:t>再把滑鼠游標移到左下的 icon 點擊 Terminal，快捷鍵是 Alt 加 F12，打開 Terminal 視窗。請注意 Terminal 出現：括號 venv，frank 帳號，tw-selfselect 目錄。如果前面沒有括號 venv，請在 Terminal 中執行 activate_venv 來啟用 .venv 目錄下的虛擬環境。</a:t>
             </a:r>
           </a:p>
           <a:p>
@@ -2710,7 +2710,7 @@
           </a:p>
           <a:p>
             <a:r>
-              <a:t>今天的功課：把 WSL 環境恢復好、跑一次 week-01-calc-return.py 成功看到結果；進階的同學，練習用 PyCharm 設定斷點偵錯。下週我們會開始講 Opencode 與系統設定。我們下次見！</a:t>
+              <a:t>今天的功課：把 WSL 環境恢復好、跑一次 week-01-calc-return.py 成功看到結果；進階的同學，練習用 PyCharm 設定斷點偵錯。下週我們會開始講 DSH 與系統設定。我們下次見！</a:t>
             </a:r>
           </a:p>
           <a:p>
@@ -14385,7 +14385,7 @@
                 <a:uFillTx/>
                 <a:latin typeface="Century Gothic"/>
               </a:rPr>
-              <a:t>使用</a:t>
+              <a:t>使用 Python 與 DSH</a:t>
             </a:r>
             <a:r>
               <a:rPr lang="en-US" sz="2400" b="0" u="none" strike="noStrike">
@@ -14399,7 +14399,7 @@
                 <a:uFillTx/>
                 <a:latin typeface="Century Gothic"/>
               </a:rPr>
-              <a:t>Python</a:t>
+              <a:t/>
             </a:r>
             <a:r>
               <a:rPr lang="zh-TW" sz="2400" b="0" u="none" strike="noStrike">
@@ -14413,7 +14413,7 @@
                 <a:uFillTx/>
                 <a:latin typeface="Century Gothic"/>
               </a:rPr>
-              <a:t>與</a:t>
+              <a:t/>
             </a:r>
             <a:r>
               <a:rPr lang="en-US" sz="2400" b="0" u="none" strike="noStrike">
@@ -14427,7 +14427,7 @@
                 <a:uFillTx/>
                 <a:latin typeface="Century Gothic"/>
               </a:rPr>
-              <a:t>Opencode AI</a:t>
+              <a:t/>
             </a:r>
           </a:p>
         </p:txBody>
@@ -14680,7 +14680,7 @@
                 <a:latin typeface="Century Gothic"/>
                 <a:ea typeface="Century Gothic"/>
               </a:rPr>
-              <a:t>AI Opencode</a:t>
+              <a:t>AI DSH</a:t>
             </a:r>
             <a:r>
               <a:rPr lang="zh-TW" sz="1800" b="0" u="none" strike="noStrike">
@@ -15040,7 +15040,7 @@
                 <a:latin typeface="Century Gothic"/>
                 <a:ea typeface="Century Gothic"/>
               </a:rPr>
-              <a:t>opencode</a:t>
+              <a:t>DSH</a:t>
             </a:r>
             <a:r>
               <a:rPr lang="zh-TW" sz="1800" b="0" u="none" strike="noStrike">
@@ -15561,7 +15561,7 @@
                 <a:latin typeface="Sarasa Mono TC"/>
                 <a:ea typeface="Sarasa Mono TC"/>
               </a:rPr>
-              <a:t>                    │  ~/tw-autotrader/  ← </a:t>
+              <a:t>                    │  ~/tw-selfselect/  ← </a:t>
             </a:r>
             <a:r>
               <a:rPr lang="zh-TW" sz="1600" b="0" u="none" strike="noStrike">
@@ -16469,7 +16469,7 @@
                 <a:latin typeface="Sarasa Mono TC"/>
                 <a:ea typeface="Sarasa Mono TC"/>
               </a:rPr>
-              <a:t>                    │  ~/tw-autotrader/  ← </a:t>
+              <a:t>                    │  ~/tw-selfselect/  ← </a:t>
             </a:r>
             <a:r>
               <a:rPr lang="zh-TW" sz="1600" b="0" u="none" strike="noStrike">
@@ -18544,7 +18544,7 @@
                 <a:latin typeface="Century Gothic"/>
                 <a:ea typeface="Century Gothic"/>
               </a:rPr>
-              <a:t>~/tw-autotrader/</a:t>
+              <a:t>~/tw-selfselect/</a:t>
             </a:r>
             <a:endParaRPr lang="en-US" sz="1800" b="0" u="none" strike="noStrike">
               <a:solidFill>
@@ -23367,7 +23367,7 @@
                 <a:latin typeface="Century Gothic"/>
                 <a:ea typeface="Century Gothic"/>
               </a:rPr>
-              <a:t>以下是使用</a:t>
+              <a:t>以下是使用wsl內pycharm 來debug 的流程: 先於wsl於tw-selfselect 目錄中輸入pycharm</a:t>
             </a:r>
             <a:r>
               <a:rPr lang="en-US" sz="1800" b="0" u="none" strike="noStrike">
@@ -23382,7 +23382,7 @@
                 <a:latin typeface="Century Gothic"/>
                 <a:ea typeface="Century Gothic"/>
               </a:rPr>
-              <a:t>wsl</a:t>
+              <a:t/>
             </a:r>
             <a:r>
               <a:rPr lang="zh-TW" sz="1800" b="0" u="none" strike="noStrike">
@@ -23397,7 +23397,7 @@
                 <a:latin typeface="Century Gothic"/>
                 <a:ea typeface="Century Gothic"/>
               </a:rPr>
-              <a:t>內</a:t>
+              <a:t/>
             </a:r>
             <a:r>
               <a:rPr lang="en-US" sz="1800" b="0" u="none" strike="noStrike">
@@ -23412,7 +23412,7 @@
                 <a:latin typeface="Century Gothic"/>
                 <a:ea typeface="Century Gothic"/>
               </a:rPr>
-              <a:t>pycharm </a:t>
+              <a:t/>
             </a:r>
             <a:r>
               <a:rPr lang="zh-TW" sz="1800" b="0" u="none" strike="noStrike">
@@ -23427,7 +23427,7 @@
                 <a:latin typeface="Century Gothic"/>
                 <a:ea typeface="Century Gothic"/>
               </a:rPr>
-              <a:t>來</a:t>
+              <a:t/>
             </a:r>
             <a:r>
               <a:rPr lang="en-US" sz="1800" b="0" u="none" strike="noStrike">
@@ -23442,7 +23442,7 @@
                 <a:latin typeface="Century Gothic"/>
                 <a:ea typeface="Century Gothic"/>
               </a:rPr>
-              <a:t>debug </a:t>
+              <a:t/>
             </a:r>
             <a:r>
               <a:rPr lang="zh-TW" sz="1800" b="0" u="none" strike="noStrike">
@@ -23457,7 +23457,7 @@
                 <a:latin typeface="Century Gothic"/>
                 <a:ea typeface="Century Gothic"/>
               </a:rPr>
-              <a:t>的流程</a:t>
+              <a:t/>
             </a:r>
             <a:r>
               <a:rPr lang="en-US" sz="1800" b="0" u="none" strike="noStrike">
@@ -23472,7 +23472,7 @@
                 <a:latin typeface="Century Gothic"/>
                 <a:ea typeface="Century Gothic"/>
               </a:rPr>
-              <a:t>: </a:t>
+              <a:t/>
             </a:r>
             <a:r>
               <a:rPr lang="zh-TW" sz="1800" b="0" u="none" strike="noStrike">
@@ -23487,7 +23487,7 @@
                 <a:latin typeface="Century Gothic"/>
                 <a:ea typeface="Century Gothic"/>
               </a:rPr>
-              <a:t>先於</a:t>
+              <a:t/>
             </a:r>
             <a:r>
               <a:rPr lang="en-US" sz="1800" b="0" u="none" strike="noStrike">
@@ -23502,7 +23502,7 @@
                 <a:latin typeface="Century Gothic"/>
                 <a:ea typeface="Century Gothic"/>
               </a:rPr>
-              <a:t>wsl</a:t>
+              <a:t/>
             </a:r>
             <a:r>
               <a:rPr lang="zh-TW" sz="1800" b="0" u="none" strike="noStrike">
@@ -23517,7 +23517,7 @@
                 <a:latin typeface="Century Gothic"/>
                 <a:ea typeface="Century Gothic"/>
               </a:rPr>
-              <a:t>於</a:t>
+              <a:t/>
             </a:r>
             <a:r>
               <a:rPr lang="en-US" sz="1800" b="0" u="none" strike="noStrike">
@@ -23532,7 +23532,7 @@
                 <a:latin typeface="Century Gothic"/>
                 <a:ea typeface="Century Gothic"/>
               </a:rPr>
-              <a:t>tw-autotrader</a:t>
+              <a:t/>
             </a:r>
             <a:r>
               <a:rPr lang="zh-TW" sz="1800" b="0" u="none" strike="noStrike">
@@ -23547,7 +23547,7 @@
                 <a:latin typeface="Century Gothic"/>
                 <a:ea typeface="Century Gothic"/>
               </a:rPr>
-              <a:t>目錄中輸入</a:t>
+              <a:t/>
             </a:r>
             <a:r>
               <a:rPr lang="en-US" sz="1800" b="0" u="none" strike="noStrike">
@@ -23562,7 +23562,7 @@
                 <a:latin typeface="Century Gothic"/>
                 <a:ea typeface="Century Gothic"/>
               </a:rPr>
-              <a:t>pycharm</a:t>
+              <a:t/>
             </a:r>
             <a:endParaRPr lang="en-US" sz="1800" b="0" u="none" strike="noStrike">
               <a:solidFill>
@@ -24361,7 +24361,7 @@
                 <a:uFillTx/>
                 <a:latin typeface="Century Gothic"/>
               </a:rPr>
-              <a:t>(.venv) frank@DESKTOP-EUEMD3C:~/tw-autotrader$</a:t>
+              <a:t>(.venv) frank@DESKTOP-EUEMD3C:~/tw-selfselect$</a:t>
             </a:r>
             <a:br>
               <a:rPr sz="2000"/>

--- a/plans/ppt/TW-SELFSELECT台股買賣自動化系統-W2-講稿版.pptx
+++ b/plans/ppt/TW-SELFSELECT台股買賣自動化系統-W2-講稿版.pptx
@@ -919,17 +919,12 @@
           </a:p>
           <a:p>
             <a:r>
-              <a:t>第一層，Local，也就是你的 WSL 開發環境。這是所有程式碼的源頭，也是唯一有 Git repo 的地方。裡面放著：主程式、策略與核心模組、.env 設定、玉山證券的模擬與實盤憑證、PyArmor 解密函式庫，還有 Dockerfile 和 docker-compose.yml。</a:t>
-            </a:r>
-          </a:p>
-          <a:p>
-            <a:r>
-              <a:t>要部署的時候，執行 deploy_crypted.sh 或 deploy_user.sh，程式會經過編譯、壓縮、加密，再透過 gcloud scp 上傳到雲端主機。</a:t>
-            </a:r>
-          </a:p>
-          <a:p>
-            <a:r>
-              <a:t>---</a:t>
+              <a:t>第一層，Local，也就是你的 WSL 開發環境：所有程式碼的源頭，也是唯一有 Git repo 的地方。裡面放著主程式、策略與核心模組、scripts/（含一鍵部署的 deploy_source.sh）、.env、esun_sdk（whl 進版控，p12 與 ini 不進）、Dockerfile 與 docker-compose.yml。</a:t>
+            </a:r>
+          </a:p>
+          <a:p>
+            <a:r>
+              <a:t>要部署時執行 ./deploy_source.sh：本機先跑 preflight 測試，再建 Docker image，透過 SSH 直傳到 VM 載入並重啟容器，最後比對版本指紋確認是這次建的版本。</a:t>
             </a:r>
           </a:p>
           <a:p/>
@@ -1011,22 +1006,17 @@
           <a:p/>
           <a:p>
             <a:r>
-              <a:t>第二層，GCP VM，也就是雲端主機。</a:t>
-            </a:r>
-          </a:p>
-          <a:p>
-            <a:r>
-              <a:t>VM 上的目錄結構跟 Local 一樣，但它是部署目標，不是開發環境。這裡放著：主程式副本、.env 與全部程式碼、docker-compose.yml，還有 backups、logs、cache 這些持久資料——程式每天在寫的就是這些。</a:t>
-            </a:r>
-          </a:p>
-          <a:p>
-            <a:r>
-              <a:t>上傳的方式是 gcloud compute ssh 和 scp。VM 準備好之後，用 docker compose up 啟動容器。</a:t>
-            </a:r>
-          </a:p>
-          <a:p>
-            <a:r>
-              <a:t>---</a:t>
+              <a:t>第二層，GCP VM，也就是雲端主機（實例名稱仍是 tw-autotrader，asia-east1-b）。</a:t>
+            </a:r>
+          </a:p>
+          <a:p>
+            <a:r>
+              <a:t>VM 上的目錄是 ~/tw-selfselect/，它不是開發環境、也不是 git repo，只放執行需要的東西：.env、docker-compose.yml，以及 logs、backups、cache 這些每天會寫入的活資料。舊的 ~/tw-autotrader 原樣保留，出問題可以一行指令回滾。</a:t>
+            </a:r>
+          </a:p>
+          <a:p>
+            <a:r>
+              <a:t>部署由本機的 deploy_source.sh 完成；VM 端只需要 docker compose up 啟動容器。</a:t>
             </a:r>
           </a:p>
           <a:p/>
@@ -1113,17 +1103,12 @@
           </a:p>
           <a:p>
             <a:r>
-              <a:t>容器內是 python 3.11 的精簡環境，主程式在裡面實際執行。映像在建置時把程式碼複製進 /app，所以容器裡的程式是「照片副本」——你在 VM 上改檔案，不會影響已經建好的映像。</a:t>
-            </a:r>
-          </a:p>
-          <a:p>
-            <a:r>
-              <a:t>關鍵設計是掛載：容器內的 logs、.env、backups、cache 四個目錄，都指向 VM 上的實體目錄。這樣設定可以即時生效，日誌和資料也不會因為容器重啟而消失。</a:t>
-            </a:r>
-          </a:p>
-          <a:p>
-            <a:r>
-              <a:t>---</a:t>
+              <a:t>容器 tw_selfselect_bot 是 python 3.11 的精簡環境，主程式在裡面實際執行。映像在建置時把程式碼複製進 /app，所以容器裡的程式是「照片副本」——你在 VM 上改檔案，不會影響已經建好的映像。</a:t>
+            </a:r>
+          </a:p>
+          <a:p>
+            <a:r>
+              <a:t>玉山 SDK 也在映像內（whl、config ini、p12）。關鍵設計是掛載：容器內的 logs、.env、backups、cache 四個目錄，都指向 VM 上的實體目錄，設定即時生效、日誌與資料也不會因為容器重啟而消失。</a:t>
             </a:r>
           </a:p>
           <a:p/>
@@ -1210,23 +1195,23 @@
           </a:p>
           <a:p>
             <a:r>
-              <a:t>第一層，Local 開發層：唯一有 Git repo 的地方，所有程式碼的源頭。放著主程式源碼、.env 設定、玉山憑證、Dockerfile。</a:t>
-            </a:r>
-          </a:p>
-          <a:p>
-            <a:r>
-              <a:t>第二層，GCP VM 部署層：透過 deploy 腳本上傳，目錄結構跟 Local 相同，但不是 git repo——課程建議刪掉 .git。注意 VM 上的 .env、logs、cache 是「活資料」，程式每天在寫。</a:t>
-            </a:r>
-          </a:p>
-          <a:p>
-            <a:r>
-              <a:t>---</a:t>
+              <a:t>第一層 Local 開發層：唯一有 Git repo 的地方、程式碼的源頭；放著主程式、scripts/、.env、esun_sdk、Dockerfile。</a:t>
+            </a:r>
+          </a:p>
+          <a:p>
+            <a:r>
+              <a:t>第二層 GCP VM 部署層：用 ./deploy_source.sh 部署（本機建 image、SSH 直傳、VM 載入），目錄是 ~/tw-selfselect；VM 上的 .env、logs、cache 是「活資料」，程式每天在寫；舊目錄保留可回滾。</a:t>
+            </a:r>
+          </a:p>
+          <a:p>
+            <a:r>
+              <a:t>第三層 Docker 容器：tw_selfselect_bot 透過四個掛載跟 VM 即時連線。</a:t>
             </a:r>
           </a:p>
           <a:p/>
           <a:p>
             <a:r>
-              <a:t>【講師提示】本頁是架構概念的核心，放慢講；第三層 Docker 容器執行層的細節在下一頁。</a:t>
+              <a:t>【講師提示】本頁是架構概念的核心，放慢講。</a:t>
             </a:r>
           </a:p>
         </p:txBody>
@@ -1307,7 +1292,7 @@
           </a:p>
           <a:p>
             <a:r>
-              <a:t>docker compose up 啟動容器，主程式在容器內實際執行。映像內是程式碼的不可變副本——改 VM 上的檔案不會影響已經建好的映像——但透過掛載，設定與資料跟 VM 即時連線。</a:t>
+              <a:t>docker compose up 啟動容器，主程式 python selfselect_trader.py 在容器內實際執行。映像由本機 deploy_source.sh 建置後直傳到 VM，容器內是程式碼的不可變副本——改 VM 上的檔案不會影響已建好的映像——但透過掛載，設定與資料跟 VM 即時連線。</a:t>
             </a:r>
           </a:p>
           <a:p>
@@ -1318,11 +1303,6 @@
           <a:p>
             <a:r>
               <a:t>這四個掛載是系統穩定運作的關鍵——容器可以隨時重建，但資料永遠留在 VM 上。</a:t>
-            </a:r>
-          </a:p>
-          <a:p>
-            <a:r>
-              <a:t>---</a:t>
             </a:r>
           </a:p>
           <a:p/>
@@ -1409,17 +1389,12 @@
           </a:p>
           <a:p>
             <a:r>
-              <a:t>修改流程三句話：改程式碼，在 Local 改，deploy 腳本上傳，然後重啟容器；改設定，直接編輯 VM 的 .env，容器熱重載或重啟；看日誌，用 docker logs 指令。</a:t>
-            </a:r>
-          </a:p>
-          <a:p>
-            <a:r>
-              <a:t>白話總結：Local 是你的「開發車間」，改程式的地方；VM 是雲端的「倉庫」，放著要跑的檔案和每天產生的資料；Docker 是倉庫裡的「封閉作業員」，只照著映像裡的程式碼跑，但設定和資料透過掛載跟倉庫即時連線。</a:t>
-            </a:r>
-          </a:p>
-          <a:p>
-            <a:r>
-              <a:t>---</a:t>
+              <a:t>修改流程三句話：改程式碼在 Local 改，然後執行 ./deploy_source.sh（會先跑測試、建 image、SSH 直傳、載入、驗指紋）；改設定直接編輯 VM 的 ~/tw-selfselect/.env，主程式熱重載（最慢一分鐘）；看日誌用 docker logs tw_selfselect_bot。</a:t>
+            </a:r>
+          </a:p>
+          <a:p>
+            <a:r>
+              <a:t>白話總結：Local 是開發車間，VM 是雲端的倉庫，Docker 是倉庫裡的封閉作業員。</a:t>
             </a:r>
           </a:p>
           <a:p/>
@@ -1506,17 +1481,12 @@
           </a:p>
           <a:p>
             <a:r>
-              <a:t>Local 部署：deploy_crypted.sh 給沒源碼的用加密主程式；deploy_user.sh 給有源碼的。VM 啟動或重啟容器：docker compose down 再 up。看日誌：docker logs 加上容器名稱，看最後三十行，也可以用 VM_log。看容器狀態：docker ps。SSH 進 VM：gcloud compute ssh，當然也可以從網頁進入。</a:t>
-            </a:r>
-          </a:p>
-          <a:p>
-            <a:r>
-              <a:t>這些指令之後每週都會用到，建議拍照或抄下來。</a:t>
-            </a:r>
-          </a:p>
-          <a:p>
-            <a:r>
-              <a:t>---</a:t>
+              <a:t>Local 部署只跑 ./deploy_source.sh（人工執行，內含 preflight 測試與指紋驗證）。VM 重啟容器：docker compose down 再 up。看日誌：docker logs 加容器名稱，看最後三十行，也可以用 VM_log。看容器狀態 docker ps；SSH 進 VM 用 gcloud compute ssh tw-autotrader。</a:t>
+            </a:r>
+          </a:p>
+          <a:p>
+            <a:r>
+              <a:t>舊版的 deploy_crypted.sh／deploy_user.sh 已經不需要了——本專案是源碼部署。</a:t>
             </a:r>
           </a:p>
           <a:p/>
@@ -15407,731 +15377,84 @@
           </a:bodyPr>
           <a:lstStyle/>
           <a:p>
-            <a:pPr marL="45720" indent="0" algn="l" defTabSz="914400">
-              <a:lnSpc>
-                <a:spcPct val="110000"/>
-              </a:lnSpc>
-              <a:spcBef>
-                <a:spcPts val="1800"/>
-              </a:spcBef>
-              <a:buNone/>
-              <a:tabLst>
-                <a:tab pos="0" algn="l"/>
-              </a:tabLst>
-            </a:pPr>
-            <a:r>
-              <a:rPr lang="en-US" sz="1600" b="0" u="none" strike="noStrike">
-                <a:solidFill>
-                  <a:schemeClr val="dk1">
-                    <a:lumMod val="85000"/>
-                    <a:lumOff val="15000"/>
-                  </a:schemeClr>
-                </a:solidFill>
-                <a:effectLst/>
-                <a:uFillTx/>
-                <a:latin typeface="Century Gothic"/>
-                <a:ea typeface="Century Gothic"/>
-              </a:rPr>
-              <a:t> </a:t>
-            </a:r>
-            <a:r>
-              <a:rPr lang="en-US" sz="1600" b="0" u="none" strike="noStrike">
-                <a:solidFill>
-                  <a:schemeClr val="dk1">
-                    <a:lumMod val="85000"/>
-                    <a:lumOff val="15000"/>
-                  </a:schemeClr>
-                </a:solidFill>
-                <a:effectLst/>
-                <a:uFillTx/>
-                <a:latin typeface="Consolas"/>
-                <a:ea typeface="Aptos"/>
-              </a:rPr>
-              <a:t>                 </a:t>
-            </a:r>
-            <a:r>
-              <a:rPr lang="en-US" sz="1600" b="0" u="none" strike="noStrike">
-                <a:solidFill>
-                  <a:schemeClr val="dk1">
-                    <a:lumMod val="85000"/>
-                    <a:lumOff val="15000"/>
-                  </a:schemeClr>
-                </a:solidFill>
-                <a:effectLst/>
-                <a:uFillTx/>
-                <a:latin typeface="Sarasa Mono TC"/>
-                <a:ea typeface="Sarasa Mono TC"/>
-              </a:rPr>
-              <a:t>──────────────────────────────────────────────────┐</a:t>
-            </a:r>
-            <a:br>
-              <a:rPr sz="1600"/>
-            </a:br>
-            <a:r>
-              <a:rPr lang="en-US" sz="1600" b="0" u="none" strike="noStrike">
-                <a:solidFill>
-                  <a:schemeClr val="dk1">
-                    <a:lumMod val="85000"/>
-                    <a:lumOff val="15000"/>
-                  </a:schemeClr>
-                </a:solidFill>
-                <a:effectLst/>
-                <a:uFillTx/>
-                <a:latin typeface="Sarasa Mono TC"/>
-                <a:ea typeface="Sarasa Mono TC"/>
-              </a:rPr>
-              <a:t>                    │  ①  LOCAL</a:t>
-            </a:r>
-            <a:r>
-              <a:rPr lang="zh-TW" sz="1600" b="0" u="none" strike="noStrike">
-                <a:solidFill>
-                  <a:schemeClr val="dk1">
-                    <a:lumMod val="85000"/>
-                    <a:lumOff val="15000"/>
-                  </a:schemeClr>
-                </a:solidFill>
-                <a:effectLst/>
-                <a:uFillTx/>
-                <a:latin typeface="Sarasa Mono TC"/>
-                <a:ea typeface="Sarasa Mono TC"/>
-              </a:rPr>
-              <a:t>（你的 </a:t>
-            </a:r>
-            <a:r>
-              <a:rPr lang="en-US" sz="1600" b="0" u="none" strike="noStrike">
-                <a:solidFill>
-                  <a:schemeClr val="dk1">
-                    <a:lumMod val="85000"/>
-                    <a:lumOff val="15000"/>
-                  </a:schemeClr>
-                </a:solidFill>
-                <a:effectLst/>
-                <a:uFillTx/>
-                <a:latin typeface="Sarasa Mono TC"/>
-                <a:ea typeface="Sarasa Mono TC"/>
-              </a:rPr>
-              <a:t>WSL / Windows</a:t>
-            </a:r>
-            <a:r>
-              <a:rPr lang="zh-TW" sz="1600" b="0" u="none" strike="noStrike">
-                <a:solidFill>
-                  <a:schemeClr val="dk1">
-                    <a:lumMod val="85000"/>
-                    <a:lumOff val="15000"/>
-                  </a:schemeClr>
-                </a:solidFill>
-                <a:effectLst/>
-                <a:uFillTx/>
-                <a:latin typeface="Sarasa Mono TC"/>
-                <a:ea typeface="Sarasa Mono TC"/>
-              </a:rPr>
-              <a:t>）                 │</a:t>
-            </a:r>
-            <a:br>
-              <a:rPr sz="1600"/>
-            </a:br>
-            <a:r>
-              <a:rPr lang="en-US" sz="1600" b="0" u="none" strike="noStrike">
-                <a:solidFill>
-                  <a:schemeClr val="dk1">
-                    <a:lumMod val="85000"/>
-                    <a:lumOff val="15000"/>
-                  </a:schemeClr>
-                </a:solidFill>
-                <a:effectLst/>
-                <a:uFillTx/>
-                <a:latin typeface="Sarasa Mono TC"/>
-                <a:ea typeface="Sarasa Mono TC"/>
-              </a:rPr>
-              <a:t>                    │                                                  │</a:t>
-            </a:r>
-            <a:br>
-              <a:rPr sz="1600"/>
-            </a:br>
-            <a:r>
-              <a:rPr lang="en-US" sz="1600" b="0" u="none" strike="noStrike">
-                <a:solidFill>
-                  <a:schemeClr val="dk1">
-                    <a:lumMod val="85000"/>
-                    <a:lumOff val="15000"/>
-                  </a:schemeClr>
-                </a:solidFill>
-                <a:effectLst/>
-                <a:uFillTx/>
-                <a:latin typeface="Sarasa Mono TC"/>
-                <a:ea typeface="Sarasa Mono TC"/>
-              </a:rPr>
-              <a:t>                    │  ~/tw-selfselect/  ← </a:t>
-            </a:r>
-            <a:r>
-              <a:rPr lang="zh-TW" sz="1600" b="0" u="none" strike="noStrike">
-                <a:solidFill>
-                  <a:schemeClr val="dk1">
-                    <a:lumMod val="85000"/>
-                    <a:lumOff val="15000"/>
-                  </a:schemeClr>
-                </a:solidFill>
-                <a:effectLst/>
-                <a:uFillTx/>
-                <a:latin typeface="Sarasa Mono TC"/>
-                <a:ea typeface="Sarasa Mono TC"/>
-              </a:rPr>
-              <a:t>開發環境（</a:t>
-            </a:r>
-            <a:r>
-              <a:rPr lang="en-US" sz="1600" b="0" u="none" strike="noStrike">
-                <a:solidFill>
-                  <a:schemeClr val="dk1">
-                    <a:lumMod val="85000"/>
-                    <a:lumOff val="15000"/>
-                  </a:schemeClr>
-                </a:solidFill>
-                <a:effectLst/>
-                <a:uFillTx/>
-                <a:latin typeface="Sarasa Mono TC"/>
-                <a:ea typeface="Sarasa Mono TC"/>
-              </a:rPr>
-              <a:t>Git repo</a:t>
-            </a:r>
-            <a:r>
-              <a:rPr lang="zh-TW" sz="1600" b="0" u="none" strike="noStrike">
-                <a:solidFill>
-                  <a:schemeClr val="dk1">
-                    <a:lumMod val="85000"/>
-                    <a:lumOff val="15000"/>
-                  </a:schemeClr>
-                </a:solidFill>
-                <a:effectLst/>
-                <a:uFillTx/>
-                <a:latin typeface="Sarasa Mono TC"/>
-                <a:ea typeface="Sarasa Mono TC"/>
-              </a:rPr>
-              <a:t>）       │</a:t>
-            </a:r>
-            <a:br>
-              <a:rPr sz="1600"/>
-            </a:br>
-            <a:r>
-              <a:rPr lang="en-US" sz="1600" b="0" u="none" strike="noStrike">
-                <a:solidFill>
-                  <a:schemeClr val="dk1">
-                    <a:lumMod val="85000"/>
-                    <a:lumOff val="15000"/>
-                  </a:schemeClr>
-                </a:solidFill>
-                <a:effectLst/>
-                <a:uFillTx/>
-                <a:latin typeface="Sarasa Mono TC"/>
-                <a:ea typeface="Sarasa Mono TC"/>
-              </a:rPr>
-              <a:t>                    │  ├── selfselect_trader.py   ← </a:t>
-            </a:r>
-            <a:r>
-              <a:rPr lang="zh-TW" sz="1600" b="0" u="none" strike="noStrike">
-                <a:solidFill>
-                  <a:schemeClr val="dk1">
-                    <a:lumMod val="85000"/>
-                    <a:lumOff val="15000"/>
-                  </a:schemeClr>
-                </a:solidFill>
-                <a:effectLst/>
-                <a:uFillTx/>
-                <a:latin typeface="Sarasa Mono TC"/>
-                <a:ea typeface="Sarasa Mono TC"/>
-              </a:rPr>
-              <a:t>主程式源碼        │</a:t>
-            </a:r>
-            <a:br>
-              <a:rPr sz="1600"/>
-            </a:br>
-            <a:r>
-              <a:rPr lang="en-US" sz="1600" b="0" u="none" strike="noStrike">
-                <a:solidFill>
-                  <a:schemeClr val="dk1">
-                    <a:lumMod val="85000"/>
-                    <a:lumOff val="15000"/>
-                  </a:schemeClr>
-                </a:solidFill>
-                <a:effectLst/>
-                <a:uFillTx/>
-                <a:latin typeface="Sarasa Mono TC"/>
-                <a:ea typeface="Sarasa Mono TC"/>
-              </a:rPr>
-              <a:t>                    │  ├── strategies/ core/ data/ utils/              │</a:t>
-            </a:r>
-            <a:br>
-              <a:rPr sz="1600"/>
-            </a:br>
-            <a:r>
-              <a:rPr lang="en-US" sz="1600" b="0" u="none" strike="noStrike">
-                <a:solidFill>
-                  <a:schemeClr val="dk1">
-                    <a:lumMod val="85000"/>
-                    <a:lumOff val="15000"/>
-                  </a:schemeClr>
-                </a:solidFill>
-                <a:effectLst/>
-                <a:uFillTx/>
-                <a:latin typeface="Sarasa Mono TC"/>
-                <a:ea typeface="Sarasa Mono TC"/>
-              </a:rPr>
-              <a:t>                    │  ├── .env                   ← </a:t>
-            </a:r>
-            <a:r>
-              <a:rPr lang="zh-TW" sz="1600" b="0" u="none" strike="noStrike">
-                <a:solidFill>
-                  <a:schemeClr val="dk1">
-                    <a:lumMod val="85000"/>
-                    <a:lumOff val="15000"/>
-                  </a:schemeClr>
-                </a:solidFill>
-                <a:effectLst/>
-                <a:uFillTx/>
-                <a:latin typeface="Sarasa Mono TC"/>
-                <a:ea typeface="Sarasa Mono TC"/>
-              </a:rPr>
-              <a:t>設定（資金</a:t>
-            </a:r>
-            <a:r>
-              <a:rPr lang="en-US" sz="1600" b="0" u="none" strike="noStrike">
-                <a:solidFill>
-                  <a:schemeClr val="dk1">
-                    <a:lumMod val="85000"/>
-                    <a:lumOff val="15000"/>
-                  </a:schemeClr>
-                </a:solidFill>
-                <a:effectLst/>
-                <a:uFillTx/>
-                <a:latin typeface="Sarasa Mono TC"/>
-                <a:ea typeface="Sarasa Mono TC"/>
-              </a:rPr>
-              <a:t>/</a:t>
-            </a:r>
-            <a:r>
-              <a:rPr lang="zh-TW" sz="1600" b="0" u="none" strike="noStrike">
-                <a:solidFill>
-                  <a:schemeClr val="dk1">
-                    <a:lumMod val="85000"/>
-                    <a:lumOff val="15000"/>
-                  </a:schemeClr>
-                </a:solidFill>
-                <a:effectLst/>
-                <a:uFillTx/>
-                <a:latin typeface="Sarasa Mono TC"/>
-                <a:ea typeface="Sarasa Mono TC"/>
-              </a:rPr>
-              <a:t>策略） │</a:t>
-            </a:r>
-            <a:br>
-              <a:rPr sz="1600"/>
-            </a:br>
-            <a:r>
-              <a:rPr lang="en-US" sz="1600" b="0" u="none" strike="noStrike">
-                <a:solidFill>
-                  <a:schemeClr val="dk1">
-                    <a:lumMod val="85000"/>
-                    <a:lumOff val="15000"/>
-                  </a:schemeClr>
-                </a:solidFill>
-                <a:effectLst/>
-                <a:uFillTx/>
-                <a:latin typeface="Sarasa Mono TC"/>
-                <a:ea typeface="Sarasa Mono TC"/>
-              </a:rPr>
-              <a:t>                    │  ├── config.simulation.ini  ← </a:t>
-            </a:r>
-            <a:r>
-              <a:rPr lang="zh-TW" sz="1600" b="0" u="none" strike="noStrike">
-                <a:solidFill>
-                  <a:schemeClr val="dk1">
-                    <a:lumMod val="85000"/>
-                    <a:lumOff val="15000"/>
-                  </a:schemeClr>
-                </a:solidFill>
-                <a:effectLst/>
-                <a:uFillTx/>
-                <a:latin typeface="Sarasa Mono TC"/>
-                <a:ea typeface="Sarasa Mono TC"/>
-              </a:rPr>
-              <a:t>玉山模擬憑證      │</a:t>
-            </a:r>
-            <a:br>
-              <a:rPr sz="1600"/>
-            </a:br>
-            <a:r>
-              <a:rPr lang="en-US" sz="1600" b="0" u="none" strike="noStrike">
-                <a:solidFill>
-                  <a:schemeClr val="dk1">
-                    <a:lumMod val="85000"/>
-                    <a:lumOff val="15000"/>
-                  </a:schemeClr>
-                </a:solidFill>
-                <a:effectLst/>
-                <a:uFillTx/>
-                <a:latin typeface="Sarasa Mono TC"/>
-                <a:ea typeface="Sarasa Mono TC"/>
-              </a:rPr>
-              <a:t>                    │  ├── config.ini             ← </a:t>
-            </a:r>
-            <a:r>
-              <a:rPr lang="zh-TW" sz="1600" b="0" u="none" strike="noStrike">
-                <a:solidFill>
-                  <a:schemeClr val="dk1">
-                    <a:lumMod val="85000"/>
-                    <a:lumOff val="15000"/>
-                  </a:schemeClr>
-                </a:solidFill>
-                <a:effectLst/>
-                <a:uFillTx/>
-                <a:latin typeface="Sarasa Mono TC"/>
-                <a:ea typeface="Sarasa Mono TC"/>
-              </a:rPr>
-              <a:t>玉山實盤憑證      │</a:t>
-            </a:r>
-            <a:br>
-              <a:rPr sz="1600"/>
-            </a:br>
-            <a:r>
-              <a:rPr lang="en-US" sz="1600" b="0" u="none" strike="noStrike">
-                <a:solidFill>
-                  <a:schemeClr val="dk1">
-                    <a:lumMod val="85000"/>
-                    <a:lumOff val="15000"/>
-                  </a:schemeClr>
-                </a:solidFill>
-                <a:effectLst/>
-                <a:uFillTx/>
-                <a:latin typeface="Sarasa Mono TC"/>
-                <a:ea typeface="Sarasa Mono TC"/>
-              </a:rPr>
-              <a:t>                    │  ├── pyarmor_runtime_000000 ← </a:t>
-            </a:r>
-            <a:r>
-              <a:rPr lang="zh-TW" sz="1600" b="0" u="none" strike="noStrike">
-                <a:solidFill>
-                  <a:schemeClr val="dk1">
-                    <a:lumMod val="85000"/>
-                    <a:lumOff val="15000"/>
-                  </a:schemeClr>
-                </a:solidFill>
-                <a:effectLst/>
-                <a:uFillTx/>
-                <a:latin typeface="Sarasa Mono TC"/>
-                <a:ea typeface="Sarasa Mono TC"/>
-              </a:rPr>
-              <a:t>解密函式庫        │</a:t>
-            </a:r>
-            <a:br>
-              <a:rPr sz="1600"/>
-            </a:br>
-            <a:r>
-              <a:rPr lang="en-US" sz="1600" b="0" u="none" strike="noStrike">
-                <a:solidFill>
-                  <a:schemeClr val="dk1">
-                    <a:lumMod val="85000"/>
-                    <a:lumOff val="15000"/>
-                  </a:schemeClr>
-                </a:solidFill>
-                <a:effectLst/>
-                <a:uFillTx/>
-                <a:latin typeface="Sarasa Mono TC"/>
-                <a:ea typeface="Sarasa Mono TC"/>
-              </a:rPr>
-              <a:t>                    │  └── Dockerfile / docker-compose.yml             │</a:t>
-            </a:r>
-            <a:br>
-              <a:rPr sz="1600"/>
-            </a:br>
-            <a:r>
-              <a:rPr lang="en-US" sz="1600" b="0" u="none" strike="noStrike">
-                <a:solidFill>
-                  <a:schemeClr val="dk1">
-                    <a:lumMod val="85000"/>
-                    <a:lumOff val="15000"/>
-                  </a:schemeClr>
-                </a:solidFill>
-                <a:effectLst/>
-                <a:uFillTx/>
-                <a:latin typeface="Sarasa Mono TC"/>
-                <a:ea typeface="Sarasa Mono TC"/>
-              </a:rPr>
-              <a:t>                    │         │                                        │</a:t>
-            </a:r>
-            <a:br>
-              <a:rPr sz="1600"/>
-            </a:br>
-            <a:r>
-              <a:rPr lang="en-US" sz="1600" b="0" u="none" strike="noStrike">
-                <a:solidFill>
-                  <a:schemeClr val="dk1">
-                    <a:lumMod val="85000"/>
-                    <a:lumOff val="15000"/>
-                  </a:schemeClr>
-                </a:solidFill>
-                <a:effectLst/>
-                <a:uFillTx/>
-                <a:latin typeface="Sarasa Mono TC"/>
-                <a:ea typeface="Sarasa Mono TC"/>
-              </a:rPr>
-              <a:t>                    │         │  ./deploy_crypted.sh </a:t>
-            </a:r>
-            <a:r>
-              <a:rPr lang="zh-TW" sz="1600" b="0" u="none" strike="noStrike">
-                <a:solidFill>
-                  <a:schemeClr val="dk1">
-                    <a:lumMod val="85000"/>
-                    <a:lumOff val="15000"/>
-                  </a:schemeClr>
-                </a:solidFill>
-                <a:effectLst/>
-                <a:uFillTx/>
-                <a:latin typeface="Sarasa Mono TC"/>
-                <a:ea typeface="Sarasa Mono TC"/>
-              </a:rPr>
-              <a:t>或 </a:t>
-            </a:r>
-            <a:r>
-              <a:rPr lang="en-US" sz="1600" b="0" u="none" strike="noStrike">
-                <a:solidFill>
-                  <a:schemeClr val="dk1">
-                    <a:lumMod val="85000"/>
-                    <a:lumOff val="15000"/>
-                  </a:schemeClr>
-                </a:solidFill>
-                <a:effectLst/>
-                <a:uFillTx/>
-                <a:latin typeface="Sarasa Mono TC"/>
-                <a:ea typeface="Sarasa Mono TC"/>
-              </a:rPr>
-              <a:t>deploy_user.sh │</a:t>
-            </a:r>
-            <a:br>
-              <a:rPr sz="1600"/>
-            </a:br>
-            <a:r>
-              <a:rPr lang="en-US" sz="1600" b="0" u="none" strike="noStrike">
-                <a:solidFill>
-                  <a:schemeClr val="dk1">
-                    <a:lumMod val="85000"/>
-                    <a:lumOff val="15000"/>
-                  </a:schemeClr>
-                </a:solidFill>
-                <a:effectLst/>
-                <a:uFillTx/>
-                <a:latin typeface="Sarasa Mono TC"/>
-                <a:ea typeface="Sarasa Mono TC"/>
-              </a:rPr>
-              <a:t>                    │         │  </a:t>
-            </a:r>
-            <a:r>
-              <a:rPr lang="zh-TW" sz="1600" b="0" u="none" strike="noStrike">
-                <a:solidFill>
-                  <a:schemeClr val="dk1">
-                    <a:lumMod val="85000"/>
-                    <a:lumOff val="15000"/>
-                  </a:schemeClr>
-                </a:solidFill>
-                <a:effectLst/>
-                <a:uFillTx/>
-                <a:latin typeface="Sarasa Mono TC"/>
-                <a:ea typeface="Sarasa Mono TC"/>
-              </a:rPr>
-              <a:t>（編譯</a:t>
-            </a:r>
-            <a:r>
-              <a:rPr lang="en-US" sz="1600" b="0" u="none" strike="noStrike">
-                <a:solidFill>
-                  <a:schemeClr val="dk1">
-                    <a:lumMod val="85000"/>
-                    <a:lumOff val="15000"/>
-                  </a:schemeClr>
-                </a:solidFill>
-                <a:effectLst/>
-                <a:uFillTx/>
-                <a:latin typeface="Sarasa Mono TC"/>
-                <a:ea typeface="Sarasa Mono TC"/>
-              </a:rPr>
-              <a:t>/</a:t>
-            </a:r>
-            <a:r>
-              <a:rPr lang="zh-TW" sz="1600" b="0" u="none" strike="noStrike">
-                <a:solidFill>
-                  <a:schemeClr val="dk1">
-                    <a:lumMod val="85000"/>
-                    <a:lumOff val="15000"/>
-                  </a:schemeClr>
-                </a:solidFill>
-                <a:effectLst/>
-                <a:uFillTx/>
-                <a:latin typeface="Sarasa Mono TC"/>
-                <a:ea typeface="Sarasa Mono TC"/>
-              </a:rPr>
-              <a:t>壓縮</a:t>
-            </a:r>
-            <a:r>
-              <a:rPr lang="en-US" sz="1600" b="0" u="none" strike="noStrike">
-                <a:solidFill>
-                  <a:schemeClr val="dk1">
-                    <a:lumMod val="85000"/>
-                    <a:lumOff val="15000"/>
-                  </a:schemeClr>
-                </a:solidFill>
-                <a:effectLst/>
-                <a:uFillTx/>
-                <a:latin typeface="Sarasa Mono TC"/>
-                <a:ea typeface="Sarasa Mono TC"/>
-              </a:rPr>
-              <a:t>/</a:t>
-            </a:r>
-            <a:r>
-              <a:rPr lang="zh-TW" sz="1600" b="0" u="none" strike="noStrike">
-                <a:solidFill>
-                  <a:schemeClr val="dk1">
-                    <a:lumMod val="85000"/>
-                    <a:lumOff val="15000"/>
-                  </a:schemeClr>
-                </a:solidFill>
-                <a:effectLst/>
-                <a:uFillTx/>
-                <a:latin typeface="Sarasa Mono TC"/>
-                <a:ea typeface="Sarasa Mono TC"/>
-              </a:rPr>
-              <a:t>加密 → </a:t>
-            </a:r>
-            <a:r>
-              <a:rPr lang="en-US" sz="1600" b="0" u="none" strike="noStrike">
-                <a:solidFill>
-                  <a:schemeClr val="dk1">
-                    <a:lumMod val="85000"/>
-                    <a:lumOff val="15000"/>
-                  </a:schemeClr>
-                </a:solidFill>
-                <a:effectLst/>
-                <a:uFillTx/>
-                <a:latin typeface="Sarasa Mono TC"/>
-                <a:ea typeface="Sarasa Mono TC"/>
-              </a:rPr>
-              <a:t>gcloud scp </a:t>
-            </a:r>
-            <a:r>
-              <a:rPr lang="zh-TW" sz="1600" b="0" u="none" strike="noStrike">
-                <a:solidFill>
-                  <a:schemeClr val="dk1">
-                    <a:lumMod val="85000"/>
-                    <a:lumOff val="15000"/>
-                  </a:schemeClr>
-                </a:solidFill>
-                <a:effectLst/>
-                <a:uFillTx/>
-                <a:latin typeface="Sarasa Mono TC"/>
-                <a:ea typeface="Sarasa Mono TC"/>
-              </a:rPr>
-              <a:t>上傳） │</a:t>
-            </a:r>
-            <a:br>
-              <a:rPr sz="1600"/>
-            </a:br>
-            <a:r>
-              <a:rPr lang="en-US" sz="1600" b="0" u="none" strike="noStrike">
-                <a:solidFill>
-                  <a:schemeClr val="dk1">
-                    <a:lumMod val="85000"/>
-                    <a:lumOff val="15000"/>
-                  </a:schemeClr>
-                </a:solidFill>
-                <a:effectLst/>
-                <a:uFillTx/>
-                <a:latin typeface="Sarasa Mono TC"/>
-                <a:ea typeface="Sarasa Mono TC"/>
-              </a:rPr>
-              <a:t>                    │         ▼                                       │</a:t>
-            </a:r>
-            <a:br>
-              <a:rPr sz="1600"/>
-            </a:br>
-            <a:r>
-              <a:rPr lang="en-US" sz="1600" b="0" u="none" strike="noStrike">
-                <a:solidFill>
-                  <a:schemeClr val="dk1">
-                    <a:lumMod val="85000"/>
-                    <a:lumOff val="15000"/>
-                  </a:schemeClr>
-                </a:solidFill>
-                <a:effectLst/>
-                <a:uFillTx/>
-                <a:latin typeface="Sarasa Mono TC"/>
-                <a:ea typeface="Sarasa Mono TC"/>
-              </a:rPr>
-              <a:t>                    └──────────────────────────────────────────────────┘</a:t>
-            </a:r>
-            <a:br>
-              <a:rPr sz="1600"/>
-            </a:br>
-            <a:r>
-              <a:rPr lang="en-US" sz="1600" b="0" u="none" strike="noStrike">
-                <a:solidFill>
-                  <a:schemeClr val="dk1">
-                    <a:lumMod val="85000"/>
-                    <a:lumOff val="15000"/>
-                  </a:schemeClr>
-                </a:solidFill>
-                <a:effectLst/>
-                <a:uFillTx/>
-                <a:latin typeface="Sarasa Mono TC"/>
-                <a:ea typeface="Sarasa Mono TC"/>
-              </a:rPr>
-              <a:t>                                     │</a:t>
-            </a:r>
-            <a:br>
-              <a:rPr sz="1600"/>
-            </a:br>
-            <a:r>
-              <a:rPr lang="en-US" sz="1600" b="0" u="none" strike="noStrike">
-                <a:solidFill>
-                  <a:schemeClr val="dk1">
-                    <a:lumMod val="85000"/>
-                    <a:lumOff val="15000"/>
-                  </a:schemeClr>
-                </a:solidFill>
-                <a:effectLst/>
-                <a:uFillTx/>
-                <a:latin typeface="Sarasa Mono TC"/>
-                <a:ea typeface="Sarasa Mono TC"/>
-              </a:rPr>
-              <a:t>                                     │  gcloud compute ssh / scp</a:t>
-            </a:r>
-            <a:br>
-              <a:rPr sz="1600"/>
-            </a:br>
-            <a:r>
-              <a:rPr lang="en-US" sz="1600" b="0" u="none" strike="noStrike">
-                <a:solidFill>
-                  <a:schemeClr val="dk1">
-                    <a:lumMod val="85000"/>
-                    <a:lumOff val="15000"/>
-                  </a:schemeClr>
-                </a:solidFill>
-                <a:effectLst/>
-                <a:uFillTx/>
-                <a:latin typeface="Sarasa Mono TC"/>
-                <a:ea typeface="Sarasa Mono TC"/>
-              </a:rPr>
-              <a:t>                                     ▼</a:t>
-            </a:r>
-            <a:br>
-              <a:rPr sz="1600"/>
-            </a:br>
-            <a:endParaRPr lang="en-US" sz="1600" b="0" u="none" strike="noStrike">
-              <a:solidFill>
-                <a:schemeClr val="dk1">
-                  <a:lumMod val="85000"/>
-                  <a:lumOff val="15000"/>
-                </a:schemeClr>
-              </a:solidFill>
-              <a:effectLst/>
-              <a:uFillTx/>
-              <a:latin typeface="Century Gothic"/>
-            </a:endParaRPr>
+            <a:r>
+              <a:rPr sz="1600" b="0">
+                <a:latin typeface="Century Gothic"/>
+              </a:rPr>
+              <a:t>①  LOCAL（你的 WSL / Windows）</a:t>
+            </a:r>
+          </a:p>
+          <a:p>
+            <a:r>
+              <a:rPr sz="1600" b="0">
+                <a:latin typeface="Century Gothic"/>
+              </a:rPr>
+              <a:t>   開發環境（Git repo）：~/tw-selfselect/</a:t>
+            </a:r>
+          </a:p>
+          <a:p>
+            <a:r>
+              <a:rPr sz="1600" b="0">
+                <a:latin typeface="Century Gothic"/>
+              </a:rPr>
+              <a:t>     - selfselect_trader.py（主程式源碼）</a:t>
+            </a:r>
+          </a:p>
+          <a:p>
+            <a:r>
+              <a:rPr sz="1600" b="0">
+                <a:latin typeface="Century Gothic"/>
+              </a:rPr>
+              <a:t>     - strategies/ core/ data/ utils/</a:t>
+            </a:r>
+          </a:p>
+          <a:p>
+            <a:r>
+              <a:rPr sz="1600" b="0">
+                <a:latin typeface="Century Gothic"/>
+              </a:rPr>
+              <a:t>     - scripts/deploy_source.sh（一鍵部署）</a:t>
+            </a:r>
+          </a:p>
+          <a:p>
+            <a:r>
+              <a:rPr sz="1600" b="0">
+                <a:latin typeface="Century Gothic"/>
+              </a:rPr>
+              <a:t>     - .env（設定；不進 git）</a:t>
+            </a:r>
+          </a:p>
+          <a:p>
+            <a:r>
+              <a:rPr sz="1600" b="0">
+                <a:latin typeface="Century Gothic"/>
+              </a:rPr>
+              <a:t>     - esun_sdk/：whl（進 git）、p12／ini（不進）</a:t>
+            </a:r>
+          </a:p>
+          <a:p>
+            <a:r>
+              <a:rPr sz="1600" b="0">
+                <a:latin typeface="Century Gothic"/>
+              </a:rPr>
+              <a:t>     - Dockerfile / docker-compose.yml</a:t>
+            </a:r>
+          </a:p>
+          <a:p>
+            <a:r>
+              <a:rPr sz="1600" b="0">
+                <a:latin typeface="Century Gothic"/>
+              </a:rPr>
+              <a:t>   ▼ ./deploy_source.sh（人工執行）</a:t>
+            </a:r>
+          </a:p>
+          <a:p>
+            <a:r>
+              <a:rPr sz="1600" b="0">
+                <a:latin typeface="Century Gothic"/>
+              </a:rPr>
+              <a:t>     preflight 測試 → docker build → SSH 直傳 image</a:t>
+            </a:r>
           </a:p>
         </p:txBody>
       </p:sp>
@@ -16330,557 +15653,68 @@
           </a:bodyPr>
           <a:lstStyle/>
           <a:p>
-            <a:pPr marL="45720" indent="0" algn="l" defTabSz="914400">
-              <a:lnSpc>
-                <a:spcPct val="110000"/>
-              </a:lnSpc>
-              <a:spcBef>
-                <a:spcPts val="1800"/>
-              </a:spcBef>
-              <a:buNone/>
-              <a:tabLst>
-                <a:tab pos="0" algn="l"/>
-              </a:tabLst>
-            </a:pPr>
-            <a:r>
-              <a:rPr lang="en-US" sz="1600" b="0" u="none" strike="noStrike">
-                <a:solidFill>
-                  <a:schemeClr val="dk1">
-                    <a:lumMod val="85000"/>
-                    <a:lumOff val="15000"/>
-                  </a:schemeClr>
-                </a:solidFill>
-                <a:effectLst/>
-                <a:uFillTx/>
+            <a:r>
+              <a:rPr sz="1600" b="0">
                 <a:latin typeface="Sarasa Mono TC"/>
-                <a:ea typeface="Century Gothic"/>
-              </a:rPr>
-              <a:t>                  </a:t>
-            </a:r>
-            <a:r>
-              <a:rPr lang="en-US" sz="1600" b="0" u="none" strike="noStrike">
-                <a:solidFill>
-                  <a:schemeClr val="dk1">
-                    <a:lumMod val="85000"/>
-                    <a:lumOff val="15000"/>
-                  </a:schemeClr>
-                </a:solidFill>
-                <a:effectLst/>
-                <a:uFillTx/>
+              </a:rPr>
+              <a:t>②  GCP VM（Google 雲端主機）</a:t>
+            </a:r>
+          </a:p>
+          <a:p>
+            <a:r>
+              <a:rPr sz="1600" b="0">
                 <a:latin typeface="Sarasa Mono TC"/>
-                <a:ea typeface="Sarasa Mono TC"/>
-              </a:rPr>
-              <a:t>  ┌───────────────────────────────────────────────┐</a:t>
-            </a:r>
-            <a:br>
-              <a:rPr sz="1600"/>
-            </a:br>
-            <a:r>
-              <a:rPr lang="en-US" sz="1600" b="0" u="none" strike="noStrike">
-                <a:solidFill>
-                  <a:schemeClr val="dk1">
-                    <a:lumMod val="85000"/>
-                    <a:lumOff val="15000"/>
-                  </a:schemeClr>
-                </a:solidFill>
-                <a:effectLst/>
-                <a:uFillTx/>
+              </a:rPr>
+              <a:t>   實例：tw-autotrader（asia-east1-b）</a:t>
+            </a:r>
+          </a:p>
+          <a:p>
+            <a:r>
+              <a:rPr sz="1600" b="0">
                 <a:latin typeface="Sarasa Mono TC"/>
-                <a:ea typeface="Sarasa Mono TC"/>
-              </a:rPr>
-              <a:t>                    │  ②  GCP VM</a:t>
-            </a:r>
-            <a:r>
-              <a:rPr lang="zh-TW" sz="1600" b="0" u="none" strike="noStrike">
-                <a:solidFill>
-                  <a:schemeClr val="dk1">
-                    <a:lumMod val="85000"/>
-                    <a:lumOff val="15000"/>
-                  </a:schemeClr>
-                </a:solidFill>
-                <a:effectLst/>
-                <a:uFillTx/>
+              </a:rPr>
+              <a:t>   部署目錄（非 git repo）：~/tw-selfselect/</a:t>
+            </a:r>
+          </a:p>
+          <a:p>
+            <a:r>
+              <a:rPr sz="1600" b="0">
                 <a:latin typeface="Sarasa Mono TC"/>
-                <a:ea typeface="Sarasa Mono TC"/>
-              </a:rPr>
-              <a:t>（</a:t>
-            </a:r>
-            <a:r>
-              <a:rPr lang="en-US" sz="1600" b="0" u="none" strike="noStrike">
-                <a:solidFill>
-                  <a:schemeClr val="dk1">
-                    <a:lumMod val="85000"/>
-                    <a:lumOff val="15000"/>
-                  </a:schemeClr>
-                </a:solidFill>
-                <a:effectLst/>
-                <a:uFillTx/>
+              </a:rPr>
+              <a:t>     - .env / docker-compose.yml</a:t>
+            </a:r>
+          </a:p>
+          <a:p>
+            <a:r>
+              <a:rPr sz="1600" b="0">
                 <a:latin typeface="Sarasa Mono TC"/>
-                <a:ea typeface="Sarasa Mono TC"/>
-              </a:rPr>
-              <a:t>Google </a:t>
-            </a:r>
-            <a:r>
-              <a:rPr lang="zh-TW" sz="1600" b="0" u="none" strike="noStrike">
-                <a:solidFill>
-                  <a:schemeClr val="dk1">
-                    <a:lumMod val="85000"/>
-                    <a:lumOff val="15000"/>
-                  </a:schemeClr>
-                </a:solidFill>
-                <a:effectLst/>
-                <a:uFillTx/>
+              </a:rPr>
+              <a:t>     - logs/  backups/  cache/（活資料）</a:t>
+            </a:r>
+          </a:p>
+          <a:p>
+            <a:r>
+              <a:rPr sz="1600" b="0">
                 <a:latin typeface="Sarasa Mono TC"/>
-                <a:ea typeface="Sarasa Mono TC"/>
-              </a:rPr>
-              <a:t>雲端主機）                │</a:t>
-            </a:r>
-            <a:br>
-              <a:rPr sz="1600"/>
-            </a:br>
-            <a:r>
-              <a:rPr lang="en-US" sz="1600" b="0" u="none" strike="noStrike">
-                <a:solidFill>
-                  <a:schemeClr val="dk1">
-                    <a:lumMod val="85000"/>
-                    <a:lumOff val="15000"/>
-                  </a:schemeClr>
-                </a:solidFill>
-                <a:effectLst/>
-                <a:uFillTx/>
+              </a:rPr>
+              <a:t>     - 舊目錄 ~/tw-autotrader（保留可回滾）</a:t>
+            </a:r>
+          </a:p>
+          <a:p>
+            <a:r>
+              <a:rPr sz="1600" b="0">
                 <a:latin typeface="Sarasa Mono TC"/>
-                <a:ea typeface="Sarasa Mono TC"/>
-              </a:rPr>
-              <a:t>                    │                                               │</a:t>
-            </a:r>
-            <a:br>
-              <a:rPr sz="1600"/>
-            </a:br>
-            <a:r>
-              <a:rPr lang="en-US" sz="1600" b="0" u="none" strike="noStrike">
-                <a:solidFill>
-                  <a:schemeClr val="dk1">
-                    <a:lumMod val="85000"/>
-                    <a:lumOff val="15000"/>
-                  </a:schemeClr>
-                </a:solidFill>
-                <a:effectLst/>
-                <a:uFillTx/>
+              </a:rPr>
+              <a:t>   ▼ docker compose up -d</a:t>
+            </a:r>
+          </a:p>
+          <a:p>
+            <a:r>
+              <a:rPr sz="1600" b="0">
                 <a:latin typeface="Sarasa Mono TC"/>
-                <a:ea typeface="Sarasa Mono TC"/>
-              </a:rPr>
-              <a:t>                    │  ~/tw-selfselect/  ← </a:t>
-            </a:r>
-            <a:r>
-              <a:rPr lang="zh-TW" sz="1600" b="0" u="none" strike="noStrike">
-                <a:solidFill>
-                  <a:schemeClr val="dk1">
-                    <a:lumMod val="85000"/>
-                    <a:lumOff val="15000"/>
-                  </a:schemeClr>
-                </a:solidFill>
-                <a:effectLst/>
-                <a:uFillTx/>
-                <a:latin typeface="Sarasa Mono TC"/>
-                <a:ea typeface="Sarasa Mono TC"/>
-              </a:rPr>
-              <a:t>同結構的目錄（部署目標）│</a:t>
-            </a:r>
-            <a:br>
-              <a:rPr sz="1600"/>
-            </a:br>
-            <a:r>
-              <a:rPr lang="en-US" sz="1600" b="0" u="none" strike="noStrike">
-                <a:solidFill>
-                  <a:schemeClr val="dk1">
-                    <a:lumMod val="85000"/>
-                    <a:lumOff val="15000"/>
-                  </a:schemeClr>
-                </a:solidFill>
-                <a:effectLst/>
-                <a:uFillTx/>
-                <a:latin typeface="Sarasa Mono TC"/>
-                <a:ea typeface="Sarasa Mono TC"/>
-              </a:rPr>
-              <a:t>                    │  ├── selfselect_trader.py </a:t>
-            </a:r>
-            <a:r>
-              <a:rPr lang="zh-TW" sz="1600" b="0" u="none" strike="noStrike">
-                <a:solidFill>
-                  <a:schemeClr val="dk1">
-                    <a:lumMod val="85000"/>
-                    <a:lumOff val="15000"/>
-                  </a:schemeClr>
-                </a:solidFill>
-                <a:effectLst/>
-                <a:uFillTx/>
-                <a:latin typeface="Sarasa Mono TC"/>
-                <a:ea typeface="Sarasa Mono TC"/>
-              </a:rPr>
-              <a:t>（同①的檔案副本）  │</a:t>
-            </a:r>
-            <a:br>
-              <a:rPr sz="1600"/>
-            </a:br>
-            <a:r>
-              <a:rPr lang="en-US" sz="1600" b="0" u="none" strike="noStrike">
-                <a:solidFill>
-                  <a:schemeClr val="dk1">
-                    <a:lumMod val="85000"/>
-                    <a:lumOff val="15000"/>
-                  </a:schemeClr>
-                </a:solidFill>
-                <a:effectLst/>
-                <a:uFillTx/>
-                <a:latin typeface="Sarasa Mono TC"/>
-                <a:ea typeface="Sarasa Mono TC"/>
-              </a:rPr>
-              <a:t>                    │  ├── .env / config.ini / </a:t>
-            </a:r>
-            <a:r>
-              <a:rPr lang="zh-TW" sz="1600" b="0" u="none" strike="noStrike">
-                <a:solidFill>
-                  <a:schemeClr val="dk1">
-                    <a:lumMod val="85000"/>
-                    <a:lumOff val="15000"/>
-                  </a:schemeClr>
-                </a:solidFill>
-                <a:effectLst/>
-                <a:uFillTx/>
-                <a:latin typeface="Sarasa Mono TC"/>
-                <a:ea typeface="Sarasa Mono TC"/>
-              </a:rPr>
-              <a:t>全部程式碼           │</a:t>
-            </a:r>
-            <a:br>
-              <a:rPr sz="1600"/>
-            </a:br>
-            <a:r>
-              <a:rPr lang="en-US" sz="1600" b="0" u="none" strike="noStrike">
-                <a:solidFill>
-                  <a:schemeClr val="dk1">
-                    <a:lumMod val="85000"/>
-                    <a:lumOff val="15000"/>
-                  </a:schemeClr>
-                </a:solidFill>
-                <a:effectLst/>
-                <a:uFillTx/>
-                <a:latin typeface="Sarasa Mono TC"/>
-                <a:ea typeface="Sarasa Mono TC"/>
-              </a:rPr>
-              <a:t>                    │  ├── docker-compose.yml                       │</a:t>
-            </a:r>
-            <a:br>
-              <a:rPr sz="1600"/>
-            </a:br>
-            <a:r>
-              <a:rPr lang="en-US" sz="1600" b="0" u="none" strike="noStrike">
-                <a:solidFill>
-                  <a:schemeClr val="dk1">
-                    <a:lumMod val="85000"/>
-                    <a:lumOff val="15000"/>
-                  </a:schemeClr>
-                </a:solidFill>
-                <a:effectLst/>
-                <a:uFillTx/>
-                <a:latin typeface="Sarasa Mono TC"/>
-                <a:ea typeface="Sarasa Mono TC"/>
-              </a:rPr>
-              <a:t>                    │  ├── backups/  logs/  cache/  ← </a:t>
-            </a:r>
-            <a:r>
-              <a:rPr lang="zh-TW" sz="1600" b="0" u="none" strike="noStrike">
-                <a:solidFill>
-                  <a:schemeClr val="dk1">
-                    <a:lumMod val="85000"/>
-                    <a:lumOff val="15000"/>
-                  </a:schemeClr>
-                </a:solidFill>
-                <a:effectLst/>
-                <a:uFillTx/>
-                <a:latin typeface="Sarasa Mono TC"/>
-                <a:ea typeface="Sarasa Mono TC"/>
-              </a:rPr>
-              <a:t>持久資料     │</a:t>
-            </a:r>
-            <a:br>
-              <a:rPr sz="1600"/>
-            </a:br>
-            <a:r>
-              <a:rPr lang="en-US" sz="1600" b="0" u="none" strike="noStrike">
-                <a:solidFill>
-                  <a:schemeClr val="dk1">
-                    <a:lumMod val="85000"/>
-                    <a:lumOff val="15000"/>
-                  </a:schemeClr>
-                </a:solidFill>
-                <a:effectLst/>
-                <a:uFillTx/>
-                <a:latin typeface="Sarasa Mono TC"/>
-                <a:ea typeface="Sarasa Mono TC"/>
-              </a:rPr>
-              <a:t>                    │  └── Docker </a:t>
-            </a:r>
-            <a:r>
-              <a:rPr lang="zh-TW" sz="1600" b="0" u="none" strike="noStrike">
-                <a:solidFill>
-                  <a:schemeClr val="dk1">
-                    <a:lumMod val="85000"/>
-                    <a:lumOff val="15000"/>
-                  </a:schemeClr>
-                </a:solidFill>
-                <a:effectLst/>
-                <a:uFillTx/>
-                <a:latin typeface="Sarasa Mono TC"/>
-                <a:ea typeface="Sarasa Mono TC"/>
-              </a:rPr>
-              <a:t>映像（</a:t>
-            </a:r>
-            <a:r>
-              <a:rPr lang="en-US" sz="1600" b="0" u="none" strike="noStrike">
-                <a:solidFill>
-                  <a:schemeClr val="dk1">
-                    <a:lumMod val="85000"/>
-                    <a:lumOff val="15000"/>
-                  </a:schemeClr>
-                </a:solidFill>
-                <a:effectLst/>
-                <a:uFillTx/>
-                <a:latin typeface="Sarasa Mono TC"/>
-                <a:ea typeface="Sarasa Mono TC"/>
-              </a:rPr>
-              <a:t>tw-autotrader:latest</a:t>
-            </a:r>
-            <a:r>
-              <a:rPr lang="zh-TW" sz="1600" b="0" u="none" strike="noStrike">
-                <a:solidFill>
-                  <a:schemeClr val="dk1">
-                    <a:lumMod val="85000"/>
-                    <a:lumOff val="15000"/>
-                  </a:schemeClr>
-                </a:solidFill>
-                <a:effectLst/>
-                <a:uFillTx/>
-                <a:latin typeface="Sarasa Mono TC"/>
-                <a:ea typeface="Sarasa Mono TC"/>
-              </a:rPr>
-              <a:t>）      │</a:t>
-            </a:r>
-            <a:br>
-              <a:rPr sz="1600"/>
-            </a:br>
-            <a:r>
-              <a:rPr lang="en-US" sz="1600" b="0" u="none" strike="noStrike">
-                <a:solidFill>
-                  <a:schemeClr val="dk1">
-                    <a:lumMod val="85000"/>
-                    <a:lumOff val="15000"/>
-                  </a:schemeClr>
-                </a:solidFill>
-                <a:effectLst/>
-                <a:uFillTx/>
-                <a:latin typeface="Sarasa Mono TC"/>
-                <a:ea typeface="Sarasa Mono TC"/>
-              </a:rPr>
-              <a:t>                    │         │                                     │</a:t>
-            </a:r>
-            <a:br>
-              <a:rPr sz="1600"/>
-            </a:br>
-            <a:r>
-              <a:rPr lang="en-US" sz="1600" b="0" u="none" strike="noStrike">
-                <a:solidFill>
-                  <a:schemeClr val="dk1">
-                    <a:lumMod val="85000"/>
-                    <a:lumOff val="15000"/>
-                  </a:schemeClr>
-                </a:solidFill>
-                <a:effectLst/>
-                <a:uFillTx/>
-                <a:latin typeface="Sarasa Mono TC"/>
-                <a:ea typeface="Sarasa Mono TC"/>
-              </a:rPr>
-              <a:t>                    │         │  docker compose up -d               │</a:t>
-            </a:r>
-            <a:br>
-              <a:rPr sz="1600"/>
-            </a:br>
-            <a:r>
-              <a:rPr lang="en-US" sz="1600" b="0" u="none" strike="noStrike">
-                <a:solidFill>
-                  <a:schemeClr val="dk1">
-                    <a:lumMod val="85000"/>
-                    <a:lumOff val="15000"/>
-                  </a:schemeClr>
-                </a:solidFill>
-                <a:effectLst/>
-                <a:uFillTx/>
-                <a:latin typeface="Sarasa Mono TC"/>
-                <a:ea typeface="Sarasa Mono TC"/>
-              </a:rPr>
-              <a:t>                    │         ▼                                    │</a:t>
-            </a:r>
-            <a:br>
-              <a:rPr sz="1600"/>
-            </a:br>
-            <a:r>
-              <a:rPr lang="en-US" sz="1600" b="0" u="none" strike="noStrike">
-                <a:solidFill>
-                  <a:schemeClr val="dk1">
-                    <a:lumMod val="85000"/>
-                    <a:lumOff val="15000"/>
-                  </a:schemeClr>
-                </a:solidFill>
-                <a:effectLst/>
-                <a:uFillTx/>
-                <a:latin typeface="Sarasa Mono TC"/>
-                <a:ea typeface="Sarasa Mono TC"/>
-              </a:rPr>
-              <a:t>                    └───────────────────────────────────────────────┘</a:t>
-            </a:r>
-            <a:br>
-              <a:rPr sz="1600"/>
-            </a:br>
-            <a:r>
-              <a:rPr lang="en-US" sz="1600" b="0" u="none" strike="noStrike">
-                <a:solidFill>
-                  <a:schemeClr val="dk1">
-                    <a:lumMod val="85000"/>
-                    <a:lumOff val="15000"/>
-                  </a:schemeClr>
-                </a:solidFill>
-                <a:effectLst/>
-                <a:uFillTx/>
-                <a:latin typeface="Sarasa Mono TC"/>
-                <a:ea typeface="Sarasa Mono TC"/>
-              </a:rPr>
-              <a:t>                                     │</a:t>
-            </a:r>
-            <a:br>
-              <a:rPr sz="1600"/>
-            </a:br>
-            <a:r>
-              <a:rPr lang="en-US" sz="1600" b="0" u="none" strike="noStrike">
-                <a:solidFill>
-                  <a:schemeClr val="dk1">
-                    <a:lumMod val="85000"/>
-                    <a:lumOff val="15000"/>
-                  </a:schemeClr>
-                </a:solidFill>
-                <a:effectLst/>
-                <a:uFillTx/>
-                <a:latin typeface="Sarasa Mono TC"/>
-                <a:ea typeface="Sarasa Mono TC"/>
-              </a:rPr>
-              <a:t>                                     │  </a:t>
-            </a:r>
-            <a:r>
-              <a:rPr lang="zh-TW" sz="1600" b="0" u="none" strike="noStrike">
-                <a:solidFill>
-                  <a:schemeClr val="dk1">
-                    <a:lumMod val="85000"/>
-                    <a:lumOff val="15000"/>
-                  </a:schemeClr>
-                </a:solidFill>
-                <a:effectLst/>
-                <a:uFillTx/>
-                <a:latin typeface="Sarasa Mono TC"/>
-                <a:ea typeface="Sarasa Mono TC"/>
-              </a:rPr>
-              <a:t>掛載 </a:t>
-            </a:r>
-            <a:r>
-              <a:rPr lang="en-US" sz="1600" b="0" u="none" strike="noStrike">
-                <a:solidFill>
-                  <a:schemeClr val="dk1">
-                    <a:lumMod val="85000"/>
-                    <a:lumOff val="15000"/>
-                  </a:schemeClr>
-                </a:solidFill>
-                <a:effectLst/>
-                <a:uFillTx/>
-                <a:latin typeface="Sarasa Mono TC"/>
-                <a:ea typeface="Sarasa Mono TC"/>
-              </a:rPr>
-              <a:t>volumes</a:t>
-            </a:r>
-            <a:r>
-              <a:rPr lang="zh-TW" sz="1600" b="0" u="none" strike="noStrike">
-                <a:solidFill>
-                  <a:schemeClr val="dk1">
-                    <a:lumMod val="85000"/>
-                    <a:lumOff val="15000"/>
-                  </a:schemeClr>
-                </a:solidFill>
-                <a:effectLst/>
-                <a:uFillTx/>
-                <a:latin typeface="Sarasa Mono TC"/>
-                <a:ea typeface="Sarasa Mono TC"/>
-              </a:rPr>
-              <a:t>（</a:t>
-            </a:r>
-            <a:r>
-              <a:rPr lang="en-US" sz="1600" b="0" u="none" strike="noStrike">
-                <a:solidFill>
-                  <a:schemeClr val="dk1">
-                    <a:lumMod val="85000"/>
-                    <a:lumOff val="15000"/>
-                  </a:schemeClr>
-                </a:solidFill>
-                <a:effectLst/>
-                <a:uFillTx/>
-                <a:latin typeface="Sarasa Mono TC"/>
-                <a:ea typeface="Sarasa Mono TC"/>
-              </a:rPr>
-              <a:t>bind mount</a:t>
-            </a:r>
-            <a:r>
-              <a:rPr lang="zh-TW" sz="1600" b="0" u="none" strike="noStrike">
-                <a:solidFill>
-                  <a:schemeClr val="dk1">
-                    <a:lumMod val="85000"/>
-                    <a:lumOff val="15000"/>
-                  </a:schemeClr>
-                </a:solidFill>
-                <a:effectLst/>
-                <a:uFillTx/>
-                <a:latin typeface="Sarasa Mono TC"/>
-                <a:ea typeface="Sarasa Mono TC"/>
-              </a:rPr>
-              <a:t>）</a:t>
-            </a:r>
-            <a:br>
-              <a:rPr sz="1600"/>
-            </a:br>
-            <a:r>
-              <a:rPr lang="en-US" sz="1600" b="0" u="none" strike="noStrike">
-                <a:solidFill>
-                  <a:schemeClr val="dk1">
-                    <a:lumMod val="85000"/>
-                    <a:lumOff val="15000"/>
-                  </a:schemeClr>
-                </a:solidFill>
-                <a:effectLst/>
-                <a:uFillTx/>
-                <a:latin typeface="Sarasa Mono TC"/>
-                <a:ea typeface="Sarasa Mono TC"/>
-              </a:rPr>
-              <a:t>                                     ▼</a:t>
-            </a:r>
-            <a:br>
-              <a:rPr sz="1600"/>
-            </a:br>
-            <a:endParaRPr lang="en-US" sz="1600" b="0" u="none" strike="noStrike">
-              <a:solidFill>
-                <a:schemeClr val="dk1">
-                  <a:lumMod val="85000"/>
-                  <a:lumOff val="15000"/>
-                </a:schemeClr>
-              </a:solidFill>
-              <a:effectLst/>
-              <a:uFillTx/>
-              <a:latin typeface="Century Gothic"/>
-            </a:endParaRPr>
+              </a:rPr>
+              <a:t>     容器 tw_selfselect_bot</a:t>
+            </a:r>
           </a:p>
         </p:txBody>
       </p:sp>
@@ -17110,701 +15944,76 @@
           </a:bodyPr>
           <a:lstStyle/>
           <a:p>
-            <a:pPr marL="45720" indent="0" algn="l" defTabSz="914400">
-              <a:lnSpc>
-                <a:spcPct val="110000"/>
-              </a:lnSpc>
-              <a:spcBef>
-                <a:spcPts val="1800"/>
-              </a:spcBef>
-              <a:buNone/>
-              <a:tabLst>
-                <a:tab pos="0" algn="l"/>
-              </a:tabLst>
-            </a:pPr>
-            <a:r>
-              <a:rPr lang="en-US" sz="1600" b="0" u="none" strike="noStrike">
-                <a:solidFill>
-                  <a:schemeClr val="dk1">
-                    <a:lumMod val="85000"/>
-                    <a:lumOff val="15000"/>
-                  </a:schemeClr>
-                </a:solidFill>
-                <a:effectLst/>
-                <a:uFillTx/>
-                <a:latin typeface="Century Gothic"/>
-                <a:ea typeface="Century Gothic"/>
-              </a:rPr>
-              <a:t>                                    </a:t>
-            </a:r>
-            <a:r>
-              <a:rPr lang="en-US" sz="1600" b="0" u="none" strike="noStrike">
-                <a:solidFill>
-                  <a:schemeClr val="dk1">
-                    <a:lumMod val="85000"/>
-                    <a:lumOff val="15000"/>
-                  </a:schemeClr>
-                </a:solidFill>
-                <a:effectLst/>
-                <a:uFillTx/>
-                <a:latin typeface="Sarasa Mono TC"/>
-                <a:ea typeface="Sarasa Mono TC"/>
-              </a:rPr>
-              <a:t>┌───────────────────────────────────────────────┐</a:t>
-            </a:r>
-            <a:br>
-              <a:rPr sz="1600"/>
-            </a:br>
-            <a:r>
-              <a:rPr lang="en-US" sz="1600" b="0" u="none" strike="noStrike">
-                <a:solidFill>
-                  <a:schemeClr val="dk1">
-                    <a:lumMod val="85000"/>
-                    <a:lumOff val="15000"/>
-                  </a:schemeClr>
-                </a:solidFill>
-                <a:effectLst/>
-                <a:uFillTx/>
-                <a:latin typeface="Sarasa Mono TC"/>
-                <a:ea typeface="Sarasa Mono TC"/>
-              </a:rPr>
-              <a:t>                    │  ③  DOCKER </a:t>
-            </a:r>
-            <a:r>
-              <a:rPr lang="zh-TW" sz="1600" b="0" u="none" strike="noStrike">
-                <a:solidFill>
-                  <a:schemeClr val="dk1">
-                    <a:lumMod val="85000"/>
-                    <a:lumOff val="15000"/>
-                  </a:schemeClr>
-                </a:solidFill>
-                <a:effectLst/>
-                <a:uFillTx/>
-                <a:latin typeface="Sarasa Mono TC"/>
-                <a:ea typeface="Sarasa Mono TC"/>
-              </a:rPr>
-              <a:t>容器（</a:t>
-            </a:r>
-            <a:r>
-              <a:rPr lang="en-US" sz="1600" b="0" u="none" strike="noStrike">
-                <a:solidFill>
-                  <a:schemeClr val="dk1">
-                    <a:lumMod val="85000"/>
-                    <a:lumOff val="15000"/>
-                  </a:schemeClr>
-                </a:solidFill>
-                <a:effectLst/>
-                <a:uFillTx/>
-                <a:latin typeface="Sarasa Mono TC"/>
-                <a:ea typeface="Sarasa Mono TC"/>
-              </a:rPr>
-              <a:t>VM </a:t>
-            </a:r>
-            <a:r>
-              <a:rPr lang="zh-TW" sz="1600" b="0" u="none" strike="noStrike">
-                <a:solidFill>
-                  <a:schemeClr val="dk1">
-                    <a:lumMod val="85000"/>
-                    <a:lumOff val="15000"/>
-                  </a:schemeClr>
-                </a:solidFill>
-                <a:effectLst/>
-                <a:uFillTx/>
-                <a:latin typeface="Sarasa Mono TC"/>
-                <a:ea typeface="Sarasa Mono TC"/>
-              </a:rPr>
-              <a:t>內）                     │</a:t>
-            </a:r>
-            <a:br>
-              <a:rPr sz="1600"/>
-            </a:br>
-            <a:r>
-              <a:rPr lang="en-US" sz="1600" b="0" u="none" strike="noStrike">
-                <a:solidFill>
-                  <a:schemeClr val="dk1">
-                    <a:lumMod val="85000"/>
-                    <a:lumOff val="15000"/>
-                  </a:schemeClr>
-                </a:solidFill>
-                <a:effectLst/>
-                <a:uFillTx/>
-                <a:latin typeface="Sarasa Mono TC"/>
-                <a:ea typeface="Sarasa Mono TC"/>
-              </a:rPr>
-              <a:t>                    │                                               │</a:t>
-            </a:r>
-            <a:br>
-              <a:rPr sz="1600"/>
-            </a:br>
-            <a:r>
-              <a:rPr lang="en-US" sz="1600" b="0" u="none" strike="noStrike">
-                <a:solidFill>
-                  <a:schemeClr val="dk1">
-                    <a:lumMod val="85000"/>
-                    <a:lumOff val="15000"/>
-                  </a:schemeClr>
-                </a:solidFill>
-                <a:effectLst/>
-                <a:uFillTx/>
-                <a:latin typeface="Sarasa Mono TC"/>
-                <a:ea typeface="Sarasa Mono TC"/>
-              </a:rPr>
-              <a:t>                    │  tw_autotrader_bot</a:t>
-            </a:r>
-            <a:r>
-              <a:rPr lang="zh-TW" sz="1600" b="0" u="none" strike="noStrike">
-                <a:solidFill>
-                  <a:schemeClr val="dk1">
-                    <a:lumMod val="85000"/>
-                    <a:lumOff val="15000"/>
-                  </a:schemeClr>
-                </a:solidFill>
-                <a:effectLst/>
-                <a:uFillTx/>
-                <a:latin typeface="Sarasa Mono TC"/>
-                <a:ea typeface="Sarasa Mono TC"/>
-              </a:rPr>
-              <a:t>（</a:t>
-            </a:r>
-            <a:r>
-              <a:rPr lang="en-US" sz="1600" b="0" u="none" strike="noStrike">
-                <a:solidFill>
-                  <a:schemeClr val="dk1">
-                    <a:lumMod val="85000"/>
-                    <a:lumOff val="15000"/>
-                  </a:schemeClr>
-                </a:solidFill>
-                <a:effectLst/>
-                <a:uFillTx/>
-                <a:latin typeface="Sarasa Mono TC"/>
-                <a:ea typeface="Sarasa Mono TC"/>
-              </a:rPr>
-              <a:t>python:3.11-slim</a:t>
-            </a:r>
-            <a:r>
-              <a:rPr lang="zh-TW" sz="1600" b="0" u="none" strike="noStrike">
-                <a:solidFill>
-                  <a:schemeClr val="dk1">
-                    <a:lumMod val="85000"/>
-                    <a:lumOff val="15000"/>
-                  </a:schemeClr>
-                </a:solidFill>
-                <a:effectLst/>
-                <a:uFillTx/>
-                <a:latin typeface="Sarasa Mono TC"/>
-                <a:ea typeface="Sarasa Mono TC"/>
-              </a:rPr>
-              <a:t>）        │</a:t>
-            </a:r>
-            <a:br>
-              <a:rPr sz="1600"/>
-            </a:br>
-            <a:r>
-              <a:rPr lang="en-US" sz="1600" b="0" u="none" strike="noStrike">
-                <a:solidFill>
-                  <a:schemeClr val="dk1">
-                    <a:lumMod val="85000"/>
-                    <a:lumOff val="15000"/>
-                  </a:schemeClr>
-                </a:solidFill>
-                <a:effectLst/>
-                <a:uFillTx/>
-                <a:latin typeface="Sarasa Mono TC"/>
-                <a:ea typeface="Sarasa Mono TC"/>
-              </a:rPr>
-              <a:t>                    │                                               │</a:t>
-            </a:r>
-            <a:br>
-              <a:rPr sz="1600"/>
-            </a:br>
-            <a:r>
-              <a:rPr lang="en-US" sz="1600" b="0" u="none" strike="noStrike">
-                <a:solidFill>
-                  <a:schemeClr val="dk1">
-                    <a:lumMod val="85000"/>
-                    <a:lumOff val="15000"/>
-                  </a:schemeClr>
-                </a:solidFill>
-                <a:effectLst/>
-                <a:uFillTx/>
-                <a:latin typeface="Sarasa Mono TC"/>
-                <a:ea typeface="Sarasa Mono TC"/>
-              </a:rPr>
-              <a:t>                    │  /app/  ← </a:t>
-            </a:r>
-            <a:r>
-              <a:rPr lang="zh-TW" sz="1600" b="0" u="none" strike="noStrike">
-                <a:solidFill>
-                  <a:schemeClr val="dk1">
-                    <a:lumMod val="85000"/>
-                    <a:lumOff val="15000"/>
-                  </a:schemeClr>
-                </a:solidFill>
-                <a:effectLst/>
-                <a:uFillTx/>
-                <a:latin typeface="Sarasa Mono TC"/>
-                <a:ea typeface="Sarasa Mono TC"/>
-              </a:rPr>
-              <a:t>映像內複製的程式碼（不可變）       │</a:t>
-            </a:r>
-            <a:br>
-              <a:rPr sz="1600"/>
-            </a:br>
-            <a:r>
-              <a:rPr lang="en-US" sz="1600" b="0" u="none" strike="noStrike">
-                <a:solidFill>
-                  <a:schemeClr val="dk1">
-                    <a:lumMod val="85000"/>
-                    <a:lumOff val="15000"/>
-                  </a:schemeClr>
-                </a:solidFill>
-                <a:effectLst/>
-                <a:uFillTx/>
-                <a:latin typeface="Sarasa Mono TC"/>
-                <a:ea typeface="Sarasa Mono TC"/>
-              </a:rPr>
-              <a:t>                    │  ├── selfselect_trader.py  ← </a:t>
-            </a:r>
-            <a:r>
-              <a:rPr lang="zh-TW" sz="1600" b="0" u="none" strike="noStrike">
-                <a:solidFill>
-                  <a:schemeClr val="dk1">
-                    <a:lumMod val="85000"/>
-                    <a:lumOff val="15000"/>
-                  </a:schemeClr>
-                </a:solidFill>
-                <a:effectLst/>
-                <a:uFillTx/>
-                <a:latin typeface="Sarasa Mono TC"/>
-                <a:ea typeface="Sarasa Mono TC"/>
-              </a:rPr>
-              <a:t>實際執行        │</a:t>
-            </a:r>
-            <a:br>
-              <a:rPr sz="1600"/>
-            </a:br>
-            <a:r>
-              <a:rPr lang="en-US" sz="1600" b="0" u="none" strike="noStrike">
-                <a:solidFill>
-                  <a:schemeClr val="dk1">
-                    <a:lumMod val="85000"/>
-                    <a:lumOff val="15000"/>
-                  </a:schemeClr>
-                </a:solidFill>
-                <a:effectLst/>
-                <a:uFillTx/>
-                <a:latin typeface="Sarasa Mono TC"/>
-                <a:ea typeface="Sarasa Mono TC"/>
-              </a:rPr>
-              <a:t>                    │  ├── strategies/ core/ data/ utils/           │</a:t>
-            </a:r>
-            <a:br>
-              <a:rPr sz="1600"/>
-            </a:br>
-            <a:r>
-              <a:rPr lang="en-US" sz="1600" b="0" u="none" strike="noStrike">
-                <a:solidFill>
-                  <a:schemeClr val="dk1">
-                    <a:lumMod val="85000"/>
-                    <a:lumOff val="15000"/>
-                  </a:schemeClr>
-                </a:solidFill>
-                <a:effectLst/>
-                <a:uFillTx/>
-                <a:latin typeface="Sarasa Mono TC"/>
-                <a:ea typeface="Sarasa Mono TC"/>
-              </a:rPr>
-              <a:t>                    │  └── CMD: python selfselect_trader.py         │</a:t>
-            </a:r>
-            <a:br>
-              <a:rPr sz="1600"/>
-            </a:br>
-            <a:r>
-              <a:rPr lang="en-US" sz="1600" b="0" u="none" strike="noStrike">
-                <a:solidFill>
-                  <a:schemeClr val="dk1">
-                    <a:lumMod val="85000"/>
-                    <a:lumOff val="15000"/>
-                  </a:schemeClr>
-                </a:solidFill>
-                <a:effectLst/>
-                <a:uFillTx/>
-                <a:latin typeface="Sarasa Mono TC"/>
-                <a:ea typeface="Sarasa Mono TC"/>
-              </a:rPr>
-              <a:t>                    │                                               │</a:t>
-            </a:r>
-            <a:br>
-              <a:rPr sz="1600"/>
-            </a:br>
-            <a:r>
-              <a:rPr lang="en-US" sz="1600" b="0" u="none" strike="noStrike">
-                <a:solidFill>
-                  <a:schemeClr val="dk1">
-                    <a:lumMod val="85000"/>
-                    <a:lumOff val="15000"/>
-                  </a:schemeClr>
-                </a:solidFill>
-                <a:effectLst/>
-                <a:uFillTx/>
-                <a:latin typeface="Sarasa Mono TC"/>
-                <a:ea typeface="Sarasa Mono TC"/>
-              </a:rPr>
-              <a:t>                    │  /app/logs     ← </a:t>
-            </a:r>
-            <a:r>
-              <a:rPr lang="zh-TW" sz="1600" b="0" u="none" strike="noStrike">
-                <a:solidFill>
-                  <a:schemeClr val="dk1">
-                    <a:lumMod val="85000"/>
-                    <a:lumOff val="15000"/>
-                  </a:schemeClr>
-                </a:solidFill>
-                <a:effectLst/>
-                <a:uFillTx/>
-                <a:latin typeface="Sarasa Mono TC"/>
-                <a:ea typeface="Sarasa Mono TC"/>
-              </a:rPr>
-              <a:t>掛載 </a:t>
-            </a:r>
-            <a:r>
-              <a:rPr lang="en-US" sz="1600" b="0" u="none" strike="noStrike">
-                <a:solidFill>
-                  <a:schemeClr val="dk1">
-                    <a:lumMod val="85000"/>
-                    <a:lumOff val="15000"/>
-                  </a:schemeClr>
-                </a:solidFill>
-                <a:effectLst/>
-                <a:uFillTx/>
-                <a:latin typeface="Sarasa Mono TC"/>
-                <a:ea typeface="Sarasa Mono TC"/>
-              </a:rPr>
-              <a:t>VM </a:t>
-            </a:r>
-            <a:r>
-              <a:rPr lang="zh-TW" sz="1600" b="0" u="none" strike="noStrike">
-                <a:solidFill>
-                  <a:schemeClr val="dk1">
-                    <a:lumMod val="85000"/>
-                    <a:lumOff val="15000"/>
-                  </a:schemeClr>
-                </a:solidFill>
-                <a:effectLst/>
-                <a:uFillTx/>
-                <a:latin typeface="Sarasa Mono TC"/>
-                <a:ea typeface="Sarasa Mono TC"/>
-              </a:rPr>
-              <a:t>的 </a:t>
-            </a:r>
-            <a:r>
-              <a:rPr lang="en-US" sz="1600" b="0" u="none" strike="noStrike">
-                <a:solidFill>
-                  <a:schemeClr val="dk1">
-                    <a:lumMod val="85000"/>
-                    <a:lumOff val="15000"/>
-                  </a:schemeClr>
-                </a:solidFill>
-                <a:effectLst/>
-                <a:uFillTx/>
-                <a:latin typeface="Sarasa Mono TC"/>
-                <a:ea typeface="Sarasa Mono TC"/>
-              </a:rPr>
-              <a:t>./logs</a:t>
-            </a:r>
-            <a:r>
-              <a:rPr lang="zh-TW" sz="1600" b="0" u="none" strike="noStrike">
-                <a:solidFill>
-                  <a:schemeClr val="dk1">
-                    <a:lumMod val="85000"/>
-                    <a:lumOff val="15000"/>
-                  </a:schemeClr>
-                </a:solidFill>
-                <a:effectLst/>
-                <a:uFillTx/>
-                <a:latin typeface="Sarasa Mono TC"/>
-                <a:ea typeface="Sarasa Mono TC"/>
-              </a:rPr>
-              <a:t>（日誌）   │</a:t>
-            </a:r>
-            <a:br>
-              <a:rPr sz="1600"/>
-            </a:br>
-            <a:r>
-              <a:rPr lang="en-US" sz="1600" b="0" u="none" strike="noStrike">
-                <a:solidFill>
-                  <a:schemeClr val="dk1">
-                    <a:lumMod val="85000"/>
-                    <a:lumOff val="15000"/>
-                  </a:schemeClr>
-                </a:solidFill>
-                <a:effectLst/>
-                <a:uFillTx/>
-                <a:latin typeface="Sarasa Mono TC"/>
-                <a:ea typeface="Sarasa Mono TC"/>
-              </a:rPr>
-              <a:t>                    │  /app/.env     ← </a:t>
-            </a:r>
-            <a:r>
-              <a:rPr lang="zh-TW" sz="1600" b="0" u="none" strike="noStrike">
-                <a:solidFill>
-                  <a:schemeClr val="dk1">
-                    <a:lumMod val="85000"/>
-                    <a:lumOff val="15000"/>
-                  </a:schemeClr>
-                </a:solidFill>
-                <a:effectLst/>
-                <a:uFillTx/>
-                <a:latin typeface="Sarasa Mono TC"/>
-                <a:ea typeface="Sarasa Mono TC"/>
-              </a:rPr>
-              <a:t>掛載 </a:t>
-            </a:r>
-            <a:r>
-              <a:rPr lang="en-US" sz="1600" b="0" u="none" strike="noStrike">
-                <a:solidFill>
-                  <a:schemeClr val="dk1">
-                    <a:lumMod val="85000"/>
-                    <a:lumOff val="15000"/>
-                  </a:schemeClr>
-                </a:solidFill>
-                <a:effectLst/>
-                <a:uFillTx/>
-                <a:latin typeface="Sarasa Mono TC"/>
-                <a:ea typeface="Sarasa Mono TC"/>
-              </a:rPr>
-              <a:t>VM </a:t>
-            </a:r>
-            <a:r>
-              <a:rPr lang="zh-TW" sz="1600" b="0" u="none" strike="noStrike">
-                <a:solidFill>
-                  <a:schemeClr val="dk1">
-                    <a:lumMod val="85000"/>
-                    <a:lumOff val="15000"/>
-                  </a:schemeClr>
-                </a:solidFill>
-                <a:effectLst/>
-                <a:uFillTx/>
-                <a:latin typeface="Sarasa Mono TC"/>
-                <a:ea typeface="Sarasa Mono TC"/>
-              </a:rPr>
-              <a:t>的 </a:t>
-            </a:r>
-            <a:r>
-              <a:rPr lang="en-US" sz="1600" b="0" u="none" strike="noStrike">
-                <a:solidFill>
-                  <a:schemeClr val="dk1">
-                    <a:lumMod val="85000"/>
-                    <a:lumOff val="15000"/>
-                  </a:schemeClr>
-                </a:solidFill>
-                <a:effectLst/>
-                <a:uFillTx/>
-                <a:latin typeface="Sarasa Mono TC"/>
-                <a:ea typeface="Sarasa Mono TC"/>
-              </a:rPr>
-              <a:t>./.env</a:t>
-            </a:r>
-            <a:r>
-              <a:rPr lang="zh-TW" sz="1600" b="0" u="none" strike="noStrike">
-                <a:solidFill>
-                  <a:schemeClr val="dk1">
-                    <a:lumMod val="85000"/>
-                    <a:lumOff val="15000"/>
-                  </a:schemeClr>
-                </a:solidFill>
-                <a:effectLst/>
-                <a:uFillTx/>
-                <a:latin typeface="Sarasa Mono TC"/>
-                <a:ea typeface="Sarasa Mono TC"/>
-              </a:rPr>
-              <a:t>（設定）   │</a:t>
-            </a:r>
-            <a:br>
-              <a:rPr sz="1600"/>
-            </a:br>
-            <a:r>
-              <a:rPr lang="en-US" sz="1600" b="0" u="none" strike="noStrike">
-                <a:solidFill>
-                  <a:schemeClr val="dk1">
-                    <a:lumMod val="85000"/>
-                    <a:lumOff val="15000"/>
-                  </a:schemeClr>
-                </a:solidFill>
-                <a:effectLst/>
-                <a:uFillTx/>
-                <a:latin typeface="Sarasa Mono TC"/>
-                <a:ea typeface="Sarasa Mono TC"/>
-              </a:rPr>
-              <a:t>                    │  /app/backups  ← </a:t>
-            </a:r>
-            <a:r>
-              <a:rPr lang="zh-TW" sz="1600" b="0" u="none" strike="noStrike">
-                <a:solidFill>
-                  <a:schemeClr val="dk1">
-                    <a:lumMod val="85000"/>
-                    <a:lumOff val="15000"/>
-                  </a:schemeClr>
-                </a:solidFill>
-                <a:effectLst/>
-                <a:uFillTx/>
-                <a:latin typeface="Sarasa Mono TC"/>
-                <a:ea typeface="Sarasa Mono TC"/>
-              </a:rPr>
-              <a:t>掛載 </a:t>
-            </a:r>
-            <a:r>
-              <a:rPr lang="en-US" sz="1600" b="0" u="none" strike="noStrike">
-                <a:solidFill>
-                  <a:schemeClr val="dk1">
-                    <a:lumMod val="85000"/>
-                    <a:lumOff val="15000"/>
-                  </a:schemeClr>
-                </a:solidFill>
-                <a:effectLst/>
-                <a:uFillTx/>
-                <a:latin typeface="Sarasa Mono TC"/>
-                <a:ea typeface="Sarasa Mono TC"/>
-              </a:rPr>
-              <a:t>VM </a:t>
-            </a:r>
-            <a:r>
-              <a:rPr lang="zh-TW" sz="1600" b="0" u="none" strike="noStrike">
-                <a:solidFill>
-                  <a:schemeClr val="dk1">
-                    <a:lumMod val="85000"/>
-                    <a:lumOff val="15000"/>
-                  </a:schemeClr>
-                </a:solidFill>
-                <a:effectLst/>
-                <a:uFillTx/>
-                <a:latin typeface="Sarasa Mono TC"/>
-                <a:ea typeface="Sarasa Mono TC"/>
-              </a:rPr>
-              <a:t>的 </a:t>
-            </a:r>
-            <a:r>
-              <a:rPr lang="en-US" sz="1600" b="0" u="none" strike="noStrike">
-                <a:solidFill>
-                  <a:schemeClr val="dk1">
-                    <a:lumMod val="85000"/>
-                    <a:lumOff val="15000"/>
-                  </a:schemeClr>
-                </a:solidFill>
-                <a:effectLst/>
-                <a:uFillTx/>
-                <a:latin typeface="Sarasa Mono TC"/>
-                <a:ea typeface="Sarasa Mono TC"/>
-              </a:rPr>
-              <a:t>./backups        │</a:t>
-            </a:r>
-            <a:br>
-              <a:rPr sz="1600"/>
-            </a:br>
-            <a:r>
-              <a:rPr lang="en-US" sz="1600" b="0" u="none" strike="noStrike">
-                <a:solidFill>
-                  <a:schemeClr val="dk1">
-                    <a:lumMod val="85000"/>
-                    <a:lumOff val="15000"/>
-                  </a:schemeClr>
-                </a:solidFill>
-                <a:effectLst/>
-                <a:uFillTx/>
-                <a:latin typeface="Sarasa Mono TC"/>
-                <a:ea typeface="Sarasa Mono TC"/>
-              </a:rPr>
-              <a:t>                    │  /app/cache    ← </a:t>
-            </a:r>
-            <a:r>
-              <a:rPr lang="zh-TW" sz="1600" b="0" u="none" strike="noStrike">
-                <a:solidFill>
-                  <a:schemeClr val="dk1">
-                    <a:lumMod val="85000"/>
-                    <a:lumOff val="15000"/>
-                  </a:schemeClr>
-                </a:solidFill>
-                <a:effectLst/>
-                <a:uFillTx/>
-                <a:latin typeface="Sarasa Mono TC"/>
-                <a:ea typeface="Sarasa Mono TC"/>
-              </a:rPr>
-              <a:t>掛載 </a:t>
-            </a:r>
-            <a:r>
-              <a:rPr lang="en-US" sz="1600" b="0" u="none" strike="noStrike">
-                <a:solidFill>
-                  <a:schemeClr val="dk1">
-                    <a:lumMod val="85000"/>
-                    <a:lumOff val="15000"/>
-                  </a:schemeClr>
-                </a:solidFill>
-                <a:effectLst/>
-                <a:uFillTx/>
-                <a:latin typeface="Sarasa Mono TC"/>
-                <a:ea typeface="Sarasa Mono TC"/>
-              </a:rPr>
-              <a:t>VM </a:t>
-            </a:r>
-            <a:r>
-              <a:rPr lang="zh-TW" sz="1600" b="0" u="none" strike="noStrike">
-                <a:solidFill>
-                  <a:schemeClr val="dk1">
-                    <a:lumMod val="85000"/>
-                    <a:lumOff val="15000"/>
-                  </a:schemeClr>
-                </a:solidFill>
-                <a:effectLst/>
-                <a:uFillTx/>
-                <a:latin typeface="Sarasa Mono TC"/>
-                <a:ea typeface="Sarasa Mono TC"/>
-              </a:rPr>
-              <a:t>的 </a:t>
-            </a:r>
-            <a:r>
-              <a:rPr lang="en-US" sz="1600" b="0" u="none" strike="noStrike">
-                <a:solidFill>
-                  <a:schemeClr val="dk1">
-                    <a:lumMod val="85000"/>
-                    <a:lumOff val="15000"/>
-                  </a:schemeClr>
-                </a:solidFill>
-                <a:effectLst/>
-                <a:uFillTx/>
-                <a:latin typeface="Sarasa Mono TC"/>
-                <a:ea typeface="Sarasa Mono TC"/>
-              </a:rPr>
-              <a:t>./cache          │</a:t>
-            </a:r>
-            <a:br>
-              <a:rPr sz="1600"/>
-            </a:br>
-            <a:r>
-              <a:rPr lang="en-US" sz="1600" b="0" u="none" strike="noStrike">
-                <a:solidFill>
-                  <a:schemeClr val="dk1">
-                    <a:lumMod val="85000"/>
-                    <a:lumOff val="15000"/>
-                  </a:schemeClr>
-                </a:solidFill>
-                <a:effectLst/>
-                <a:uFillTx/>
-                <a:latin typeface="Sarasa Mono TC"/>
-                <a:ea typeface="Sarasa Mono TC"/>
-              </a:rPr>
-              <a:t>                    └───────────────────────────────────────────────┘</a:t>
-            </a:r>
-            <a:endParaRPr lang="en-US" sz="1600" b="0" u="none" strike="noStrike">
-              <a:solidFill>
-                <a:schemeClr val="dk1">
-                  <a:lumMod val="85000"/>
-                  <a:lumOff val="15000"/>
-                </a:schemeClr>
-              </a:solidFill>
-              <a:effectLst/>
-              <a:uFillTx/>
-              <a:latin typeface="Century Gothic"/>
-            </a:endParaRPr>
+            <a:r>
+              <a:rPr sz="1600" b="0">
+                <a:latin typeface="Century Gothic"/>
+              </a:rPr>
+              <a:t>③  DOCKER 容器（VM 內）</a:t>
+            </a:r>
+          </a:p>
+          <a:p>
+            <a:r>
+              <a:rPr sz="1600" b="0">
+                <a:latin typeface="Century Gothic"/>
+              </a:rPr>
+              <a:t>   tw_selfselect_bot（python:3.11-slim）</a:t>
+            </a:r>
+          </a:p>
+          <a:p>
+            <a:r>
+              <a:rPr sz="1600" b="0">
+                <a:latin typeface="Century Gothic"/>
+              </a:rPr>
+              <a:t>   /app/：映像內複製的程式碼（不可變）</a:t>
+            </a:r>
+          </a:p>
+          <a:p>
+            <a:r>
+              <a:rPr sz="1600" b="0">
+                <a:latin typeface="Century Gothic"/>
+              </a:rPr>
+              <a:t>     - selfselect_trader.py（實際執行）</a:t>
+            </a:r>
+          </a:p>
+          <a:p>
+            <a:r>
+              <a:rPr sz="1600" b="0">
+                <a:latin typeface="Century Gothic"/>
+              </a:rPr>
+              <a:t>     - strategies/ core/ data/ utils/</a:t>
+            </a:r>
+          </a:p>
+          <a:p>
+            <a:r>
+              <a:rPr sz="1600" b="0">
+                <a:latin typeface="Century Gothic"/>
+              </a:rPr>
+              <a:t>     - esun_sdk/（whl ＋ config ini ＋ p12）</a:t>
+            </a:r>
+          </a:p>
+          <a:p>
+            <a:r>
+              <a:rPr sz="1600" b="0">
+                <a:latin typeface="Century Gothic"/>
+              </a:rPr>
+              <a:t>   掛載：/app/.env  /app/logs  /app/backups  /app/cache</a:t>
+            </a:r>
+          </a:p>
+          <a:p>
+            <a:r>
+              <a:rPr sz="1600" b="0">
+                <a:latin typeface="Century Gothic"/>
+              </a:rPr>
+              <a:t>        → VM 實體目錄</a:t>
+            </a:r>
+          </a:p>
+          <a:p>
+            <a:r>
+              <a:rPr sz="1600" b="0">
+                <a:latin typeface="Century Gothic"/>
+              </a:rPr>
+              <a:t>   CMD：python selfselect_trader.py</a:t>
+            </a:r>
           </a:p>
         </p:txBody>
       </p:sp>
@@ -17979,959 +16188,84 @@
           </a:bodyPr>
           <a:lstStyle/>
           <a:p>
-            <a:pPr marL="45720" indent="0" algn="l" defTabSz="914400">
-              <a:lnSpc>
-                <a:spcPct val="110000"/>
-              </a:lnSpc>
-              <a:spcBef>
-                <a:spcPts val="1800"/>
-              </a:spcBef>
-              <a:buNone/>
-              <a:tabLst>
-                <a:tab pos="0" algn="l"/>
-              </a:tabLst>
-            </a:pPr>
-            <a:r>
-              <a:rPr lang="zh-TW" sz="1800" b="1" u="none" strike="noStrike">
-                <a:solidFill>
-                  <a:schemeClr val="dk1">
-                    <a:lumMod val="85000"/>
-                    <a:lumOff val="15000"/>
-                  </a:schemeClr>
-                </a:solidFill>
-                <a:effectLst/>
-                <a:uFillTx/>
-                <a:latin typeface="Century Gothic"/>
-                <a:ea typeface="Century Gothic"/>
+            <a:r>
+              <a:rPr sz="1800" b="1">
+                <a:latin typeface="Century Gothic"/>
               </a:rPr>
               <a:t>三層關係說明</a:t>
             </a:r>
-            <a:endParaRPr lang="en-US" sz="1800" b="0" u="none" strike="noStrike">
-              <a:solidFill>
-                <a:schemeClr val="dk1">
-                  <a:lumMod val="85000"/>
-                  <a:lumOff val="15000"/>
-                </a:schemeClr>
-              </a:solidFill>
-              <a:effectLst/>
-              <a:uFillTx/>
-              <a:latin typeface="Century Gothic"/>
-            </a:endParaRPr>
-          </a:p>
-          <a:p>
-            <a:pPr marL="45720" indent="0" algn="l" defTabSz="914400">
-              <a:lnSpc>
-                <a:spcPct val="110000"/>
-              </a:lnSpc>
-              <a:spcBef>
-                <a:spcPts val="1800"/>
-              </a:spcBef>
-              <a:buNone/>
-              <a:tabLst>
-                <a:tab pos="0" algn="l"/>
-              </a:tabLst>
-            </a:pPr>
-            <a:r>
-              <a:rPr lang="en-US" sz="1800" b="1" u="none" strike="noStrike">
-                <a:solidFill>
-                  <a:schemeClr val="dk1">
-                    <a:lumMod val="85000"/>
-                    <a:lumOff val="15000"/>
-                  </a:schemeClr>
-                </a:solidFill>
-                <a:effectLst/>
-                <a:uFillTx/>
-                <a:latin typeface="Century Gothic"/>
-                <a:ea typeface="Century Gothic"/>
-              </a:rPr>
-              <a:t>① Local</a:t>
-            </a:r>
-            <a:r>
-              <a:rPr lang="zh-TW" sz="1800" b="1" u="none" strike="noStrike">
-                <a:solidFill>
-                  <a:schemeClr val="dk1">
-                    <a:lumMod val="85000"/>
-                    <a:lumOff val="15000"/>
-                  </a:schemeClr>
-                </a:solidFill>
-                <a:effectLst/>
-                <a:uFillTx/>
-                <a:latin typeface="Century Gothic"/>
-                <a:ea typeface="Century Gothic"/>
-              </a:rPr>
-              <a:t>（開發層）— 你的 </a:t>
-            </a:r>
-            <a:r>
-              <a:rPr lang="en-US" sz="1800" b="1" u="none" strike="noStrike">
-                <a:solidFill>
-                  <a:schemeClr val="dk1">
-                    <a:lumMod val="85000"/>
-                    <a:lumOff val="15000"/>
-                  </a:schemeClr>
-                </a:solidFill>
-                <a:effectLst/>
-                <a:uFillTx/>
-                <a:latin typeface="Century Gothic"/>
-                <a:ea typeface="Century Gothic"/>
-              </a:rPr>
-              <a:t>WSL</a:t>
-            </a:r>
-            <a:endParaRPr lang="en-US" sz="1800" b="0" u="none" strike="noStrike">
-              <a:solidFill>
-                <a:schemeClr val="dk1">
-                  <a:lumMod val="85000"/>
-                  <a:lumOff val="15000"/>
-                </a:schemeClr>
-              </a:solidFill>
-              <a:effectLst/>
-              <a:uFillTx/>
-              <a:latin typeface="Century Gothic"/>
-            </a:endParaRPr>
-          </a:p>
-          <a:p>
-            <a:pPr marL="45720" indent="0" algn="l" defTabSz="914400">
-              <a:lnSpc>
-                <a:spcPct val="110000"/>
-              </a:lnSpc>
-              <a:spcBef>
-                <a:spcPts val="1800"/>
-              </a:spcBef>
-              <a:buNone/>
-              <a:tabLst>
-                <a:tab pos="0" algn="l"/>
-              </a:tabLst>
-            </a:pPr>
-            <a:r>
-              <a:rPr lang="zh-TW" sz="1800" b="1" u="none" strike="noStrike">
-                <a:solidFill>
-                  <a:schemeClr val="dk1">
-                    <a:lumMod val="85000"/>
-                    <a:lumOff val="15000"/>
-                  </a:schemeClr>
-                </a:solidFill>
-                <a:effectLst/>
-                <a:uFillTx/>
-                <a:latin typeface="Century Gothic"/>
-                <a:ea typeface="Century Gothic"/>
-              </a:rPr>
-              <a:t>唯一有 </a:t>
-            </a:r>
-            <a:r>
-              <a:rPr lang="en-US" sz="1800" b="1" u="none" strike="noStrike">
-                <a:solidFill>
-                  <a:schemeClr val="dk1">
-                    <a:lumMod val="85000"/>
-                    <a:lumOff val="15000"/>
-                  </a:schemeClr>
-                </a:solidFill>
-                <a:effectLst/>
-                <a:uFillTx/>
-                <a:latin typeface="Century Gothic"/>
-                <a:ea typeface="Century Gothic"/>
-              </a:rPr>
-              <a:t>Git repo </a:t>
-            </a:r>
-            <a:r>
-              <a:rPr lang="zh-TW" sz="1800" b="1" u="none" strike="noStrike">
-                <a:solidFill>
-                  <a:schemeClr val="dk1">
-                    <a:lumMod val="85000"/>
-                    <a:lumOff val="15000"/>
-                  </a:schemeClr>
-                </a:solidFill>
-                <a:effectLst/>
-                <a:uFillTx/>
-                <a:latin typeface="Century Gothic"/>
-                <a:ea typeface="Century Gothic"/>
-              </a:rPr>
-              <a:t>的地方</a:t>
-            </a:r>
-            <a:r>
-              <a:rPr lang="zh-TW" sz="1800" b="0" u="none" strike="noStrike">
-                <a:solidFill>
-                  <a:schemeClr val="dk1">
-                    <a:lumMod val="85000"/>
-                    <a:lumOff val="15000"/>
-                  </a:schemeClr>
-                </a:solidFill>
-                <a:effectLst/>
-                <a:uFillTx/>
-                <a:latin typeface="Century Gothic"/>
-                <a:ea typeface="Century Gothic"/>
-              </a:rPr>
-              <a:t>，所有程式碼的「源頭」</a:t>
-            </a:r>
-            <a:endParaRPr lang="en-US" sz="1800" b="0" u="none" strike="noStrike">
-              <a:solidFill>
-                <a:schemeClr val="dk1">
-                  <a:lumMod val="85000"/>
-                  <a:lumOff val="15000"/>
-                </a:schemeClr>
-              </a:solidFill>
-              <a:effectLst/>
-              <a:uFillTx/>
-              <a:latin typeface="Century Gothic"/>
-            </a:endParaRPr>
-          </a:p>
-          <a:p>
-            <a:pPr marL="45720" indent="0" algn="l" defTabSz="914400">
-              <a:lnSpc>
-                <a:spcPct val="110000"/>
-              </a:lnSpc>
-              <a:spcBef>
-                <a:spcPts val="1800"/>
-              </a:spcBef>
-              <a:buNone/>
-              <a:tabLst>
-                <a:tab pos="0" algn="l"/>
-              </a:tabLst>
-            </a:pPr>
-            <a:r>
-              <a:rPr lang="zh-TW" sz="1800" b="0" u="none" strike="noStrike">
-                <a:solidFill>
-                  <a:schemeClr val="dk1">
-                    <a:lumMod val="85000"/>
-                    <a:lumOff val="15000"/>
-                  </a:schemeClr>
-                </a:solidFill>
-                <a:effectLst/>
-                <a:uFillTx/>
-                <a:latin typeface="Century Gothic"/>
-                <a:ea typeface="Century Gothic"/>
-              </a:rPr>
-              <a:t>放著：主程式源碼（或加密版）、</a:t>
-            </a:r>
-            <a:r>
-              <a:rPr lang="en-US" sz="1800" b="0" u="none" strike="noStrike">
-                <a:solidFill>
-                  <a:schemeClr val="dk1">
-                    <a:lumMod val="85000"/>
-                    <a:lumOff val="15000"/>
-                  </a:schemeClr>
-                </a:solidFill>
-                <a:effectLst/>
-                <a:uFillTx/>
-                <a:latin typeface="Century Gothic"/>
-                <a:ea typeface="Century Gothic"/>
-              </a:rPr>
-              <a:t>.env </a:t>
-            </a:r>
-            <a:r>
-              <a:rPr lang="zh-TW" sz="1800" b="0" u="none" strike="noStrike">
-                <a:solidFill>
-                  <a:schemeClr val="dk1">
-                    <a:lumMod val="85000"/>
-                    <a:lumOff val="15000"/>
-                  </a:schemeClr>
-                </a:solidFill>
-                <a:effectLst/>
-                <a:uFillTx/>
-                <a:latin typeface="Century Gothic"/>
-                <a:ea typeface="Century Gothic"/>
-              </a:rPr>
-              <a:t>設定、玉山憑證（</a:t>
-            </a:r>
-            <a:r>
-              <a:rPr lang="en-US" sz="1800" b="0" u="none" strike="noStrike">
-                <a:solidFill>
-                  <a:schemeClr val="dk1">
-                    <a:lumMod val="85000"/>
-                    <a:lumOff val="15000"/>
-                  </a:schemeClr>
-                </a:solidFill>
-                <a:effectLst/>
-                <a:uFillTx/>
-                <a:latin typeface="Century Gothic"/>
-                <a:ea typeface="Century Gothic"/>
-              </a:rPr>
-              <a:t>ini/p12</a:t>
-            </a:r>
-            <a:r>
-              <a:rPr lang="zh-TW" sz="1800" b="0" u="none" strike="noStrike">
-                <a:solidFill>
-                  <a:schemeClr val="dk1">
-                    <a:lumMod val="85000"/>
-                    <a:lumOff val="15000"/>
-                  </a:schemeClr>
-                </a:solidFill>
-                <a:effectLst/>
-                <a:uFillTx/>
-                <a:latin typeface="Century Gothic"/>
-                <a:ea typeface="Century Gothic"/>
-              </a:rPr>
-              <a:t>）、</a:t>
-            </a:r>
-            <a:r>
-              <a:rPr lang="en-US" sz="1800" b="0" u="none" strike="noStrike">
-                <a:solidFill>
-                  <a:schemeClr val="dk1">
-                    <a:lumMod val="85000"/>
-                    <a:lumOff val="15000"/>
-                  </a:schemeClr>
-                </a:solidFill>
-                <a:effectLst/>
-                <a:uFillTx/>
-                <a:latin typeface="Century Gothic"/>
-                <a:ea typeface="Century Gothic"/>
-              </a:rPr>
-              <a:t>Dockerfile</a:t>
-            </a:r>
-            <a:endParaRPr lang="en-US" sz="1800" b="0" u="none" strike="noStrike">
-              <a:solidFill>
-                <a:schemeClr val="dk1">
-                  <a:lumMod val="85000"/>
-                  <a:lumOff val="15000"/>
-                </a:schemeClr>
-              </a:solidFill>
-              <a:effectLst/>
-              <a:uFillTx/>
-              <a:latin typeface="Century Gothic"/>
-            </a:endParaRPr>
-          </a:p>
-          <a:p>
-            <a:pPr marL="45720" indent="0" algn="l" defTabSz="914400">
-              <a:lnSpc>
-                <a:spcPct val="110000"/>
-              </a:lnSpc>
-              <a:spcBef>
-                <a:spcPts val="1800"/>
-              </a:spcBef>
-              <a:buNone/>
-              <a:tabLst>
-                <a:tab pos="0" algn="l"/>
-              </a:tabLst>
-            </a:pPr>
-            <a:r>
-              <a:rPr lang="en-US" sz="1800" b="1" u="none" strike="noStrike">
-                <a:solidFill>
-                  <a:schemeClr val="dk1">
-                    <a:lumMod val="85000"/>
-                    <a:lumOff val="15000"/>
-                  </a:schemeClr>
-                </a:solidFill>
-                <a:effectLst/>
-                <a:uFillTx/>
-                <a:latin typeface="Century Gothic"/>
-                <a:ea typeface="Century Gothic"/>
-              </a:rPr>
-              <a:t>② GCP VM</a:t>
-            </a:r>
-            <a:r>
-              <a:rPr lang="zh-TW" sz="1800" b="1" u="none" strike="noStrike">
-                <a:solidFill>
-                  <a:schemeClr val="dk1">
-                    <a:lumMod val="85000"/>
-                    <a:lumOff val="15000"/>
-                  </a:schemeClr>
-                </a:solidFill>
-                <a:effectLst/>
-                <a:uFillTx/>
-                <a:latin typeface="Century Gothic"/>
-                <a:ea typeface="Century Gothic"/>
-              </a:rPr>
-              <a:t>（部署層）— 雲端主機</a:t>
-            </a:r>
-            <a:endParaRPr lang="en-US" sz="1800" b="0" u="none" strike="noStrike">
-              <a:solidFill>
-                <a:schemeClr val="dk1">
-                  <a:lumMod val="85000"/>
-                  <a:lumOff val="15000"/>
-                </a:schemeClr>
-              </a:solidFill>
-              <a:effectLst/>
-              <a:uFillTx/>
-              <a:latin typeface="Century Gothic"/>
-            </a:endParaRPr>
-          </a:p>
-          <a:p>
-            <a:pPr marL="45720" indent="0" algn="l" defTabSz="914400">
-              <a:lnSpc>
-                <a:spcPct val="110000"/>
-              </a:lnSpc>
-              <a:spcBef>
-                <a:spcPts val="1800"/>
-              </a:spcBef>
-              <a:buNone/>
-              <a:tabLst>
-                <a:tab pos="0" algn="l"/>
-              </a:tabLst>
-            </a:pPr>
-            <a:r>
-              <a:rPr lang="zh-TW" sz="1800" b="0" u="none" strike="noStrike">
-                <a:solidFill>
-                  <a:schemeClr val="dk1">
-                    <a:lumMod val="85000"/>
-                    <a:lumOff val="15000"/>
-                  </a:schemeClr>
-                </a:solidFill>
-                <a:effectLst/>
-                <a:uFillTx/>
-                <a:latin typeface="Century Gothic"/>
-                <a:ea typeface="Century Gothic"/>
-              </a:rPr>
-              <a:t>透過 </a:t>
-            </a:r>
-            <a:r>
-              <a:rPr lang="en-US" sz="1800" b="0" u="none" strike="noStrike">
-                <a:solidFill>
-                  <a:schemeClr val="dk1">
-                    <a:lumMod val="85000"/>
-                    <a:lumOff val="15000"/>
-                  </a:schemeClr>
-                </a:solidFill>
-                <a:effectLst/>
-                <a:uFillTx/>
-                <a:latin typeface="Century Gothic"/>
-                <a:ea typeface="Century Gothic"/>
-              </a:rPr>
-              <a:t>./deploy_crypted.sh</a:t>
-            </a:r>
-            <a:r>
-              <a:rPr lang="zh-TW" sz="1800" b="0" u="none" strike="noStrike">
-                <a:solidFill>
-                  <a:schemeClr val="dk1">
-                    <a:lumMod val="85000"/>
-                    <a:lumOff val="15000"/>
-                  </a:schemeClr>
-                </a:solidFill>
-                <a:effectLst/>
-                <a:uFillTx/>
-                <a:latin typeface="Century Gothic"/>
-                <a:ea typeface="Century Gothic"/>
-              </a:rPr>
-              <a:t>（加密版）或 </a:t>
-            </a:r>
-            <a:r>
-              <a:rPr lang="en-US" sz="1800" b="0" u="none" strike="noStrike">
-                <a:solidFill>
-                  <a:schemeClr val="dk1">
-                    <a:lumMod val="85000"/>
-                    <a:lumOff val="15000"/>
-                  </a:schemeClr>
-                </a:solidFill>
-                <a:effectLst/>
-                <a:uFillTx/>
-                <a:latin typeface="Century Gothic"/>
-                <a:ea typeface="Century Gothic"/>
-              </a:rPr>
-              <a:t>./deploy_user.sh</a:t>
-            </a:r>
-            <a:r>
-              <a:rPr lang="zh-TW" sz="1800" b="0" u="none" strike="noStrike">
-                <a:solidFill>
-                  <a:schemeClr val="dk1">
-                    <a:lumMod val="85000"/>
-                    <a:lumOff val="15000"/>
-                  </a:schemeClr>
-                </a:solidFill>
-                <a:effectLst/>
-                <a:uFillTx/>
-                <a:latin typeface="Century Gothic"/>
-                <a:ea typeface="Century Gothic"/>
-              </a:rPr>
-              <a:t>（源碼版）上傳</a:t>
-            </a:r>
-            <a:endParaRPr lang="en-US" sz="1800" b="0" u="none" strike="noStrike">
-              <a:solidFill>
-                <a:schemeClr val="dk1">
-                  <a:lumMod val="85000"/>
-                  <a:lumOff val="15000"/>
-                </a:schemeClr>
-              </a:solidFill>
-              <a:effectLst/>
-              <a:uFillTx/>
-              <a:latin typeface="Century Gothic"/>
-            </a:endParaRPr>
-          </a:p>
-          <a:p>
-            <a:pPr marL="45720" indent="0" algn="l" defTabSz="914400">
-              <a:lnSpc>
-                <a:spcPct val="110000"/>
-              </a:lnSpc>
-              <a:spcBef>
-                <a:spcPts val="1800"/>
-              </a:spcBef>
-              <a:buNone/>
-              <a:tabLst>
-                <a:tab pos="0" algn="l"/>
-              </a:tabLst>
-            </a:pPr>
-            <a:r>
-              <a:rPr lang="zh-TW" sz="1800" b="0" u="none" strike="noStrike">
-                <a:solidFill>
-                  <a:schemeClr val="dk1">
-                    <a:lumMod val="85000"/>
-                    <a:lumOff val="15000"/>
-                  </a:schemeClr>
-                </a:solidFill>
-                <a:effectLst/>
-                <a:uFillTx/>
-                <a:latin typeface="Century Gothic"/>
-                <a:ea typeface="Century Gothic"/>
-              </a:rPr>
-              <a:t>上傳方式：</a:t>
-            </a:r>
-            <a:r>
-              <a:rPr lang="en-US" sz="1800" b="0" u="none" strike="noStrike">
-                <a:solidFill>
-                  <a:schemeClr val="dk1">
-                    <a:lumMod val="85000"/>
-                    <a:lumOff val="15000"/>
-                  </a:schemeClr>
-                </a:solidFill>
-                <a:effectLst/>
-                <a:uFillTx/>
-                <a:latin typeface="Century Gothic"/>
-                <a:ea typeface="Century Gothic"/>
-              </a:rPr>
-              <a:t>gcloud scp </a:t>
-            </a:r>
-            <a:r>
-              <a:rPr lang="zh-TW" sz="1800" b="0" u="none" strike="noStrike">
-                <a:solidFill>
-                  <a:schemeClr val="dk1">
-                    <a:lumMod val="85000"/>
-                    <a:lumOff val="15000"/>
-                  </a:schemeClr>
-                </a:solidFill>
-                <a:effectLst/>
-                <a:uFillTx/>
-                <a:latin typeface="Century Gothic"/>
-                <a:ea typeface="Century Gothic"/>
-              </a:rPr>
-              <a:t>把檔案複製到 </a:t>
-            </a:r>
-            <a:r>
-              <a:rPr lang="en-US" sz="1800" b="0" u="none" strike="noStrike">
-                <a:solidFill>
-                  <a:schemeClr val="dk1">
-                    <a:lumMod val="85000"/>
-                    <a:lumOff val="15000"/>
-                  </a:schemeClr>
-                </a:solidFill>
-                <a:effectLst/>
-                <a:uFillTx/>
-                <a:latin typeface="Century Gothic"/>
-                <a:ea typeface="Century Gothic"/>
-              </a:rPr>
-              <a:t>VM </a:t>
-            </a:r>
-            <a:r>
-              <a:rPr lang="zh-TW" sz="1800" b="0" u="none" strike="noStrike">
-                <a:solidFill>
-                  <a:schemeClr val="dk1">
-                    <a:lumMod val="85000"/>
-                    <a:lumOff val="15000"/>
-                  </a:schemeClr>
-                </a:solidFill>
-                <a:effectLst/>
-                <a:uFillTx/>
-                <a:latin typeface="Century Gothic"/>
-                <a:ea typeface="Century Gothic"/>
-              </a:rPr>
-              <a:t>的 </a:t>
-            </a:r>
-            <a:r>
-              <a:rPr lang="en-US" sz="1800" b="0" u="none" strike="noStrike">
-                <a:solidFill>
-                  <a:schemeClr val="dk1">
-                    <a:lumMod val="85000"/>
-                    <a:lumOff val="15000"/>
-                  </a:schemeClr>
-                </a:solidFill>
-                <a:effectLst/>
-                <a:uFillTx/>
-                <a:latin typeface="Century Gothic"/>
-                <a:ea typeface="Century Gothic"/>
-              </a:rPr>
-              <a:t>~/tw-selfselect/</a:t>
-            </a:r>
-            <a:endParaRPr lang="en-US" sz="1800" b="0" u="none" strike="noStrike">
-              <a:solidFill>
-                <a:schemeClr val="dk1">
-                  <a:lumMod val="85000"/>
-                  <a:lumOff val="15000"/>
-                </a:schemeClr>
-              </a:solidFill>
-              <a:effectLst/>
-              <a:uFillTx/>
-              <a:latin typeface="Century Gothic"/>
-            </a:endParaRPr>
-          </a:p>
-          <a:p>
-            <a:pPr marL="45720" indent="0" algn="l" defTabSz="914400">
-              <a:lnSpc>
-                <a:spcPct val="110000"/>
-              </a:lnSpc>
-              <a:spcBef>
-                <a:spcPts val="1800"/>
-              </a:spcBef>
-              <a:buNone/>
-              <a:tabLst>
-                <a:tab pos="0" algn="l"/>
-              </a:tabLst>
-            </a:pPr>
-            <a:r>
-              <a:rPr lang="en-US" sz="1800" b="0" u="none" strike="noStrike">
-                <a:solidFill>
-                  <a:schemeClr val="dk1">
-                    <a:lumMod val="85000"/>
-                    <a:lumOff val="15000"/>
-                  </a:schemeClr>
-                </a:solidFill>
-                <a:effectLst/>
-                <a:uFillTx/>
-                <a:latin typeface="Century Gothic"/>
-                <a:ea typeface="Century Gothic"/>
-              </a:rPr>
-              <a:t>VM </a:t>
-            </a:r>
-            <a:r>
-              <a:rPr lang="zh-TW" sz="1800" b="0" u="none" strike="noStrike">
-                <a:solidFill>
-                  <a:schemeClr val="dk1">
-                    <a:lumMod val="85000"/>
-                    <a:lumOff val="15000"/>
-                  </a:schemeClr>
-                </a:solidFill>
-                <a:effectLst/>
-                <a:uFillTx/>
-                <a:latin typeface="Century Gothic"/>
-                <a:ea typeface="Century Gothic"/>
-              </a:rPr>
-              <a:t>上目錄結構與 </a:t>
-            </a:r>
-            <a:r>
-              <a:rPr lang="en-US" sz="1800" b="0" u="none" strike="noStrike">
-                <a:solidFill>
-                  <a:schemeClr val="dk1">
-                    <a:lumMod val="85000"/>
-                    <a:lumOff val="15000"/>
-                  </a:schemeClr>
-                </a:solidFill>
-                <a:effectLst/>
-                <a:uFillTx/>
-                <a:latin typeface="Century Gothic"/>
-                <a:ea typeface="Century Gothic"/>
-              </a:rPr>
-              <a:t>Local </a:t>
-            </a:r>
-            <a:r>
-              <a:rPr lang="zh-TW" sz="1800" b="1" u="none" strike="noStrike">
-                <a:solidFill>
-                  <a:schemeClr val="dk1">
-                    <a:lumMod val="85000"/>
-                    <a:lumOff val="15000"/>
-                  </a:schemeClr>
-                </a:solidFill>
-                <a:effectLst/>
-                <a:uFillTx/>
-                <a:latin typeface="Century Gothic"/>
-                <a:ea typeface="Century Gothic"/>
-              </a:rPr>
-              <a:t>相同</a:t>
-            </a:r>
-            <a:r>
-              <a:rPr lang="zh-TW" sz="1800" b="0" u="none" strike="noStrike">
-                <a:solidFill>
-                  <a:schemeClr val="dk1">
-                    <a:lumMod val="85000"/>
-                    <a:lumOff val="15000"/>
-                  </a:schemeClr>
-                </a:solidFill>
-                <a:effectLst/>
-                <a:uFillTx/>
-                <a:latin typeface="Century Gothic"/>
-                <a:ea typeface="Century Gothic"/>
-              </a:rPr>
-              <a:t>，但</a:t>
-            </a:r>
-            <a:r>
-              <a:rPr lang="zh-TW" sz="1800" b="1" u="none" strike="noStrike">
-                <a:solidFill>
-                  <a:schemeClr val="dk1">
-                    <a:lumMod val="85000"/>
-                    <a:lumOff val="15000"/>
-                  </a:schemeClr>
-                </a:solidFill>
-                <a:effectLst/>
-                <a:uFillTx/>
-                <a:latin typeface="Century Gothic"/>
-                <a:ea typeface="Century Gothic"/>
-              </a:rPr>
-              <a:t>不是 </a:t>
-            </a:r>
-            <a:r>
-              <a:rPr lang="en-US" sz="1800" b="1" u="none" strike="noStrike">
-                <a:solidFill>
-                  <a:schemeClr val="dk1">
-                    <a:lumMod val="85000"/>
-                    <a:lumOff val="15000"/>
-                  </a:schemeClr>
-                </a:solidFill>
-                <a:effectLst/>
-                <a:uFillTx/>
-                <a:latin typeface="Century Gothic"/>
-                <a:ea typeface="Century Gothic"/>
-              </a:rPr>
-              <a:t>git repo</a:t>
-            </a:r>
-            <a:r>
-              <a:rPr lang="zh-TW" sz="1800" b="0" u="none" strike="noStrike">
-                <a:solidFill>
-                  <a:schemeClr val="dk1">
-                    <a:lumMod val="85000"/>
-                    <a:lumOff val="15000"/>
-                  </a:schemeClr>
-                </a:solidFill>
-                <a:effectLst/>
-                <a:uFillTx/>
-                <a:latin typeface="Century Gothic"/>
-                <a:ea typeface="Century Gothic"/>
-              </a:rPr>
-              <a:t>（課程建議刪掉 </a:t>
-            </a:r>
-            <a:r>
-              <a:rPr lang="en-US" sz="1800" b="0" u="none" strike="noStrike">
-                <a:solidFill>
-                  <a:schemeClr val="dk1">
-                    <a:lumMod val="85000"/>
-                    <a:lumOff val="15000"/>
-                  </a:schemeClr>
-                </a:solidFill>
-                <a:effectLst/>
-                <a:uFillTx/>
-                <a:latin typeface="Century Gothic"/>
-                <a:ea typeface="Century Gothic"/>
-              </a:rPr>
-              <a:t>.git</a:t>
-            </a:r>
-            <a:r>
-              <a:rPr lang="zh-TW" sz="1800" b="0" u="none" strike="noStrike">
-                <a:solidFill>
-                  <a:schemeClr val="dk1">
-                    <a:lumMod val="85000"/>
-                    <a:lumOff val="15000"/>
-                  </a:schemeClr>
-                </a:solidFill>
-                <a:effectLst/>
-                <a:uFillTx/>
-                <a:latin typeface="Century Gothic"/>
-                <a:ea typeface="Century Gothic"/>
-              </a:rPr>
-              <a:t>）</a:t>
-            </a:r>
-            <a:endParaRPr lang="en-US" sz="1800" b="0" u="none" strike="noStrike">
-              <a:solidFill>
-                <a:schemeClr val="dk1">
-                  <a:lumMod val="85000"/>
-                  <a:lumOff val="15000"/>
-                </a:schemeClr>
-              </a:solidFill>
-              <a:effectLst/>
-              <a:uFillTx/>
-              <a:latin typeface="Century Gothic"/>
-            </a:endParaRPr>
-          </a:p>
-          <a:p>
-            <a:pPr marL="45720" indent="0" algn="l" defTabSz="914400">
-              <a:lnSpc>
-                <a:spcPct val="110000"/>
-              </a:lnSpc>
-              <a:spcBef>
-                <a:spcPts val="1800"/>
-              </a:spcBef>
-              <a:buNone/>
-              <a:tabLst>
-                <a:tab pos="0" algn="l"/>
-              </a:tabLst>
-            </a:pPr>
-            <a:r>
-              <a:rPr lang="zh-TW" sz="1800" b="1" u="none" strike="noStrike">
-                <a:solidFill>
-                  <a:schemeClr val="dk1">
-                    <a:lumMod val="85000"/>
-                    <a:lumOff val="15000"/>
-                  </a:schemeClr>
-                </a:solidFill>
-                <a:effectLst/>
-                <a:uFillTx/>
-                <a:latin typeface="Century Gothic"/>
-                <a:ea typeface="Century Gothic"/>
-              </a:rPr>
-              <a:t>注意</a:t>
-            </a:r>
-            <a:r>
-              <a:rPr lang="zh-TW" sz="1800" b="0" u="none" strike="noStrike">
-                <a:solidFill>
-                  <a:schemeClr val="dk1">
-                    <a:lumMod val="85000"/>
-                    <a:lumOff val="15000"/>
-                  </a:schemeClr>
-                </a:solidFill>
-                <a:effectLst/>
-                <a:uFillTx/>
-                <a:latin typeface="Century Gothic"/>
-                <a:ea typeface="Century Gothic"/>
-              </a:rPr>
-              <a:t>：</a:t>
-            </a:r>
-            <a:r>
-              <a:rPr lang="en-US" sz="1800" b="0" u="none" strike="noStrike">
-                <a:solidFill>
-                  <a:schemeClr val="dk1">
-                    <a:lumMod val="85000"/>
-                    <a:lumOff val="15000"/>
-                  </a:schemeClr>
-                </a:solidFill>
-                <a:effectLst/>
-                <a:uFillTx/>
-                <a:latin typeface="Century Gothic"/>
-                <a:ea typeface="Century Gothic"/>
-              </a:rPr>
-              <a:t>VM </a:t>
-            </a:r>
-            <a:r>
-              <a:rPr lang="zh-TW" sz="1800" b="0" u="none" strike="noStrike">
-                <a:solidFill>
-                  <a:schemeClr val="dk1">
-                    <a:lumMod val="85000"/>
-                    <a:lumOff val="15000"/>
-                  </a:schemeClr>
-                </a:solidFill>
-                <a:effectLst/>
-                <a:uFillTx/>
-                <a:latin typeface="Century Gothic"/>
-                <a:ea typeface="Century Gothic"/>
-              </a:rPr>
-              <a:t>上的 </a:t>
-            </a:r>
-            <a:r>
-              <a:rPr lang="en-US" sz="1800" b="0" u="none" strike="noStrike">
-                <a:solidFill>
-                  <a:schemeClr val="dk1">
-                    <a:lumMod val="85000"/>
-                    <a:lumOff val="15000"/>
-                  </a:schemeClr>
-                </a:solidFill>
-                <a:effectLst/>
-                <a:uFillTx/>
-                <a:latin typeface="Century Gothic"/>
-                <a:ea typeface="Century Gothic"/>
-              </a:rPr>
-              <a:t>.env</a:t>
-            </a:r>
-            <a:r>
-              <a:rPr lang="zh-TW" sz="1800" b="0" u="none" strike="noStrike">
-                <a:solidFill>
-                  <a:schemeClr val="dk1">
-                    <a:lumMod val="85000"/>
-                    <a:lumOff val="15000"/>
-                  </a:schemeClr>
-                </a:solidFill>
-                <a:effectLst/>
-                <a:uFillTx/>
-                <a:latin typeface="Century Gothic"/>
-                <a:ea typeface="Century Gothic"/>
-              </a:rPr>
-              <a:t>、</a:t>
-            </a:r>
-            <a:r>
-              <a:rPr lang="en-US" sz="1800" b="0" u="none" strike="noStrike">
-                <a:solidFill>
-                  <a:schemeClr val="dk1">
-                    <a:lumMod val="85000"/>
-                    <a:lumOff val="15000"/>
-                  </a:schemeClr>
-                </a:solidFill>
-                <a:effectLst/>
-                <a:uFillTx/>
-                <a:latin typeface="Century Gothic"/>
-                <a:ea typeface="Century Gothic"/>
-              </a:rPr>
-              <a:t>logs/</a:t>
-            </a:r>
-            <a:r>
-              <a:rPr lang="zh-TW" sz="1800" b="0" u="none" strike="noStrike">
-                <a:solidFill>
-                  <a:schemeClr val="dk1">
-                    <a:lumMod val="85000"/>
-                    <a:lumOff val="15000"/>
-                  </a:schemeClr>
-                </a:solidFill>
-                <a:effectLst/>
-                <a:uFillTx/>
-                <a:latin typeface="Century Gothic"/>
-                <a:ea typeface="Century Gothic"/>
-              </a:rPr>
-              <a:t>、</a:t>
-            </a:r>
-            <a:r>
-              <a:rPr lang="en-US" sz="1800" b="0" u="none" strike="noStrike">
-                <a:solidFill>
-                  <a:schemeClr val="dk1">
-                    <a:lumMod val="85000"/>
-                    <a:lumOff val="15000"/>
-                  </a:schemeClr>
-                </a:solidFill>
-                <a:effectLst/>
-                <a:uFillTx/>
-                <a:latin typeface="Century Gothic"/>
-                <a:ea typeface="Century Gothic"/>
-              </a:rPr>
-              <a:t>cache/ </a:t>
-            </a:r>
-            <a:r>
-              <a:rPr lang="zh-TW" sz="1800" b="0" u="none" strike="noStrike">
-                <a:solidFill>
-                  <a:schemeClr val="dk1">
-                    <a:lumMod val="85000"/>
-                    <a:lumOff val="15000"/>
-                  </a:schemeClr>
-                </a:solidFill>
-                <a:effectLst/>
-                <a:uFillTx/>
-                <a:latin typeface="Century Gothic"/>
-                <a:ea typeface="Century Gothic"/>
-              </a:rPr>
-              <a:t>是「活資料」——程式每天在寫</a:t>
-            </a:r>
-            <a:endParaRPr lang="en-US" sz="1800" b="0" u="none" strike="noStrike">
-              <a:solidFill>
-                <a:schemeClr val="dk1">
-                  <a:lumMod val="85000"/>
-                  <a:lumOff val="15000"/>
-                </a:schemeClr>
-              </a:solidFill>
-              <a:effectLst/>
-              <a:uFillTx/>
-              <a:latin typeface="Century Gothic"/>
-            </a:endParaRPr>
-          </a:p>
-          <a:p>
-            <a:pPr marL="45720" indent="0" algn="l" defTabSz="914400">
-              <a:lnSpc>
-                <a:spcPct val="110000"/>
-              </a:lnSpc>
-              <a:spcBef>
-                <a:spcPts val="1800"/>
-              </a:spcBef>
-              <a:buNone/>
-              <a:tabLst>
-                <a:tab pos="0" algn="l"/>
-              </a:tabLst>
-            </a:pPr>
-            <a:endParaRPr lang="en-US" sz="1700" b="0" u="none" strike="noStrike">
-              <a:solidFill>
-                <a:schemeClr val="dk1">
-                  <a:lumMod val="85000"/>
-                  <a:lumOff val="15000"/>
-                </a:schemeClr>
-              </a:solidFill>
-              <a:effectLst/>
-              <a:uFillTx/>
-              <a:latin typeface="Century Gothic"/>
-            </a:endParaRPr>
+          </a:p>
+          <a:p>
+            <a:r>
+              <a:rPr sz="1800" b="1">
+                <a:latin typeface="Century Gothic"/>
+              </a:rPr>
+              <a:t>① Local（開發層）— 你的 WSL</a:t>
+            </a:r>
+          </a:p>
+          <a:p>
+            <a:r>
+              <a:rPr sz="1800" b="1">
+                <a:latin typeface="Century Gothic"/>
+              </a:rPr>
+              <a:t>唯一有 Git repo 的地方，所有程式碼的「源頭」</a:t>
+            </a:r>
+          </a:p>
+          <a:p>
+            <a:r>
+              <a:rPr sz="1800" b="1">
+                <a:latin typeface="Century Gothic"/>
+              </a:rPr>
+              <a:t>放著：主程式源碼、scripts/（含 deploy_source.sh）、.env、esun_sdk（whl 進 git；p12／ini 不進）、Dockerfile</a:t>
+            </a:r>
+          </a:p>
+          <a:p>
+            <a:r>
+              <a:rPr sz="1800" b="1">
+                <a:latin typeface="Century Gothic"/>
+              </a:rPr>
+              <a:t>② GCP VM（部署層）— 雲端主機</a:t>
+            </a:r>
+          </a:p>
+          <a:p>
+            <a:r>
+              <a:rPr sz="1800" b="1">
+                <a:latin typeface="Century Gothic"/>
+              </a:rPr>
+              <a:t>部署方式：./deploy_source.sh（本機建 image → SSH 直傳 → VM 載入 → 驗指紋）</a:t>
+            </a:r>
+          </a:p>
+          <a:p>
+            <a:r>
+              <a:rPr sz="1800" b="1">
+                <a:latin typeface="Century Gothic"/>
+              </a:rPr>
+              <a:t>VM 目錄 ~/tw-selfselect/（非 git repo）；舊目錄 ~/tw-autotrader 保留可回滾</a:t>
+            </a:r>
+          </a:p>
+          <a:p>
+            <a:r>
+              <a:rPr sz="1800" b="1">
+                <a:latin typeface="Century Gothic"/>
+              </a:rPr>
+              <a:t>注意：VM 上的 .env、logs/、cache/ 是「活資料」——程式每天在寫</a:t>
+            </a:r>
+          </a:p>
+          <a:p>
+            <a:r>
+              <a:rPr sz="1800" b="1">
+                <a:latin typeface="Century Gothic"/>
+              </a:rPr>
+              <a:t>③ Docker 容器（執行層）</a:t>
+            </a:r>
+          </a:p>
+          <a:p>
+            <a:r>
+              <a:rPr sz="1800" b="1">
+                <a:latin typeface="Century Gothic"/>
+              </a:rPr>
+              <a:t>tw_selfselect_bot 透過 4 個掛載目錄與 VM 即時連線；映像不可變</a:t>
+            </a:r>
           </a:p>
         </p:txBody>
       </p:sp>
@@ -20304,463 +17638,36 @@
           </a:bodyPr>
           <a:lstStyle/>
           <a:p>
-            <a:pPr defTabSz="914400">
-              <a:lnSpc>
-                <a:spcPct val="100000"/>
-              </a:lnSpc>
-              <a:spcBef>
-                <a:spcPts val="799"/>
-              </a:spcBef>
-              <a:spcAft>
-                <a:spcPts val="400"/>
-              </a:spcAft>
-            </a:pPr>
-            <a:r>
-              <a:rPr lang="en-US" sz="2000" b="1" u="none" strike="noStrike">
-                <a:solidFill>
-                  <a:srgbClr val="0F4761"/>
-                </a:solidFill>
-                <a:effectLst/>
-                <a:uFillTx/>
+            <a:r>
+              <a:rPr sz="2000" b="1">
                 <a:latin typeface="Aptos"/>
-                <a:ea typeface="PMingLiU"/>
-              </a:rPr>
-              <a:t>③ Docker </a:t>
-            </a:r>
-            <a:r>
-              <a:rPr lang="zh-TW" sz="2000" b="1" u="none" strike="noStrike">
-                <a:solidFill>
-                  <a:srgbClr val="0F4761"/>
-                </a:solidFill>
-                <a:effectLst/>
-                <a:uFillTx/>
-                <a:latin typeface="PMingLiU"/>
-                <a:ea typeface="PMingLiU"/>
-              </a:rPr>
-              <a:t>容器（執行層）—</a:t>
-            </a:r>
-            <a:r>
-              <a:rPr lang="en-US" sz="2000" b="1" u="none" strike="noStrike">
-                <a:solidFill>
-                  <a:srgbClr val="0F4761"/>
-                </a:solidFill>
-                <a:effectLst/>
-                <a:uFillTx/>
+              </a:rPr>
+              <a:t>③ Docker 容器（執行層）— VM 內部</a:t>
+            </a:r>
+          </a:p>
+          <a:p>
+            <a:r>
+              <a:rPr sz="2000" b="1">
                 <a:latin typeface="Aptos"/>
-                <a:ea typeface="PMingLiU"/>
-              </a:rPr>
-              <a:t> VM </a:t>
-            </a:r>
-            <a:r>
-              <a:rPr lang="zh-TW" sz="2000" b="1" u="none" strike="noStrike">
-                <a:solidFill>
-                  <a:srgbClr val="0F4761"/>
-                </a:solidFill>
-                <a:effectLst/>
-                <a:uFillTx/>
-                <a:latin typeface="PMingLiU"/>
-                <a:ea typeface="PMingLiU"/>
-              </a:rPr>
-              <a:t>內部</a:t>
-            </a:r>
-            <a:endParaRPr lang="en-US" sz="2000" b="0" u="none" strike="noStrike">
-              <a:solidFill>
-                <a:srgbClr val="000000"/>
-              </a:solidFill>
-              <a:effectLst/>
-              <a:uFillTx/>
-              <a:latin typeface="Arial"/>
-            </a:endParaRPr>
-          </a:p>
-          <a:p>
-            <a:pPr marL="343080" indent="-343080" defTabSz="914400">
-              <a:lnSpc>
-                <a:spcPct val="100000"/>
-              </a:lnSpc>
-              <a:spcBef>
-                <a:spcPts val="181"/>
-              </a:spcBef>
-              <a:spcAft>
-                <a:spcPts val="181"/>
-              </a:spcAft>
-              <a:buClr>
-                <a:srgbClr val="000000"/>
-              </a:buClr>
-              <a:buFont typeface="Symbol" charset="2"/>
-              <a:buChar char=""/>
-            </a:pPr>
-            <a:r>
-              <a:rPr lang="en-US" sz="1600" b="0" u="none" strike="noStrike">
-                <a:solidFill>
-                  <a:schemeClr val="dk1"/>
-                </a:solidFill>
-                <a:effectLst/>
-                <a:uFillTx/>
-                <a:latin typeface="Consolas"/>
-                <a:ea typeface="PMingLiU"/>
-              </a:rPr>
-              <a:t>docker compose up -d</a:t>
-            </a:r>
-            <a:r>
-              <a:rPr lang="en-US" sz="1800" b="0" u="none" strike="noStrike">
-                <a:solidFill>
-                  <a:schemeClr val="dk1"/>
-                </a:solidFill>
-                <a:effectLst/>
-                <a:uFillTx/>
+              </a:rPr>
+              <a:t>docker compose up -d 啟動容器，CMD: python selfselect_trader.py 在容器內實際執行</a:t>
+            </a:r>
+          </a:p>
+          <a:p>
+            <a:r>
+              <a:rPr sz="2000" b="1">
                 <a:latin typeface="Aptos"/>
-                <a:ea typeface="PMingLiU"/>
-              </a:rPr>
-              <a:t> </a:t>
-            </a:r>
-            <a:r>
-              <a:rPr lang="zh-TW" sz="1800" b="0" u="none" strike="noStrike">
-                <a:solidFill>
-                  <a:schemeClr val="dk1"/>
-                </a:solidFill>
-                <a:effectLst/>
-                <a:uFillTx/>
-                <a:latin typeface="PMingLiU"/>
-                <a:ea typeface="PMingLiU"/>
-              </a:rPr>
-              <a:t>啟動容器，</a:t>
-            </a:r>
-            <a:r>
-              <a:rPr lang="en-US" sz="1600" b="0" u="none" strike="noStrike">
-                <a:solidFill>
-                  <a:schemeClr val="dk1"/>
-                </a:solidFill>
-                <a:effectLst/>
-                <a:uFillTx/>
-                <a:latin typeface="Consolas"/>
-                <a:ea typeface="PMingLiU"/>
-              </a:rPr>
-              <a:t>CMD: python selfselect_trader.py</a:t>
-            </a:r>
-            <a:r>
-              <a:rPr lang="en-US" sz="1800" b="0" u="none" strike="noStrike">
-                <a:solidFill>
-                  <a:schemeClr val="dk1"/>
-                </a:solidFill>
-                <a:effectLst/>
-                <a:uFillTx/>
+              </a:rPr>
+              <a:t>映像（image）由本機 ./deploy_source.sh 建置後直傳到 VM——容器內的程式是「照片副本」，改 VM 上的檔案不會影響已建的映像</a:t>
+            </a:r>
+          </a:p>
+          <a:p>
+            <a:r>
+              <a:rPr sz="2000" b="1">
                 <a:latin typeface="Aptos"/>
-                <a:ea typeface="PMingLiU"/>
-              </a:rPr>
-              <a:t> </a:t>
-            </a:r>
-            <a:r>
-              <a:rPr lang="zh-TW" sz="1800" b="0" u="none" strike="noStrike">
-                <a:solidFill>
-                  <a:schemeClr val="dk1"/>
-                </a:solidFill>
-                <a:effectLst/>
-                <a:uFillTx/>
-                <a:latin typeface="PMingLiU"/>
-                <a:ea typeface="PMingLiU"/>
-              </a:rPr>
-              <a:t>在容器內</a:t>
-            </a:r>
-            <a:r>
-              <a:rPr lang="zh-TW" sz="1800" b="1" u="none" strike="noStrike">
-                <a:solidFill>
-                  <a:schemeClr val="dk1"/>
-                </a:solidFill>
-                <a:effectLst/>
-                <a:uFillTx/>
-                <a:latin typeface="PMingLiU"/>
-                <a:ea typeface="PMingLiU"/>
-              </a:rPr>
-              <a:t>實際執行</a:t>
-            </a:r>
-            <a:endParaRPr lang="en-US" sz="1800" b="0" u="none" strike="noStrike">
-              <a:solidFill>
-                <a:srgbClr val="000000"/>
-              </a:solidFill>
-              <a:effectLst/>
-              <a:uFillTx/>
-              <a:latin typeface="Arial"/>
-            </a:endParaRPr>
-          </a:p>
-          <a:p>
-            <a:pPr marL="343080" indent="-343080" defTabSz="914400">
-              <a:lnSpc>
-                <a:spcPct val="100000"/>
-              </a:lnSpc>
-              <a:spcBef>
-                <a:spcPts val="181"/>
-              </a:spcBef>
-              <a:spcAft>
-                <a:spcPts val="181"/>
-              </a:spcAft>
-              <a:buClr>
-                <a:srgbClr val="000000"/>
-              </a:buClr>
-              <a:buFont typeface="Symbol" charset="2"/>
-              <a:buChar char=""/>
-            </a:pPr>
-            <a:r>
-              <a:rPr lang="zh-TW" sz="1800" b="0" u="none" strike="noStrike">
-                <a:solidFill>
-                  <a:schemeClr val="dk1"/>
-                </a:solidFill>
-                <a:effectLst/>
-                <a:uFillTx/>
-                <a:latin typeface="Aptos"/>
-                <a:ea typeface="PMingLiU"/>
-              </a:rPr>
-              <a:t>映像（</a:t>
-            </a:r>
-            <a:r>
-              <a:rPr lang="en-US" sz="1800" b="0" u="none" strike="noStrike">
-                <a:solidFill>
-                  <a:schemeClr val="dk1"/>
-                </a:solidFill>
-                <a:effectLst/>
-                <a:uFillTx/>
-                <a:latin typeface="Aptos"/>
-                <a:ea typeface="PMingLiU"/>
-              </a:rPr>
-              <a:t>image</a:t>
-            </a:r>
-            <a:r>
-              <a:rPr lang="zh-TW" sz="1800" b="0" u="none" strike="noStrike">
-                <a:solidFill>
-                  <a:schemeClr val="dk1"/>
-                </a:solidFill>
-                <a:effectLst/>
-                <a:uFillTx/>
-                <a:latin typeface="Aptos"/>
-                <a:ea typeface="PMingLiU"/>
-              </a:rPr>
-              <a:t>）在 </a:t>
-            </a:r>
-            <a:r>
-              <a:rPr lang="en-US" sz="1800" b="0" u="none" strike="noStrike">
-                <a:solidFill>
-                  <a:schemeClr val="dk1"/>
-                </a:solidFill>
-                <a:effectLst/>
-                <a:uFillTx/>
-                <a:latin typeface="Aptos"/>
-                <a:ea typeface="PMingLiU"/>
-              </a:rPr>
-              <a:t>build </a:t>
-            </a:r>
-            <a:r>
-              <a:rPr lang="zh-TW" sz="1800" b="0" u="none" strike="noStrike">
-                <a:solidFill>
-                  <a:schemeClr val="dk1"/>
-                </a:solidFill>
-                <a:effectLst/>
-                <a:uFillTx/>
-                <a:latin typeface="Aptos"/>
-                <a:ea typeface="PMingLiU"/>
-              </a:rPr>
-              <a:t>時把程式碼</a:t>
-            </a:r>
-            <a:r>
-              <a:rPr lang="zh-TW" sz="1800" b="1" u="none" strike="noStrike">
-                <a:solidFill>
-                  <a:schemeClr val="dk1"/>
-                </a:solidFill>
-                <a:effectLst/>
-                <a:uFillTx/>
-                <a:latin typeface="Aptos"/>
-                <a:ea typeface="PMingLiU"/>
-              </a:rPr>
-              <a:t>複製進 </a:t>
-            </a:r>
-            <a:r>
-              <a:rPr lang="en-US" sz="1600" b="1" u="none" strike="noStrike">
-                <a:solidFill>
-                  <a:schemeClr val="dk1"/>
-                </a:solidFill>
-                <a:effectLst/>
-                <a:uFillTx/>
-                <a:latin typeface="Consolas"/>
-                <a:ea typeface="PMingLiU"/>
-              </a:rPr>
-              <a:t>/app/</a:t>
-            </a:r>
-            <a:r>
-              <a:rPr lang="en-US" sz="1800" b="0" u="none" strike="noStrike">
-                <a:solidFill>
-                  <a:schemeClr val="dk1"/>
-                </a:solidFill>
-                <a:effectLst/>
-                <a:uFillTx/>
-                <a:latin typeface="Aptos"/>
-                <a:ea typeface="PMingLiU"/>
-              </a:rPr>
-              <a:t>——</a:t>
-            </a:r>
-            <a:r>
-              <a:rPr lang="zh-TW" sz="1800" b="0" u="none" strike="noStrike">
-                <a:solidFill>
-                  <a:schemeClr val="dk1"/>
-                </a:solidFill>
-                <a:effectLst/>
-                <a:uFillTx/>
-                <a:latin typeface="Aptos"/>
-                <a:ea typeface="PMingLiU"/>
-              </a:rPr>
-              <a:t>容器內的程式是「照片副本」，改 </a:t>
-            </a:r>
-            <a:r>
-              <a:rPr lang="en-US" sz="1800" b="0" u="none" strike="noStrike">
-                <a:solidFill>
-                  <a:schemeClr val="dk1"/>
-                </a:solidFill>
-                <a:effectLst/>
-                <a:uFillTx/>
-                <a:latin typeface="Aptos"/>
-                <a:ea typeface="PMingLiU"/>
-              </a:rPr>
-              <a:t>VM </a:t>
-            </a:r>
-            <a:r>
-              <a:rPr lang="zh-TW" sz="1800" b="0" u="none" strike="noStrike">
-                <a:solidFill>
-                  <a:schemeClr val="dk1"/>
-                </a:solidFill>
-                <a:effectLst/>
-                <a:uFillTx/>
-                <a:latin typeface="Aptos"/>
-                <a:ea typeface="PMingLiU"/>
-              </a:rPr>
-              <a:t>上的檔案不會影響已建的映像</a:t>
-            </a:r>
-            <a:endParaRPr lang="en-US" sz="1800" b="0" u="none" strike="noStrike">
-              <a:solidFill>
-                <a:srgbClr val="000000"/>
-              </a:solidFill>
-              <a:effectLst/>
-              <a:uFillTx/>
-              <a:latin typeface="Arial"/>
-            </a:endParaRPr>
-          </a:p>
-          <a:p>
-            <a:pPr marL="343080" indent="-343080" defTabSz="914400">
-              <a:lnSpc>
-                <a:spcPct val="100000"/>
-              </a:lnSpc>
-              <a:spcBef>
-                <a:spcPts val="181"/>
-              </a:spcBef>
-              <a:spcAft>
-                <a:spcPts val="181"/>
-              </a:spcAft>
-              <a:buClr>
-                <a:srgbClr val="000000"/>
-              </a:buClr>
-              <a:buFont typeface="Symbol" charset="2"/>
-              <a:buChar char=""/>
-            </a:pPr>
-            <a:r>
-              <a:rPr lang="zh-TW" sz="1800" b="1" u="none" strike="noStrike">
-                <a:solidFill>
-                  <a:schemeClr val="dk1"/>
-                </a:solidFill>
-                <a:effectLst/>
-                <a:uFillTx/>
-                <a:latin typeface="Aptos"/>
-                <a:ea typeface="PMingLiU"/>
-              </a:rPr>
-              <a:t>關鍵設計（</a:t>
-            </a:r>
-            <a:r>
-              <a:rPr lang="en-US" sz="1800" b="1" u="none" strike="noStrike">
-                <a:solidFill>
-                  <a:schemeClr val="dk1"/>
-                </a:solidFill>
-                <a:effectLst/>
-                <a:uFillTx/>
-                <a:latin typeface="Aptos"/>
-                <a:ea typeface="PMingLiU"/>
-              </a:rPr>
-              <a:t>volumes </a:t>
-            </a:r>
-            <a:r>
-              <a:rPr lang="zh-TW" sz="1800" b="1" u="none" strike="noStrike">
-                <a:solidFill>
-                  <a:schemeClr val="dk1"/>
-                </a:solidFill>
-                <a:effectLst/>
-                <a:uFillTx/>
-                <a:latin typeface="Aptos"/>
-                <a:ea typeface="PMingLiU"/>
-              </a:rPr>
-              <a:t>掛載）</a:t>
-            </a:r>
-            <a:r>
-              <a:rPr lang="zh-TW" sz="1800" b="0" u="none" strike="noStrike">
-                <a:solidFill>
-                  <a:schemeClr val="dk1"/>
-                </a:solidFill>
-                <a:effectLst/>
-                <a:uFillTx/>
-                <a:latin typeface="Aptos"/>
-                <a:ea typeface="PMingLiU"/>
-              </a:rPr>
-              <a:t>：容器內 </a:t>
-            </a:r>
-            <a:r>
-              <a:rPr lang="en-US" sz="1800" b="0" u="none" strike="noStrike">
-                <a:solidFill>
-                  <a:schemeClr val="dk1"/>
-                </a:solidFill>
-                <a:effectLst/>
-                <a:uFillTx/>
-                <a:latin typeface="Aptos"/>
-                <a:ea typeface="PMingLiU"/>
-              </a:rPr>
-              <a:t>4 </a:t>
-            </a:r>
-            <a:r>
-              <a:rPr lang="zh-TW" sz="1800" b="0" u="none" strike="noStrike">
-                <a:solidFill>
-                  <a:schemeClr val="dk1"/>
-                </a:solidFill>
-                <a:effectLst/>
-                <a:uFillTx/>
-                <a:latin typeface="Aptos"/>
-                <a:ea typeface="PMingLiU"/>
-              </a:rPr>
-              <a:t>個目錄指向 </a:t>
-            </a:r>
-            <a:r>
-              <a:rPr lang="en-US" sz="1800" b="0" u="none" strike="noStrike">
-                <a:solidFill>
-                  <a:schemeClr val="dk1"/>
-                </a:solidFill>
-                <a:effectLst/>
-                <a:uFillTx/>
-                <a:latin typeface="Aptos"/>
-                <a:ea typeface="PMingLiU"/>
-              </a:rPr>
-              <a:t>VM </a:t>
-            </a:r>
-            <a:r>
-              <a:rPr lang="zh-TW" sz="1800" b="0" u="none" strike="noStrike">
-                <a:solidFill>
-                  <a:schemeClr val="dk1"/>
-                </a:solidFill>
-                <a:effectLst/>
-                <a:uFillTx/>
-                <a:latin typeface="Aptos"/>
-                <a:ea typeface="PMingLiU"/>
-              </a:rPr>
-              <a:t>實體目錄：</a:t>
-            </a:r>
-            <a:endParaRPr lang="en-US" sz="1800" b="0" u="none" strike="noStrike">
-              <a:solidFill>
-                <a:srgbClr val="000000"/>
-              </a:solidFill>
-              <a:effectLst/>
-              <a:uFillTx/>
-              <a:latin typeface="Arial"/>
-            </a:endParaRPr>
+              </a:rPr>
+              <a:t>關鍵設計（volumes 掛載）：容器內 4 個目錄指向 VM 實體目錄：</a:t>
+            </a:r>
           </a:p>
         </p:txBody>
       </p:sp>
@@ -20935,680 +17842,68 @@
           </a:bodyPr>
           <a:lstStyle/>
           <a:p>
-            <a:pPr marL="45720" indent="0" algn="l" defTabSz="914400">
-              <a:lnSpc>
-                <a:spcPct val="110000"/>
-              </a:lnSpc>
-              <a:spcBef>
-                <a:spcPts val="1800"/>
-              </a:spcBef>
-              <a:buNone/>
-              <a:tabLst>
-                <a:tab pos="0" algn="l"/>
-              </a:tabLst>
-            </a:pPr>
-            <a:r>
-              <a:rPr lang="zh-TW" sz="1800" b="1" u="none" strike="noStrike">
-                <a:solidFill>
-                  <a:schemeClr val="dk1">
-                    <a:lumMod val="85000"/>
-                    <a:lumOff val="15000"/>
-                  </a:schemeClr>
-                </a:solidFill>
-                <a:effectLst/>
-                <a:uFillTx/>
-                <a:latin typeface="Century Gothic"/>
-                <a:ea typeface="Century Gothic"/>
+            <a:r>
+              <a:rPr sz="1800" b="1">
+                <a:latin typeface="Century Gothic"/>
               </a:rPr>
               <a:t>修改流程</a:t>
             </a:r>
-            <a:endParaRPr lang="en-US" sz="1800" b="0" u="none" strike="noStrike">
-              <a:solidFill>
-                <a:schemeClr val="dk1">
-                  <a:lumMod val="85000"/>
-                  <a:lumOff val="15000"/>
-                </a:schemeClr>
-              </a:solidFill>
-              <a:effectLst/>
-              <a:uFillTx/>
-              <a:latin typeface="Century Gothic"/>
-            </a:endParaRPr>
-          </a:p>
-          <a:p>
-            <a:pPr marL="45720" indent="0" algn="l" defTabSz="914400">
-              <a:lnSpc>
-                <a:spcPct val="110000"/>
-              </a:lnSpc>
-              <a:spcBef>
-                <a:spcPts val="1800"/>
-              </a:spcBef>
-              <a:buNone/>
-              <a:tabLst>
-                <a:tab pos="0" algn="l"/>
-              </a:tabLst>
-            </a:pPr>
-            <a:r>
-              <a:rPr lang="zh-TW" sz="1800" b="0" u="none" strike="noStrike">
-                <a:solidFill>
-                  <a:schemeClr val="dk1">
-                    <a:lumMod val="85000"/>
-                    <a:lumOff val="15000"/>
-                  </a:schemeClr>
-                </a:solidFill>
-                <a:effectLst/>
-                <a:uFillTx/>
-                <a:latin typeface="Century Gothic"/>
-                <a:ea typeface="Century Gothic"/>
-              </a:rPr>
-              <a:t>改程式碼（</a:t>
-            </a:r>
-            <a:r>
-              <a:rPr lang="en-US" sz="1800" b="0" u="none" strike="noStrike">
-                <a:solidFill>
-                  <a:schemeClr val="dk1">
-                    <a:lumMod val="85000"/>
-                    <a:lumOff val="15000"/>
-                  </a:schemeClr>
-                </a:solidFill>
-                <a:effectLst/>
-                <a:uFillTx/>
-                <a:latin typeface="Century Gothic"/>
-                <a:ea typeface="Century Gothic"/>
-              </a:rPr>
-              <a:t>local</a:t>
-            </a:r>
-            <a:r>
-              <a:rPr lang="zh-TW" sz="1800" b="0" u="none" strike="noStrike">
-                <a:solidFill>
-                  <a:schemeClr val="dk1">
-                    <a:lumMod val="85000"/>
-                    <a:lumOff val="15000"/>
-                  </a:schemeClr>
-                </a:solidFill>
-                <a:effectLst/>
-                <a:uFillTx/>
-                <a:latin typeface="Century Gothic"/>
-                <a:ea typeface="Century Gothic"/>
-              </a:rPr>
-              <a:t>）   → </a:t>
-            </a:r>
-            <a:r>
-              <a:rPr lang="en-US" sz="1800" b="0" u="none" strike="noStrike">
-                <a:solidFill>
-                  <a:schemeClr val="dk1">
-                    <a:lumMod val="85000"/>
-                    <a:lumOff val="15000"/>
-                  </a:schemeClr>
-                </a:solidFill>
-                <a:effectLst/>
-                <a:uFillTx/>
-                <a:latin typeface="Century Gothic"/>
-                <a:ea typeface="Century Gothic"/>
-              </a:rPr>
-              <a:t>deploy </a:t>
-            </a:r>
-            <a:r>
-              <a:rPr lang="zh-TW" sz="1800" b="0" u="none" strike="noStrike">
-                <a:solidFill>
-                  <a:schemeClr val="dk1">
-                    <a:lumMod val="85000"/>
-                    <a:lumOff val="15000"/>
-                  </a:schemeClr>
-                </a:solidFill>
-                <a:effectLst/>
-                <a:uFillTx/>
-                <a:latin typeface="Century Gothic"/>
-                <a:ea typeface="Century Gothic"/>
-              </a:rPr>
-              <a:t>腳本上傳 → </a:t>
-            </a:r>
-            <a:r>
-              <a:rPr lang="en-US" sz="1800" b="0" u="none" strike="noStrike">
-                <a:solidFill>
-                  <a:schemeClr val="dk1">
-                    <a:lumMod val="85000"/>
-                    <a:lumOff val="15000"/>
-                  </a:schemeClr>
-                </a:solidFill>
-                <a:effectLst/>
-                <a:uFillTx/>
-                <a:latin typeface="Century Gothic"/>
-                <a:ea typeface="Century Gothic"/>
-              </a:rPr>
-              <a:t>VM </a:t>
-            </a:r>
-            <a:r>
-              <a:rPr lang="zh-TW" sz="1800" b="0" u="none" strike="noStrike">
-                <a:solidFill>
-                  <a:schemeClr val="dk1">
-                    <a:lumMod val="85000"/>
-                    <a:lumOff val="15000"/>
-                  </a:schemeClr>
-                </a:solidFill>
-                <a:effectLst/>
-                <a:uFillTx/>
-                <a:latin typeface="Century Gothic"/>
-                <a:ea typeface="Century Gothic"/>
-              </a:rPr>
-              <a:t>檔案更新 → </a:t>
-            </a:r>
-            <a:r>
-              <a:rPr lang="en-US" sz="1800" b="0" u="none" strike="noStrike">
-                <a:solidFill>
-                  <a:schemeClr val="dk1">
-                    <a:lumMod val="85000"/>
-                    <a:lumOff val="15000"/>
-                  </a:schemeClr>
-                </a:solidFill>
-                <a:effectLst/>
-                <a:uFillTx/>
-                <a:latin typeface="Century Gothic"/>
-                <a:ea typeface="Century Gothic"/>
-              </a:rPr>
-              <a:t>docker compose down/up </a:t>
-            </a:r>
-            <a:r>
-              <a:rPr lang="zh-TW" sz="1800" b="0" u="none" strike="noStrike">
-                <a:solidFill>
-                  <a:schemeClr val="dk1">
-                    <a:lumMod val="85000"/>
-                    <a:lumOff val="15000"/>
-                  </a:schemeClr>
-                </a:solidFill>
-                <a:effectLst/>
-                <a:uFillTx/>
-                <a:latin typeface="Century Gothic"/>
-                <a:ea typeface="Century Gothic"/>
-              </a:rPr>
-              <a:t>重啟容器</a:t>
-            </a:r>
-            <a:br>
-              <a:rPr sz="1800"/>
-            </a:br>
-            <a:r>
-              <a:rPr lang="zh-TW" sz="1800" b="0" u="none" strike="noStrike">
-                <a:solidFill>
-                  <a:schemeClr val="dk1">
-                    <a:lumMod val="85000"/>
-                    <a:lumOff val="15000"/>
-                  </a:schemeClr>
-                </a:solidFill>
-                <a:effectLst/>
-                <a:uFillTx/>
-                <a:latin typeface="Century Gothic"/>
-                <a:ea typeface="Century Gothic"/>
-              </a:rPr>
-              <a:t>改設定（</a:t>
-            </a:r>
-            <a:r>
-              <a:rPr lang="en-US" sz="1800" b="0" u="none" strike="noStrike">
-                <a:solidFill>
-                  <a:schemeClr val="dk1">
-                    <a:lumMod val="85000"/>
-                    <a:lumOff val="15000"/>
-                  </a:schemeClr>
-                </a:solidFill>
-                <a:effectLst/>
-                <a:uFillTx/>
-                <a:latin typeface="Century Gothic"/>
-                <a:ea typeface="Century Gothic"/>
-              </a:rPr>
-              <a:t>.env</a:t>
-            </a:r>
-            <a:r>
-              <a:rPr lang="zh-TW" sz="1800" b="0" u="none" strike="noStrike">
-                <a:solidFill>
-                  <a:schemeClr val="dk1">
-                    <a:lumMod val="85000"/>
-                    <a:lumOff val="15000"/>
-                  </a:schemeClr>
-                </a:solidFill>
-                <a:effectLst/>
-                <a:uFillTx/>
-                <a:latin typeface="Century Gothic"/>
-                <a:ea typeface="Century Gothic"/>
-              </a:rPr>
-              <a:t>）      → 直接編輯 </a:t>
-            </a:r>
-            <a:r>
-              <a:rPr lang="en-US" sz="1800" b="0" u="none" strike="noStrike">
-                <a:solidFill>
-                  <a:schemeClr val="dk1">
-                    <a:lumMod val="85000"/>
-                    <a:lumOff val="15000"/>
-                  </a:schemeClr>
-                </a:solidFill>
-                <a:effectLst/>
-                <a:uFillTx/>
-                <a:latin typeface="Century Gothic"/>
-                <a:ea typeface="Century Gothic"/>
-              </a:rPr>
-              <a:t>VM </a:t>
-            </a:r>
-            <a:r>
-              <a:rPr lang="zh-TW" sz="1800" b="0" u="none" strike="noStrike">
-                <a:solidFill>
-                  <a:schemeClr val="dk1">
-                    <a:lumMod val="85000"/>
-                    <a:lumOff val="15000"/>
-                  </a:schemeClr>
-                </a:solidFill>
-                <a:effectLst/>
-                <a:uFillTx/>
-                <a:latin typeface="Century Gothic"/>
-                <a:ea typeface="Century Gothic"/>
-              </a:rPr>
-              <a:t>的 </a:t>
-            </a:r>
-            <a:r>
-              <a:rPr lang="en-US" sz="1800" b="0" u="none" strike="noStrike">
-                <a:solidFill>
-                  <a:schemeClr val="dk1">
-                    <a:lumMod val="85000"/>
-                    <a:lumOff val="15000"/>
-                  </a:schemeClr>
-                </a:solidFill>
-                <a:effectLst/>
-                <a:uFillTx/>
-                <a:latin typeface="Century Gothic"/>
-                <a:ea typeface="Century Gothic"/>
-              </a:rPr>
-              <a:t>.env</a:t>
-            </a:r>
-            <a:r>
-              <a:rPr lang="zh-TW" sz="1800" b="0" u="none" strike="noStrike">
-                <a:solidFill>
-                  <a:schemeClr val="dk1">
-                    <a:lumMod val="85000"/>
-                    <a:lumOff val="15000"/>
-                  </a:schemeClr>
-                </a:solidFill>
-                <a:effectLst/>
-                <a:uFillTx/>
-                <a:latin typeface="Century Gothic"/>
-                <a:ea typeface="Century Gothic"/>
-              </a:rPr>
-              <a:t>（或 </a:t>
-            </a:r>
-            <a:r>
-              <a:rPr lang="en-US" sz="1800" b="0" u="none" strike="noStrike">
-                <a:solidFill>
-                  <a:schemeClr val="dk1">
-                    <a:lumMod val="85000"/>
-                    <a:lumOff val="15000"/>
-                  </a:schemeClr>
-                </a:solidFill>
-                <a:effectLst/>
-                <a:uFillTx/>
-                <a:latin typeface="Century Gothic"/>
-                <a:ea typeface="Century Gothic"/>
-              </a:rPr>
-              <a:t>local </a:t>
-            </a:r>
-            <a:r>
-              <a:rPr lang="zh-TW" sz="1800" b="0" u="none" strike="noStrike">
-                <a:solidFill>
-                  <a:schemeClr val="dk1">
-                    <a:lumMod val="85000"/>
-                    <a:lumOff val="15000"/>
-                  </a:schemeClr>
-                </a:solidFill>
-                <a:effectLst/>
-                <a:uFillTx/>
-                <a:latin typeface="Century Gothic"/>
-                <a:ea typeface="Century Gothic"/>
-              </a:rPr>
-              <a:t>上傳）→ 容器熱重載或重啟</a:t>
-            </a:r>
-            <a:br>
-              <a:rPr sz="1800"/>
-            </a:br>
-            <a:r>
-              <a:rPr lang="zh-TW" sz="1800" b="0" u="none" strike="noStrike">
-                <a:solidFill>
-                  <a:schemeClr val="dk1">
-                    <a:lumMod val="85000"/>
-                    <a:lumOff val="15000"/>
-                  </a:schemeClr>
-                </a:solidFill>
-                <a:effectLst/>
-                <a:uFillTx/>
-                <a:latin typeface="Century Gothic"/>
-                <a:ea typeface="Century Gothic"/>
-              </a:rPr>
-              <a:t>看日誌             → </a:t>
-            </a:r>
-            <a:r>
-              <a:rPr lang="en-US" sz="1800" b="0" u="none" strike="noStrike">
-                <a:solidFill>
-                  <a:schemeClr val="dk1">
-                    <a:lumMod val="85000"/>
-                    <a:lumOff val="15000"/>
-                  </a:schemeClr>
-                </a:solidFill>
-                <a:effectLst/>
-                <a:uFillTx/>
-                <a:latin typeface="Century Gothic"/>
-                <a:ea typeface="Century Gothic"/>
-              </a:rPr>
-              <a:t>docker logs tw_autotrader_bot --tail 30</a:t>
-            </a:r>
-            <a:endParaRPr lang="en-US" sz="1800" b="0" u="none" strike="noStrike">
-              <a:solidFill>
-                <a:schemeClr val="dk1">
-                  <a:lumMod val="85000"/>
-                  <a:lumOff val="15000"/>
-                </a:schemeClr>
-              </a:solidFill>
-              <a:effectLst/>
-              <a:uFillTx/>
-              <a:latin typeface="Century Gothic"/>
-            </a:endParaRPr>
-          </a:p>
-          <a:p>
-            <a:pPr marL="45720" indent="0" algn="l" defTabSz="914400">
-              <a:lnSpc>
-                <a:spcPct val="110000"/>
-              </a:lnSpc>
-              <a:spcBef>
-                <a:spcPts val="1800"/>
-              </a:spcBef>
-              <a:buNone/>
-              <a:tabLst>
-                <a:tab pos="0" algn="l"/>
-              </a:tabLst>
-            </a:pPr>
-            <a:r>
-              <a:rPr lang="zh-TW" sz="1800" b="1" u="none" strike="noStrike">
-                <a:solidFill>
-                  <a:schemeClr val="dk1">
-                    <a:lumMod val="85000"/>
-                    <a:lumOff val="15000"/>
-                  </a:schemeClr>
-                </a:solidFill>
-                <a:effectLst/>
-                <a:uFillTx/>
-                <a:latin typeface="Century Gothic"/>
-                <a:ea typeface="Century Gothic"/>
+          </a:p>
+          <a:p>
+            <a:r>
+              <a:rPr sz="1800" b="1">
+                <a:latin typeface="Century Gothic"/>
+              </a:rPr>
+              <a:t>改程式碼（local）→ ./deploy_source.sh（人工執行：preflight 測試 → build → SSH 直傳 → VM 載入 → 驗指紋）</a:t>
+            </a:r>
+          </a:p>
+          <a:p>
+            <a:r>
+              <a:rPr sz="1800" b="1">
+                <a:latin typeface="Century Gothic"/>
+              </a:rPr>
+              <a:t>改設定（.env）→ 編輯 VM 的 ~/tw-selfselect/.env → 主程式熱重載（最慢約 1 分鐘）</a:t>
+            </a:r>
+          </a:p>
+          <a:p>
+            <a:r>
+              <a:rPr sz="1800" b="1">
+                <a:latin typeface="Century Gothic"/>
+              </a:rPr>
+              <a:t>看日誌 → sudo docker logs tw_selfselect_bot --tail 30（或直接用 VM_log 別名）</a:t>
+            </a:r>
+          </a:p>
+          <a:p>
+            <a:r>
+              <a:rPr sz="1800" b="1">
+                <a:latin typeface="Century Gothic"/>
               </a:rPr>
               <a:t>白話總結</a:t>
             </a:r>
-            <a:endParaRPr lang="en-US" sz="1800" b="0" u="none" strike="noStrike">
-              <a:solidFill>
-                <a:schemeClr val="dk1">
-                  <a:lumMod val="85000"/>
-                  <a:lumOff val="15000"/>
-                </a:schemeClr>
-              </a:solidFill>
-              <a:effectLst/>
-              <a:uFillTx/>
-              <a:latin typeface="Century Gothic"/>
-            </a:endParaRPr>
-          </a:p>
-          <a:p>
-            <a:pPr marL="45720" indent="0" algn="l" defTabSz="914400">
-              <a:lnSpc>
-                <a:spcPct val="110000"/>
-              </a:lnSpc>
-              <a:spcBef>
-                <a:spcPts val="1800"/>
-              </a:spcBef>
-              <a:buNone/>
-              <a:tabLst>
-                <a:tab pos="0" algn="l"/>
-              </a:tabLst>
-            </a:pPr>
-            <a:r>
-              <a:rPr lang="en-US" sz="1800" b="1" u="none" strike="noStrike">
-                <a:solidFill>
-                  <a:schemeClr val="dk1">
-                    <a:lumMod val="85000"/>
-                    <a:lumOff val="15000"/>
-                  </a:schemeClr>
-                </a:solidFill>
-                <a:effectLst/>
-                <a:uFillTx/>
-                <a:latin typeface="Century Gothic"/>
-                <a:ea typeface="Century Gothic"/>
-              </a:rPr>
-              <a:t>Local</a:t>
-            </a:r>
-            <a:r>
-              <a:rPr lang="en-US" sz="1800" b="0" u="none" strike="noStrike">
-                <a:solidFill>
-                  <a:schemeClr val="dk1">
-                    <a:lumMod val="85000"/>
-                    <a:lumOff val="15000"/>
-                  </a:schemeClr>
-                </a:solidFill>
-                <a:effectLst/>
-                <a:uFillTx/>
-                <a:latin typeface="Century Gothic"/>
-                <a:ea typeface="Century Gothic"/>
-              </a:rPr>
-              <a:t> = </a:t>
-            </a:r>
-            <a:r>
-              <a:rPr lang="zh-TW" sz="1800" b="0" u="none" strike="noStrike">
-                <a:solidFill>
-                  <a:schemeClr val="dk1">
-                    <a:lumMod val="85000"/>
-                    <a:lumOff val="15000"/>
-                  </a:schemeClr>
-                </a:solidFill>
-                <a:effectLst/>
-                <a:uFillTx/>
-                <a:latin typeface="Century Gothic"/>
-                <a:ea typeface="Century Gothic"/>
-              </a:rPr>
-              <a:t>你的「開發車間」，改程式的地方</a:t>
-            </a:r>
-            <a:endParaRPr lang="en-US" sz="1800" b="0" u="none" strike="noStrike">
-              <a:solidFill>
-                <a:schemeClr val="dk1">
-                  <a:lumMod val="85000"/>
-                  <a:lumOff val="15000"/>
-                </a:schemeClr>
-              </a:solidFill>
-              <a:effectLst/>
-              <a:uFillTx/>
-              <a:latin typeface="Century Gothic"/>
-            </a:endParaRPr>
-          </a:p>
-          <a:p>
-            <a:pPr marL="45720" indent="0" algn="l" defTabSz="914400">
-              <a:lnSpc>
-                <a:spcPct val="110000"/>
-              </a:lnSpc>
-              <a:spcBef>
-                <a:spcPts val="1800"/>
-              </a:spcBef>
-              <a:buNone/>
-              <a:tabLst>
-                <a:tab pos="0" algn="l"/>
-              </a:tabLst>
-            </a:pPr>
-            <a:r>
-              <a:rPr lang="en-US" sz="1800" b="1" u="none" strike="noStrike">
-                <a:solidFill>
-                  <a:schemeClr val="dk1">
-                    <a:lumMod val="85000"/>
-                    <a:lumOff val="15000"/>
-                  </a:schemeClr>
-                </a:solidFill>
-                <a:effectLst/>
-                <a:uFillTx/>
-                <a:latin typeface="Century Gothic"/>
-                <a:ea typeface="Century Gothic"/>
-              </a:rPr>
-              <a:t>VM</a:t>
-            </a:r>
-            <a:r>
-              <a:rPr lang="en-US" sz="1800" b="0" u="none" strike="noStrike">
-                <a:solidFill>
-                  <a:schemeClr val="dk1">
-                    <a:lumMod val="85000"/>
-                    <a:lumOff val="15000"/>
-                  </a:schemeClr>
-                </a:solidFill>
-                <a:effectLst/>
-                <a:uFillTx/>
-                <a:latin typeface="Century Gothic"/>
-                <a:ea typeface="Century Gothic"/>
-              </a:rPr>
-              <a:t> = </a:t>
-            </a:r>
-            <a:r>
-              <a:rPr lang="zh-TW" sz="1800" b="0" u="none" strike="noStrike">
-                <a:solidFill>
-                  <a:schemeClr val="dk1">
-                    <a:lumMod val="85000"/>
-                    <a:lumOff val="15000"/>
-                  </a:schemeClr>
-                </a:solidFill>
-                <a:effectLst/>
-                <a:uFillTx/>
-                <a:latin typeface="Century Gothic"/>
-                <a:ea typeface="Century Gothic"/>
-              </a:rPr>
-              <a:t>雲端的「倉庫」，放著要跑的檔案 </a:t>
-            </a:r>
-            <a:r>
-              <a:rPr lang="en-US" sz="1800" b="0" u="none" strike="noStrike">
-                <a:solidFill>
-                  <a:schemeClr val="dk1">
-                    <a:lumMod val="85000"/>
-                    <a:lumOff val="15000"/>
-                  </a:schemeClr>
-                </a:solidFill>
-                <a:effectLst/>
-                <a:uFillTx/>
-                <a:latin typeface="Century Gothic"/>
-                <a:ea typeface="Century Gothic"/>
-              </a:rPr>
-              <a:t>+ </a:t>
-            </a:r>
-            <a:r>
-              <a:rPr lang="zh-TW" sz="1800" b="0" u="none" strike="noStrike">
-                <a:solidFill>
-                  <a:schemeClr val="dk1">
-                    <a:lumMod val="85000"/>
-                    <a:lumOff val="15000"/>
-                  </a:schemeClr>
-                </a:solidFill>
-                <a:effectLst/>
-                <a:uFillTx/>
-                <a:latin typeface="Century Gothic"/>
-                <a:ea typeface="Century Gothic"/>
-              </a:rPr>
-              <a:t>每天產生的資料</a:t>
-            </a:r>
-            <a:endParaRPr lang="en-US" sz="1800" b="0" u="none" strike="noStrike">
-              <a:solidFill>
-                <a:schemeClr val="dk1">
-                  <a:lumMod val="85000"/>
-                  <a:lumOff val="15000"/>
-                </a:schemeClr>
-              </a:solidFill>
-              <a:effectLst/>
-              <a:uFillTx/>
-              <a:latin typeface="Century Gothic"/>
-            </a:endParaRPr>
-          </a:p>
-          <a:p>
-            <a:pPr marL="45720" indent="0" algn="l" defTabSz="914400">
-              <a:lnSpc>
-                <a:spcPct val="110000"/>
-              </a:lnSpc>
-              <a:spcBef>
-                <a:spcPts val="1800"/>
-              </a:spcBef>
-              <a:buNone/>
-              <a:tabLst>
-                <a:tab pos="0" algn="l"/>
-              </a:tabLst>
-            </a:pPr>
-            <a:r>
-              <a:rPr lang="en-US" sz="1800" b="1" u="none" strike="noStrike">
-                <a:solidFill>
-                  <a:schemeClr val="dk1">
-                    <a:lumMod val="85000"/>
-                    <a:lumOff val="15000"/>
-                  </a:schemeClr>
-                </a:solidFill>
-                <a:effectLst/>
-                <a:uFillTx/>
-                <a:latin typeface="Century Gothic"/>
-                <a:ea typeface="Century Gothic"/>
-              </a:rPr>
-              <a:t>Docker</a:t>
-            </a:r>
-            <a:r>
-              <a:rPr lang="en-US" sz="1800" b="0" u="none" strike="noStrike">
-                <a:solidFill>
-                  <a:schemeClr val="dk1">
-                    <a:lumMod val="85000"/>
-                    <a:lumOff val="15000"/>
-                  </a:schemeClr>
-                </a:solidFill>
-                <a:effectLst/>
-                <a:uFillTx/>
-                <a:latin typeface="Century Gothic"/>
-                <a:ea typeface="Century Gothic"/>
-              </a:rPr>
-              <a:t> = </a:t>
-            </a:r>
-            <a:r>
-              <a:rPr lang="zh-TW" sz="1800" b="0" u="none" strike="noStrike">
-                <a:solidFill>
-                  <a:schemeClr val="dk1">
-                    <a:lumMod val="85000"/>
-                    <a:lumOff val="15000"/>
-                  </a:schemeClr>
-                </a:solidFill>
-                <a:effectLst/>
-                <a:uFillTx/>
-                <a:latin typeface="Century Gothic"/>
-                <a:ea typeface="Century Gothic"/>
-              </a:rPr>
-              <a:t>倉庫裡的「封閉作業員」，只照著映像裡的程式碼跑，但設定和資料透過掛載跟倉庫即時連線</a:t>
-            </a:r>
-            <a:endParaRPr lang="en-US" sz="1800" b="0" u="none" strike="noStrike">
-              <a:solidFill>
-                <a:schemeClr val="dk1">
-                  <a:lumMod val="85000"/>
-                  <a:lumOff val="15000"/>
-                </a:schemeClr>
-              </a:solidFill>
-              <a:effectLst/>
-              <a:uFillTx/>
-              <a:latin typeface="Century Gothic"/>
-            </a:endParaRPr>
-          </a:p>
-          <a:p>
-            <a:pPr marL="45720" indent="0" algn="l" defTabSz="914400">
-              <a:lnSpc>
-                <a:spcPct val="110000"/>
-              </a:lnSpc>
-              <a:spcBef>
-                <a:spcPts val="1800"/>
-              </a:spcBef>
-              <a:buNone/>
-              <a:tabLst>
-                <a:tab pos="0" algn="l"/>
-              </a:tabLst>
-            </a:pPr>
-            <a:endParaRPr lang="en-US" sz="1800" b="0" u="none" strike="noStrike">
-              <a:solidFill>
-                <a:schemeClr val="dk1">
-                  <a:lumMod val="85000"/>
-                  <a:lumOff val="15000"/>
-                </a:schemeClr>
-              </a:solidFill>
-              <a:effectLst/>
-              <a:uFillTx/>
-              <a:latin typeface="Century Gothic"/>
-            </a:endParaRPr>
+          </a:p>
+          <a:p>
+            <a:r>
+              <a:rPr sz="1800" b="1">
+                <a:latin typeface="Century Gothic"/>
+              </a:rPr>
+              <a:t>Local = 你的「開發車間」，改程式的地方</a:t>
+            </a:r>
+          </a:p>
+          <a:p>
+            <a:r>
+              <a:rPr sz="1800" b="1">
+                <a:latin typeface="Century Gothic"/>
+              </a:rPr>
+              <a:t>VM = 雲端的「倉庫」，放著要跑的檔案 + 每天產生的資料</a:t>
+            </a:r>
+          </a:p>
+          <a:p>
+            <a:r>
+              <a:rPr sz="1800" b="1">
+                <a:latin typeface="Century Gothic"/>
+              </a:rPr>
+              <a:t>Docker = 倉庫裡的「封閉作業員」，只照著映像裡的程式碼跑，但設定和資料透過掛載跟倉庫即時連線</a:t>
+            </a:r>
           </a:p>
         </p:txBody>
       </p:sp>
@@ -21783,604 +18078,96 @@
           </a:bodyPr>
           <a:lstStyle/>
           <a:p>
-            <a:pPr marL="45720" indent="0" algn="l" defTabSz="914400">
-              <a:lnSpc>
-                <a:spcPct val="110000"/>
-              </a:lnSpc>
-              <a:spcBef>
-                <a:spcPts val="1800"/>
-              </a:spcBef>
-              <a:buNone/>
-              <a:tabLst>
-                <a:tab pos="0" algn="l"/>
-              </a:tabLst>
-            </a:pPr>
-            <a:r>
-              <a:rPr lang="zh-TW" sz="1800" b="1" u="none" strike="noStrike">
-                <a:solidFill>
-                  <a:schemeClr val="dk1">
-                    <a:lumMod val="85000"/>
-                    <a:lumOff val="15000"/>
-                  </a:schemeClr>
-                </a:solidFill>
-                <a:effectLst/>
-                <a:uFillTx/>
-                <a:latin typeface="Century Gothic"/>
-                <a:ea typeface="Century Gothic"/>
+            <a:r>
+              <a:rPr sz="1800" b="1">
+                <a:latin typeface="Century Gothic"/>
               </a:rPr>
               <a:t>常用指令速查</a:t>
             </a:r>
-            <a:endParaRPr lang="en-US" sz="1800" b="0" u="none" strike="noStrike">
-              <a:solidFill>
-                <a:schemeClr val="dk1">
-                  <a:lumMod val="85000"/>
-                  <a:lumOff val="15000"/>
-                </a:schemeClr>
-              </a:solidFill>
-              <a:effectLst/>
-              <a:uFillTx/>
-              <a:latin typeface="Century Gothic"/>
-            </a:endParaRPr>
-          </a:p>
-          <a:p>
-            <a:pPr marL="45720" indent="0" algn="l" defTabSz="914400">
-              <a:lnSpc>
-                <a:spcPct val="110000"/>
-              </a:lnSpc>
-              <a:spcBef>
-                <a:spcPts val="1800"/>
-              </a:spcBef>
-              <a:buNone/>
-              <a:tabLst>
-                <a:tab pos="0" algn="l"/>
-              </a:tabLst>
-            </a:pPr>
-            <a:r>
-              <a:rPr lang="en-US" sz="1800" b="0" i="1" u="none" strike="noStrike">
-                <a:solidFill>
-                  <a:schemeClr val="dk1">
-                    <a:lumMod val="85000"/>
-                    <a:lumOff val="15000"/>
-                  </a:schemeClr>
-                </a:solidFill>
-                <a:effectLst/>
-                <a:uFillTx/>
-                <a:latin typeface="Century Gothic"/>
-                <a:ea typeface="Century Gothic"/>
-              </a:rPr>
-              <a:t># Local</a:t>
-            </a:r>
-            <a:r>
-              <a:rPr lang="zh-TW" sz="1800" b="0" i="1" u="none" strike="noStrike">
-                <a:solidFill>
-                  <a:schemeClr val="dk1">
-                    <a:lumMod val="85000"/>
-                    <a:lumOff val="15000"/>
-                  </a:schemeClr>
-                </a:solidFill>
-                <a:effectLst/>
-                <a:uFillTx/>
-                <a:latin typeface="Century Gothic"/>
-                <a:ea typeface="Century Gothic"/>
-              </a:rPr>
-              <a:t>：部署（加密版 </a:t>
-            </a:r>
-            <a:r>
-              <a:rPr lang="en-US" sz="1800" b="0" i="1" u="none" strike="noStrike">
-                <a:solidFill>
-                  <a:schemeClr val="dk1">
-                    <a:lumMod val="85000"/>
-                    <a:lumOff val="15000"/>
-                  </a:schemeClr>
-                </a:solidFill>
-                <a:effectLst/>
-                <a:uFillTx/>
-                <a:latin typeface="Century Gothic"/>
-                <a:ea typeface="Century Gothic"/>
-              </a:rPr>
-              <a:t>/ </a:t>
-            </a:r>
-            <a:r>
-              <a:rPr lang="zh-TW" sz="1800" b="0" i="1" u="none" strike="noStrike">
-                <a:solidFill>
-                  <a:schemeClr val="dk1">
-                    <a:lumMod val="85000"/>
-                    <a:lumOff val="15000"/>
-                  </a:schemeClr>
-                </a:solidFill>
-                <a:effectLst/>
-                <a:uFillTx/>
-                <a:latin typeface="Century Gothic"/>
-                <a:ea typeface="Century Gothic"/>
-              </a:rPr>
-              <a:t>源碼版）</a:t>
-            </a:r>
-            <a:br>
-              <a:rPr sz="1800"/>
-            </a:br>
-            <a:r>
-              <a:rPr lang="en-US" sz="1800" b="0" u="none" strike="noStrike">
-                <a:solidFill>
-                  <a:schemeClr val="dk1">
-                    <a:lumMod val="85000"/>
-                    <a:lumOff val="15000"/>
-                  </a:schemeClr>
-                </a:solidFill>
-                <a:effectLst/>
-                <a:uFillTx/>
-                <a:latin typeface="Century Gothic"/>
-                <a:ea typeface="Century Gothic"/>
-              </a:rPr>
-              <a:t>./deploy_crypted.sh            </a:t>
-            </a:r>
-            <a:r>
-              <a:rPr lang="en-US" sz="1800" b="0" i="1" u="none" strike="noStrike">
-                <a:solidFill>
-                  <a:schemeClr val="dk1">
-                    <a:lumMod val="85000"/>
-                    <a:lumOff val="15000"/>
-                  </a:schemeClr>
-                </a:solidFill>
-                <a:effectLst/>
-                <a:uFillTx/>
-                <a:latin typeface="Century Gothic"/>
-                <a:ea typeface="Century Gothic"/>
-              </a:rPr>
-              <a:t># </a:t>
-            </a:r>
-            <a:r>
-              <a:rPr lang="zh-TW" sz="1800" b="0" i="1" u="none" strike="noStrike">
-                <a:solidFill>
-                  <a:schemeClr val="dk1">
-                    <a:lumMod val="85000"/>
-                    <a:lumOff val="15000"/>
-                  </a:schemeClr>
-                </a:solidFill>
-                <a:effectLst/>
-                <a:uFillTx/>
-                <a:latin typeface="Century Gothic"/>
-                <a:ea typeface="Century Gothic"/>
-              </a:rPr>
-              <a:t>沒源碼，用加密主程式</a:t>
-            </a:r>
-            <a:br>
-              <a:rPr sz="1800"/>
-            </a:br>
-            <a:r>
-              <a:rPr lang="en-US" sz="1800" b="0" u="none" strike="noStrike">
-                <a:solidFill>
-                  <a:schemeClr val="dk1">
-                    <a:lumMod val="85000"/>
-                    <a:lumOff val="15000"/>
-                  </a:schemeClr>
-                </a:solidFill>
-                <a:effectLst/>
-                <a:uFillTx/>
-                <a:latin typeface="Century Gothic"/>
-                <a:ea typeface="Century Gothic"/>
-              </a:rPr>
-              <a:t>./deploy_user.sh                  </a:t>
-            </a:r>
-            <a:r>
-              <a:rPr lang="en-US" sz="1800" b="0" i="1" u="none" strike="noStrike">
-                <a:solidFill>
-                  <a:schemeClr val="dk1">
-                    <a:lumMod val="85000"/>
-                    <a:lumOff val="15000"/>
-                  </a:schemeClr>
-                </a:solidFill>
-                <a:effectLst/>
-                <a:uFillTx/>
-                <a:latin typeface="Century Gothic"/>
-                <a:ea typeface="Century Gothic"/>
-              </a:rPr>
-              <a:t># </a:t>
-            </a:r>
-            <a:r>
-              <a:rPr lang="zh-TW" sz="1800" b="0" i="1" u="none" strike="noStrike">
-                <a:solidFill>
-                  <a:schemeClr val="dk1">
-                    <a:lumMod val="85000"/>
-                    <a:lumOff val="15000"/>
-                  </a:schemeClr>
-                </a:solidFill>
-                <a:effectLst/>
-                <a:uFillTx/>
-                <a:latin typeface="Century Gothic"/>
-                <a:ea typeface="Century Gothic"/>
-              </a:rPr>
-              <a:t>有源碼</a:t>
-            </a:r>
-            <a:br>
-              <a:rPr sz="1800"/>
-            </a:br>
-            <a:br>
-              <a:rPr sz="1800"/>
-            </a:br>
-            <a:r>
-              <a:rPr lang="en-US" sz="1800" b="0" i="1" u="none" strike="noStrike">
-                <a:solidFill>
-                  <a:schemeClr val="dk1">
-                    <a:lumMod val="85000"/>
-                    <a:lumOff val="15000"/>
-                  </a:schemeClr>
-                </a:solidFill>
-                <a:effectLst/>
-                <a:uFillTx/>
-                <a:latin typeface="Century Gothic"/>
-                <a:ea typeface="Century Gothic"/>
-              </a:rPr>
-              <a:t># VM</a:t>
-            </a:r>
-            <a:r>
-              <a:rPr lang="zh-TW" sz="1800" b="0" i="1" u="none" strike="noStrike">
-                <a:solidFill>
-                  <a:schemeClr val="dk1">
-                    <a:lumMod val="85000"/>
-                    <a:lumOff val="15000"/>
-                  </a:schemeClr>
-                </a:solidFill>
-                <a:effectLst/>
-                <a:uFillTx/>
-                <a:latin typeface="Century Gothic"/>
-                <a:ea typeface="Century Gothic"/>
-              </a:rPr>
-              <a:t>：啟動</a:t>
-            </a:r>
-            <a:r>
-              <a:rPr lang="en-US" sz="1800" b="0" i="1" u="none" strike="noStrike">
-                <a:solidFill>
-                  <a:schemeClr val="dk1">
-                    <a:lumMod val="85000"/>
-                    <a:lumOff val="15000"/>
-                  </a:schemeClr>
-                </a:solidFill>
-                <a:effectLst/>
-                <a:uFillTx/>
-                <a:latin typeface="Century Gothic"/>
-                <a:ea typeface="Century Gothic"/>
-              </a:rPr>
-              <a:t>/</a:t>
-            </a:r>
-            <a:r>
-              <a:rPr lang="zh-TW" sz="1800" b="0" i="1" u="none" strike="noStrike">
-                <a:solidFill>
-                  <a:schemeClr val="dk1">
-                    <a:lumMod val="85000"/>
-                    <a:lumOff val="15000"/>
-                  </a:schemeClr>
-                </a:solidFill>
-                <a:effectLst/>
-                <a:uFillTx/>
-                <a:latin typeface="Century Gothic"/>
-                <a:ea typeface="Century Gothic"/>
-              </a:rPr>
-              <a:t>重啟容器 也可以從網頁控制</a:t>
-            </a:r>
-            <a:br>
-              <a:rPr sz="1800"/>
-            </a:br>
-            <a:r>
-              <a:rPr lang="en-US" sz="1800" b="0" u="none" strike="noStrike">
-                <a:solidFill>
-                  <a:schemeClr val="dk1">
-                    <a:lumMod val="85000"/>
-                    <a:lumOff val="15000"/>
-                  </a:schemeClr>
-                </a:solidFill>
-                <a:effectLst/>
-                <a:uFillTx/>
-                <a:latin typeface="Century Gothic"/>
-                <a:ea typeface="Century Gothic"/>
-              </a:rPr>
-              <a:t>sudo docker compose down </a:t>
-            </a:r>
-            <a:r>
-              <a:rPr lang="en-US" sz="1800" b="1" u="none" strike="noStrike">
-                <a:solidFill>
-                  <a:schemeClr val="dk1">
-                    <a:lumMod val="85000"/>
-                    <a:lumOff val="15000"/>
-                  </a:schemeClr>
-                </a:solidFill>
-                <a:effectLst/>
-                <a:uFillTx/>
-                <a:latin typeface="Century Gothic"/>
-                <a:ea typeface="Century Gothic"/>
-              </a:rPr>
-              <a:t>&amp;&amp;</a:t>
-            </a:r>
-            <a:r>
-              <a:rPr lang="en-US" sz="1800" b="0" u="none" strike="noStrike">
-                <a:solidFill>
-                  <a:schemeClr val="dk1">
-                    <a:lumMod val="85000"/>
-                    <a:lumOff val="15000"/>
-                  </a:schemeClr>
-                </a:solidFill>
-                <a:effectLst/>
-                <a:uFillTx/>
-                <a:latin typeface="Century Gothic"/>
-                <a:ea typeface="Century Gothic"/>
-              </a:rPr>
-              <a:t> sudo docker compose up -d</a:t>
-            </a:r>
-            <a:br>
-              <a:rPr sz="1800"/>
-            </a:br>
-            <a:br>
-              <a:rPr sz="1800"/>
-            </a:br>
-            <a:r>
-              <a:rPr lang="en-US" sz="1800" b="0" i="1" u="none" strike="noStrike">
-                <a:solidFill>
-                  <a:schemeClr val="dk1">
-                    <a:lumMod val="85000"/>
-                    <a:lumOff val="15000"/>
-                  </a:schemeClr>
-                </a:solidFill>
-                <a:effectLst/>
-                <a:uFillTx/>
-                <a:latin typeface="Century Gothic"/>
-                <a:ea typeface="Century Gothic"/>
-              </a:rPr>
-              <a:t># VM</a:t>
-            </a:r>
-            <a:r>
-              <a:rPr lang="zh-TW" sz="1800" b="0" i="1" u="none" strike="noStrike">
-                <a:solidFill>
-                  <a:schemeClr val="dk1">
-                    <a:lumMod val="85000"/>
-                    <a:lumOff val="15000"/>
-                  </a:schemeClr>
-                </a:solidFill>
-                <a:effectLst/>
-                <a:uFillTx/>
-                <a:latin typeface="Century Gothic"/>
-                <a:ea typeface="Century Gothic"/>
-              </a:rPr>
-              <a:t>：看日誌 或 使用 </a:t>
-            </a:r>
-            <a:r>
-              <a:rPr lang="en-US" sz="1800" b="0" i="1" u="none" strike="noStrike">
-                <a:solidFill>
-                  <a:schemeClr val="dk1">
-                    <a:lumMod val="85000"/>
-                    <a:lumOff val="15000"/>
-                  </a:schemeClr>
-                </a:solidFill>
-                <a:effectLst/>
-                <a:uFillTx/>
-                <a:latin typeface="Century Gothic"/>
-                <a:ea typeface="Century Gothic"/>
-              </a:rPr>
-              <a:t>VM_log</a:t>
-            </a:r>
-            <a:br>
-              <a:rPr sz="1800"/>
-            </a:br>
-            <a:r>
-              <a:rPr lang="en-US" sz="1800" b="0" u="none" strike="noStrike">
-                <a:solidFill>
-                  <a:schemeClr val="dk1">
-                    <a:lumMod val="85000"/>
-                    <a:lumOff val="15000"/>
-                  </a:schemeClr>
-                </a:solidFill>
-                <a:effectLst/>
-                <a:uFillTx/>
-                <a:latin typeface="Century Gothic"/>
-                <a:ea typeface="Century Gothic"/>
-              </a:rPr>
-              <a:t>sudo docker logs tw_autotrader_bot --tail 30</a:t>
-            </a:r>
-            <a:br>
-              <a:rPr sz="1800"/>
-            </a:br>
-            <a:br>
-              <a:rPr sz="1800"/>
-            </a:br>
-            <a:r>
-              <a:rPr lang="en-US" sz="1800" b="0" i="1" u="none" strike="noStrike">
-                <a:solidFill>
-                  <a:schemeClr val="dk1">
-                    <a:lumMod val="85000"/>
-                    <a:lumOff val="15000"/>
-                  </a:schemeClr>
-                </a:solidFill>
-                <a:effectLst/>
-                <a:uFillTx/>
-                <a:latin typeface="Century Gothic"/>
-                <a:ea typeface="Century Gothic"/>
-              </a:rPr>
-              <a:t># VM</a:t>
-            </a:r>
-            <a:r>
-              <a:rPr lang="zh-TW" sz="1800" b="0" i="1" u="none" strike="noStrike">
-                <a:solidFill>
-                  <a:schemeClr val="dk1">
-                    <a:lumMod val="85000"/>
-                    <a:lumOff val="15000"/>
-                  </a:schemeClr>
-                </a:solidFill>
-                <a:effectLst/>
-                <a:uFillTx/>
-                <a:latin typeface="Century Gothic"/>
-                <a:ea typeface="Century Gothic"/>
-              </a:rPr>
-              <a:t>：看容器狀態</a:t>
-            </a:r>
-            <a:br>
-              <a:rPr sz="1800"/>
-            </a:br>
-            <a:r>
-              <a:rPr lang="en-US" sz="1800" b="0" u="none" strike="noStrike">
-                <a:solidFill>
-                  <a:schemeClr val="dk1">
-                    <a:lumMod val="85000"/>
-                    <a:lumOff val="15000"/>
-                  </a:schemeClr>
-                </a:solidFill>
-                <a:effectLst/>
-                <a:uFillTx/>
-                <a:latin typeface="Century Gothic"/>
-                <a:ea typeface="Century Gothic"/>
+          </a:p>
+          <a:p>
+            <a:r>
+              <a:rPr sz="1800" b="1">
+                <a:latin typeface="Century Gothic"/>
+              </a:rPr>
+              <a:t># Local：部署（人工執行；內含 preflight 測試與指紋驗證）</a:t>
+            </a:r>
+          </a:p>
+          <a:p>
+            <a:r>
+              <a:rPr sz="1800" b="1">
+                <a:latin typeface="Century Gothic"/>
+              </a:rPr>
+              <a:t>./deploy_source.sh</a:t>
+            </a:r>
+          </a:p>
+          <a:p/>
+          <a:p>
+            <a:r>
+              <a:rPr sz="1800" b="1">
+                <a:latin typeface="Century Gothic"/>
+              </a:rPr>
+              <a:t># VM：重啟容器</a:t>
+            </a:r>
+          </a:p>
+          <a:p>
+            <a:r>
+              <a:rPr sz="1800" b="1">
+                <a:latin typeface="Century Gothic"/>
+              </a:rPr>
+              <a:t>cd ~/tw-selfselect &amp;&amp; sudo docker compose down &amp;&amp; sudo docker compose up -d</a:t>
+            </a:r>
+          </a:p>
+          <a:p/>
+          <a:p>
+            <a:r>
+              <a:rPr sz="1800" b="1">
+                <a:latin typeface="Century Gothic"/>
+              </a:rPr>
+              <a:t># VM：看日誌（也可以用 VM_log 別名）</a:t>
+            </a:r>
+          </a:p>
+          <a:p>
+            <a:r>
+              <a:rPr sz="1800" b="1">
+                <a:latin typeface="Century Gothic"/>
+              </a:rPr>
+              <a:t>sudo docker logs tw_selfselect_bot --tail 30</a:t>
+            </a:r>
+          </a:p>
+          <a:p/>
+          <a:p>
+            <a:r>
+              <a:rPr sz="1800" b="1">
+                <a:latin typeface="Century Gothic"/>
+              </a:rPr>
+              <a:t># VM：看容器狀態</a:t>
+            </a:r>
+          </a:p>
+          <a:p>
+            <a:r>
+              <a:rPr sz="1800" b="1">
+                <a:latin typeface="Century Gothic"/>
               </a:rPr>
               <a:t>sudo docker ps</a:t>
             </a:r>
-            <a:br>
-              <a:rPr sz="1800"/>
-            </a:br>
-            <a:br>
-              <a:rPr sz="1800"/>
-            </a:br>
-            <a:r>
-              <a:rPr lang="en-US" sz="1800" b="0" i="1" u="none" strike="noStrike">
-                <a:solidFill>
-                  <a:schemeClr val="dk1">
-                    <a:lumMod val="85000"/>
-                    <a:lumOff val="15000"/>
-                  </a:schemeClr>
-                </a:solidFill>
-                <a:effectLst/>
-                <a:uFillTx/>
-                <a:latin typeface="Century Gothic"/>
-                <a:ea typeface="Century Gothic"/>
-              </a:rPr>
-              <a:t># Local</a:t>
-            </a:r>
-            <a:r>
-              <a:rPr lang="zh-TW" sz="1800" b="0" i="1" u="none" strike="noStrike">
-                <a:solidFill>
-                  <a:schemeClr val="dk1">
-                    <a:lumMod val="85000"/>
-                    <a:lumOff val="15000"/>
-                  </a:schemeClr>
-                </a:solidFill>
-                <a:effectLst/>
-                <a:uFillTx/>
-                <a:latin typeface="Century Gothic"/>
-                <a:ea typeface="Century Gothic"/>
-              </a:rPr>
-              <a:t>：</a:t>
-            </a:r>
-            <a:r>
-              <a:rPr lang="en-US" sz="1800" b="0" i="1" u="none" strike="noStrike">
-                <a:solidFill>
-                  <a:schemeClr val="dk1">
-                    <a:lumMod val="85000"/>
-                    <a:lumOff val="15000"/>
-                  </a:schemeClr>
-                </a:solidFill>
-                <a:effectLst/>
-                <a:uFillTx/>
-                <a:latin typeface="Century Gothic"/>
-                <a:ea typeface="Century Gothic"/>
-              </a:rPr>
-              <a:t>SSH </a:t>
-            </a:r>
-            <a:r>
-              <a:rPr lang="zh-TW" sz="1800" b="0" i="1" u="none" strike="noStrike">
-                <a:solidFill>
-                  <a:schemeClr val="dk1">
-                    <a:lumMod val="85000"/>
-                    <a:lumOff val="15000"/>
-                  </a:schemeClr>
-                </a:solidFill>
-                <a:effectLst/>
-                <a:uFillTx/>
-                <a:latin typeface="Century Gothic"/>
-                <a:ea typeface="Century Gothic"/>
-              </a:rPr>
-              <a:t>進 </a:t>
-            </a:r>
-            <a:r>
-              <a:rPr lang="en-US" sz="1800" b="0" i="1" u="none" strike="noStrike">
-                <a:solidFill>
-                  <a:schemeClr val="dk1">
-                    <a:lumMod val="85000"/>
-                    <a:lumOff val="15000"/>
-                  </a:schemeClr>
-                </a:solidFill>
-                <a:effectLst/>
-                <a:uFillTx/>
-                <a:latin typeface="Century Gothic"/>
-                <a:ea typeface="Century Gothic"/>
-              </a:rPr>
-              <a:t>VM</a:t>
-            </a:r>
-            <a:r>
-              <a:rPr lang="zh-TW" sz="1800" b="0" i="1" u="none" strike="noStrike">
-                <a:solidFill>
-                  <a:schemeClr val="dk1">
-                    <a:lumMod val="85000"/>
-                    <a:lumOff val="15000"/>
-                  </a:schemeClr>
-                </a:solidFill>
-                <a:effectLst/>
-                <a:uFillTx/>
-                <a:latin typeface="Century Gothic"/>
-                <a:ea typeface="Century Gothic"/>
-              </a:rPr>
-              <a:t>也可以從網頁進入</a:t>
-            </a:r>
-            <a:br>
-              <a:rPr sz="1800"/>
-            </a:br>
-            <a:br>
-              <a:rPr sz="1800"/>
-            </a:br>
-            <a:r>
-              <a:rPr lang="en-US" sz="1800" b="0" u="none" strike="noStrike">
-                <a:solidFill>
-                  <a:schemeClr val="dk1">
-                    <a:lumMod val="85000"/>
-                    <a:lumOff val="15000"/>
-                  </a:schemeClr>
-                </a:solidFill>
-                <a:effectLst/>
-                <a:uFillTx/>
-                <a:latin typeface="Century Gothic"/>
-                <a:ea typeface="Century Gothic"/>
+          </a:p>
+          <a:p/>
+          <a:p>
+            <a:r>
+              <a:rPr sz="1800" b="1">
+                <a:latin typeface="Century Gothic"/>
+              </a:rPr>
+              <a:t># Local：SSH 進 VM</a:t>
+            </a:r>
+          </a:p>
+          <a:p>
+            <a:r>
+              <a:rPr sz="1800" b="1">
+                <a:latin typeface="Century Gothic"/>
               </a:rPr>
               <a:t>gcloud compute ssh tw-autotrader --zone=asia-east1-b</a:t>
             </a:r>
-            <a:endParaRPr lang="en-US" sz="1800" b="0" u="none" strike="noStrike">
-              <a:solidFill>
-                <a:schemeClr val="dk1">
-                  <a:lumMod val="85000"/>
-                  <a:lumOff val="15000"/>
-                </a:schemeClr>
-              </a:solidFill>
-              <a:effectLst/>
-              <a:uFillTx/>
-              <a:latin typeface="Century Gothic"/>
-            </a:endParaRPr>
-          </a:p>
-          <a:p>
-            <a:pPr marL="45720" indent="0" algn="l" defTabSz="914400">
-              <a:lnSpc>
-                <a:spcPct val="110000"/>
-              </a:lnSpc>
-              <a:spcBef>
-                <a:spcPts val="1800"/>
-              </a:spcBef>
-              <a:buNone/>
-              <a:tabLst>
-                <a:tab pos="0" algn="l"/>
-              </a:tabLst>
-            </a:pPr>
-            <a:endParaRPr lang="en-US" sz="1800" b="0" u="none" strike="noStrike">
-              <a:solidFill>
-                <a:schemeClr val="dk1">
-                  <a:lumMod val="85000"/>
-                  <a:lumOff val="15000"/>
-                </a:schemeClr>
-              </a:solidFill>
-              <a:effectLst/>
-              <a:uFillTx/>
-              <a:latin typeface="Century Gothic"/>
-            </a:endParaRPr>
           </a:p>
         </p:txBody>
       </p:sp>
@@ -25010,7 +20797,7 @@
                 <a:latin typeface="Century Gothic"/>
                 <a:ea typeface="Century Gothic"/>
               </a:rPr>
-              <a:t>~/tw-Autotrader/.git, </a:t>
+              <a:t>~/tw-selfselect/.git, </a:t>
             </a:r>
             <a:r>
               <a:rPr lang="zh-TW" sz="1800" b="0" u="none" strike="noStrike">

--- a/plans/ppt/TW-SELFSELECT台股買賣自動化系統-W2-講稿版.pptx
+++ b/plans/ppt/TW-SELFSELECT台股買賣自動化系統-W2-講稿版.pptx
@@ -18169,6 +18169,23 @@
               <a:t>gcloud compute ssh tw-autotrader --zone=asia-east1-b</a:t>
             </a:r>
           </a:p>
+          <a:p/>
+          <a:p>
+            <a:r>
+              <a:rPr sz="1800" b="1">
+                <a:latin typeface="Century Gothic"/>
+              </a:rPr>
+              <a:t># 本機 alias（.bashrc）</a:t>
+            </a:r>
+          </a:p>
+          <a:p>
+            <a:r>
+              <a:rPr sz="1800" b="1">
+                <a:latin typeface="Century Gothic"/>
+              </a:rPr>
+              <a:t># VM_pick／VM_sync_env／VM_push_env／VM_pick_first／VM_sync_cache／VM_log／VM_hold</a:t>
+            </a:r>
+          </a:p>
         </p:txBody>
       </p:sp>
       <p:sp>

--- a/plans/ppt/TW-SELFSELECT台股買賣自動化系統-W2-講稿版.pptx
+++ b/plans/ppt/TW-SELFSELECT台股買賣自動化系統-W2-講稿版.pptx
@@ -1006,12 +1006,12 @@
           <a:p/>
           <a:p>
             <a:r>
-              <a:t>第二層，GCP VM，也就是雲端主機（實例名稱仍是 tw-autotrader，asia-east1-b）。</a:t>
-            </a:r>
-          </a:p>
-          <a:p>
-            <a:r>
-              <a:t>VM 上的目錄是 ~/tw-selfselect/，它不是開發環境、也不是 git repo，只放執行需要的東西：.env、docker-compose.yml，以及 logs、backups、cache 這些每天會寫入的活資料。舊的 ~/tw-autotrader 原樣保留，出問題可以一行指令回滾。</a:t>
+              <a:t>第二層，GCP VM，也就是雲端主機（實例名稱可自取，本文以 tw-selfselect 為例；asia-east1-b）。</a:t>
+            </a:r>
+          </a:p>
+          <a:p>
+            <a:r>
+              <a:t>VM 上的目錄是 ~/tw-selfselect/，它不是開發環境、也不是 git repo，只放執行需要的東西：.env、docker-compose.yml，以及 logs、backups、cache 這些每天會寫入的活資料。舊專案目錄（遷移前）原樣保留，出問題可以一行指令回滾。</a:t>
             </a:r>
           </a:p>
           <a:p>
@@ -1481,7 +1481,7 @@
           </a:p>
           <a:p>
             <a:r>
-              <a:t>Local 部署只跑 ./deploy_source.sh（人工執行，內含 preflight 測試與指紋驗證）。VM 重啟容器：docker compose down 再 up。看日誌：docker logs 加容器名稱，看最後三十行，也可以用 VM_log。看容器狀態 docker ps；SSH 進 VM 用 gcloud compute ssh tw-autotrader。</a:t>
+              <a:t>Local 部署只跑 ./deploy_source.sh（人工執行，內含 preflight 測試與指紋驗證）。VM 重啟容器：docker compose down 再 up。看日誌：docker logs 加容器名稱，看最後三十行，也可以用 VM_log。看容器狀態 docker ps；SSH 進 VM 用 gcloud compute ssh tw-selfselect（名稱需與 .env 的 SYNC_VM_NAME 一致）。</a:t>
             </a:r>
           </a:p>
           <a:p>
@@ -1782,7 +1782,7 @@
           </a:p>
           <a:p>
             <a:r>
-              <a:t>接下來很重要：請清除原來的 tw-autotrader 資料夾底下的 .git。如果你要修改程式，我強烈建議你自己申請一個 Git 帳戶，把程式放到你自己的版本控制底下——這樣改壞了還可以還原。</a:t>
+              <a:t>接下來很重要：請清除原來的 tw-selfselect 資料夾底下的 .git。如果你要修改程式，我強烈建議你自己申請一個 Git 帳戶，把程式放到你自己的版本控制底下——這樣改壞了還可以還原。</a:t>
             </a:r>
           </a:p>
           <a:p>
@@ -15665,7 +15665,7 @@
               <a:rPr sz="1600" b="0">
                 <a:latin typeface="Sarasa Mono TC"/>
               </a:rPr>
-              <a:t>   實例：tw-autotrader（asia-east1-b）</a:t>
+              <a:t>   實例：tw-selfselect（asia-east1-b；名稱可自取）</a:t>
             </a:r>
           </a:p>
           <a:p>
@@ -15697,7 +15697,7 @@
               <a:rPr sz="1600" b="0">
                 <a:latin typeface="Sarasa Mono TC"/>
               </a:rPr>
-              <a:t>     - 舊目錄 ~/tw-autotrader（保留可回滾）</a:t>
+              <a:t>     - 舊專案目錄（遷移前的目錄，保留可回滾）</a:t>
             </a:r>
           </a:p>
           <a:p>
@@ -16240,7 +16240,7 @@
               <a:rPr sz="1800" b="1">
                 <a:latin typeface="Century Gothic"/>
               </a:rPr>
-              <a:t>VM 目錄 ~/tw-selfselect/（非 git repo）；舊目錄 ~/tw-autotrader 保留可回滾</a:t>
+              <a:t>VM 目錄 ~/tw-selfselect/（非 git repo）；舊專案目錄（遷移前目錄）保留可回滾</a:t>
             </a:r>
           </a:p>
           <a:p>
@@ -18166,7 +18166,7 @@
               <a:rPr sz="1800" b="1">
                 <a:latin typeface="Century Gothic"/>
               </a:rPr>
-              <a:t>gcloud compute ssh tw-autotrader --zone=asia-east1-b</a:t>
+              <a:t>gcloud compute ssh tw-selfselect --zone=asia-east1-b   # 名稱需與 .env 的 SYNC_VM_NAME 一致</a:t>
             </a:r>
           </a:p>
           <a:p/>

--- a/plans/ppt/TW-SELFSELECT台股買賣自動化系統-W2-講稿版.pptx
+++ b/plans/ppt/TW-SELFSELECT台股買賣自動化系統-W2-講稿版.pptx
@@ -20485,7 +20485,7 @@
                 <a:uFillTx/>
                 <a:latin typeface="Century Gothic"/>
                 <a:ea typeface="Century Gothic"/>
-                <a:hlinkClick r:id="rId2"/>
+                <a:hlinkClick r:id="rId9"/>
               </a:rPr>
               <a:t>WSL</a:t>
             </a:r>
@@ -20501,7 +20501,7 @@
                 <a:uFillTx/>
                 <a:latin typeface="Century Gothic"/>
                 <a:ea typeface="Century Gothic"/>
-                <a:hlinkClick r:id="rId2"/>
+                <a:hlinkClick r:id="rId9"/>
               </a:rPr>
               <a:t>恢復</a:t>
             </a:r>
@@ -20517,7 +20517,7 @@
                 <a:uFillTx/>
                 <a:latin typeface="Century Gothic"/>
                 <a:ea typeface="Century Gothic"/>
-                <a:hlinkClick r:id="rId2"/>
+                <a:hlinkClick r:id="rId9"/>
               </a:rPr>
               <a:t>.md</a:t>
             </a:r>
@@ -20608,7 +20608,6 @@
                 <a:uFillTx/>
                 <a:latin typeface="Century Gothic"/>
                 <a:ea typeface="Century Gothic"/>
-                <a:hlinkClick r:id="rId3"/>
               </a:rPr>
               <a:t>安裝程式</a:t>
             </a:r>
@@ -20962,7 +20961,6 @@
                 <a:uFillTx/>
                 <a:latin typeface="Century Gothic"/>
                 <a:ea typeface="Century Gothic"/>
-                <a:hlinkClick r:id="rId5"/>
               </a:rPr>
               <a:t>wsl</a:t>
             </a:r>
@@ -20978,7 +20976,6 @@
                 <a:uFillTx/>
                 <a:latin typeface="Century Gothic"/>
                 <a:ea typeface="Century Gothic"/>
-                <a:hlinkClick r:id="rId5"/>
               </a:rPr>
               <a:t>簡易說明</a:t>
             </a:r>

--- a/plans/ppt/TW-SELFSELECT台股買賣自動化系統-W2-講稿版.pptx
+++ b/plans/ppt/TW-SELFSELECT台股買賣自動化系統-W2-講稿版.pptx
@@ -20448,6 +20448,9 @@
               <a:lnSpc>
                 <a:spcPts val="2160"/>
               </a:lnSpc>
+              <a:spcAft>
+                <a:spcPts val="300"/>
+              </a:spcAft>
               <a:buClr>
                 <a:srgbClr val="595959"/>
               </a:buClr>
@@ -20459,7 +20462,7 @@
               </a:tabLst>
             </a:pPr>
             <a:r>
-              <a:rPr lang="zh-TW" sz="1800" b="0" u="none" strike="noStrike">
+              <a:rPr lang="zh-TW" sz="1400" b="0" u="none" strike="noStrike">
                 <a:solidFill>
                   <a:schemeClr val="dk1">
                     <a:lumMod val="85000"/>
@@ -20474,7 +20477,7 @@
               <a:t>依照</a:t>
             </a:r>
             <a:r>
-              <a:rPr lang="en-US" sz="1800" b="0" u="sng" strike="noStrike">
+              <a:rPr lang="en-US" sz="1400" b="0" u="sng" strike="noStrike">
                 <a:solidFill>
                   <a:schemeClr val="dk1">
                     <a:lumMod val="85000"/>
@@ -20490,7 +20493,7 @@
               <a:t>WSL</a:t>
             </a:r>
             <a:r>
-              <a:rPr lang="zh-TW" sz="1800" b="0" u="sng" strike="noStrike">
+              <a:rPr lang="zh-TW" sz="1400" b="0" u="sng" strike="noStrike">
                 <a:solidFill>
                   <a:schemeClr val="dk1">
                     <a:lumMod val="85000"/>
@@ -20506,7 +20509,7 @@
               <a:t>恢復</a:t>
             </a:r>
             <a:r>
-              <a:rPr lang="en-US" sz="1800" b="0" u="sng" strike="noStrike">
+              <a:rPr lang="en-US" sz="1400" b="0" u="sng" strike="noStrike">
                 <a:solidFill>
                   <a:schemeClr val="dk1">
                     <a:lumMod val="85000"/>
@@ -20522,7 +20525,7 @@
               <a:t>.md</a:t>
             </a:r>
             <a:r>
-              <a:rPr lang="zh-TW" sz="1800" b="0" u="none" strike="noStrike">
+              <a:rPr lang="zh-TW" sz="1400" b="0" u="none" strike="noStrike">
                 <a:solidFill>
                   <a:schemeClr val="dk1">
                     <a:lumMod val="85000"/>
@@ -20537,7 +20540,7 @@
               <a:t>中的恢復步驟把</a:t>
             </a:r>
             <a:r>
-              <a:rPr lang="en-US" sz="1800" b="0" u="none" strike="noStrike">
+              <a:rPr lang="en-US" sz="1400" b="0" u="none" strike="noStrike">
                 <a:solidFill>
                   <a:schemeClr val="dk1">
                     <a:lumMod val="85000"/>
@@ -20552,7 +20555,7 @@
               <a:t>WSL</a:t>
             </a:r>
             <a:r>
-              <a:rPr lang="zh-TW" sz="1800" b="0" u="none" strike="noStrike">
+              <a:rPr lang="zh-TW" sz="1400" b="0" u="none" strike="noStrike">
                 <a:solidFill>
                   <a:schemeClr val="dk1">
                     <a:lumMod val="85000"/>
@@ -20567,7 +20570,7 @@
               <a:t>系統建立起來</a:t>
             </a:r>
             <a:r>
-              <a:rPr lang="en-US" sz="1800" b="0" u="none" strike="noStrike">
+              <a:rPr lang="en-US" sz="1400" b="0" u="none" strike="noStrike">
                 <a:solidFill>
                   <a:schemeClr val="dk1">
                     <a:lumMod val="85000"/>
@@ -20582,7 +20585,7 @@
               <a:t>,</a:t>
             </a:r>
             <a:r>
-              <a:rPr lang="zh-TW" sz="1800" b="0" u="none" strike="noStrike">
+              <a:rPr lang="zh-TW" sz="1400" b="0" u="none" strike="noStrike">
                 <a:solidFill>
                   <a:schemeClr val="dk1">
                     <a:lumMod val="85000"/>
@@ -20597,17 +20600,18 @@
               <a:t>其他</a:t>
             </a:r>
             <a:r>
-              <a:rPr lang="zh-TW" sz="1800" b="0" u="sng" strike="noStrike">
-                <a:solidFill>
-                  <a:schemeClr val="dk1">
-                    <a:lumMod val="85000"/>
-                    <a:lumOff val="15000"/>
-                  </a:schemeClr>
-                </a:solidFill>
-                <a:effectLst/>
-                <a:uFillTx/>
-                <a:latin typeface="Century Gothic"/>
-                <a:ea typeface="Century Gothic"/>
+              <a:rPr lang="zh-TW" sz="1400" b="0" u="sng" strike="noStrike">
+                <a:solidFill>
+                  <a:schemeClr val="dk1">
+                    <a:lumMod val="85000"/>
+                    <a:lumOff val="15000"/>
+                  </a:schemeClr>
+                </a:solidFill>
+                <a:effectLst/>
+                <a:uFillTx/>
+                <a:latin typeface="Century Gothic"/>
+                <a:ea typeface="Century Gothic"/>
+                <a:hlinkClick r:id="rId5"/>
               </a:rPr>
               <a:t>安裝程式</a:t>
             </a:r>
@@ -20628,6 +20632,9 @@
               <a:lnSpc>
                 <a:spcPts val="2160"/>
               </a:lnSpc>
+              <a:spcAft>
+                <a:spcPts val="300"/>
+              </a:spcAft>
               <a:buClr>
                 <a:srgbClr val="595959"/>
               </a:buClr>
@@ -20639,7 +20646,7 @@
               </a:tabLst>
             </a:pPr>
             <a:r>
-              <a:rPr lang="zh-TW" sz="1800" b="1" u="none" strike="noStrike">
+              <a:rPr lang="zh-TW" sz="1400" b="1" u="none" strike="noStrike">
                 <a:solidFill>
                   <a:schemeClr val="dk1">
                     <a:lumMod val="85000"/>
@@ -20654,7 +20661,7 @@
               <a:t>買家需要自己準備的</a:t>
             </a:r>
             <a:r>
-              <a:rPr lang="en-US" sz="1800" b="1" u="none" strike="noStrike">
+              <a:rPr lang="en-US" sz="1400" b="1" u="none" strike="noStrike">
                 <a:solidFill>
                   <a:schemeClr val="dk1">
                     <a:lumMod val="85000"/>
@@ -20669,7 +20676,7 @@
               <a:t>=&gt;</a:t>
             </a:r>
             <a:r>
-              <a:rPr lang="zh-TW" sz="1800" b="1" u="none" strike="noStrike">
+              <a:rPr lang="zh-TW" sz="1400" b="1" u="none" strike="noStrike">
                 <a:solidFill>
                   <a:schemeClr val="dk1">
                     <a:lumMod val="85000"/>
@@ -20684,7 +20691,7 @@
               <a:t>複製必要的</a:t>
             </a:r>
             <a:r>
-              <a:rPr lang="en-US" sz="1800" b="1" u="none" strike="noStrike">
+              <a:rPr lang="en-US" sz="1400" b="1" u="none" strike="noStrike">
                 <a:solidFill>
                   <a:schemeClr val="dk1">
                     <a:lumMod val="85000"/>
@@ -20699,7 +20706,7 @@
               <a:t>ini.example</a:t>
             </a:r>
             <a:r>
-              <a:rPr lang="zh-TW" sz="1800" b="1" u="none" strike="noStrike">
+              <a:rPr lang="zh-TW" sz="1400" b="1" u="none" strike="noStrike">
                 <a:solidFill>
                   <a:schemeClr val="dk1">
                     <a:lumMod val="85000"/>
@@ -20714,7 +20721,7 @@
               <a:t>成</a:t>
             </a:r>
             <a:r>
-              <a:rPr lang="en-US" sz="1800" b="0" u="none" strike="noStrike">
+              <a:rPr lang="en-US" sz="1400" b="0" u="none" strike="noStrike">
                 <a:solidFill>
                   <a:schemeClr val="dk1">
                     <a:lumMod val="85000"/>
@@ -20729,7 +20736,7 @@
               <a:t>config.simulation.ini,P12</a:t>
             </a:r>
             <a:r>
-              <a:rPr lang="zh-TW" sz="1800" b="0" u="none" strike="noStrike">
+              <a:rPr lang="zh-TW" sz="1400" b="0" u="none" strike="noStrike">
                 <a:solidFill>
                   <a:schemeClr val="dk1">
                     <a:lumMod val="85000"/>
@@ -20744,7 +20751,7 @@
               <a:t>檔…</a:t>
             </a:r>
             <a:r>
-              <a:rPr lang="en-US" sz="1800" b="0" u="none" strike="noStrike">
+              <a:rPr lang="en-US" sz="1400" b="0" u="none" strike="noStrike">
                 <a:solidFill>
                   <a:schemeClr val="dk1">
                     <a:lumMod val="85000"/>
@@ -20775,6 +20782,9 @@
               <a:lnSpc>
                 <a:spcPts val="2160"/>
               </a:lnSpc>
+              <a:spcAft>
+                <a:spcPts val="300"/>
+              </a:spcAft>
               <a:buClr>
                 <a:srgbClr val="595959"/>
               </a:buClr>
@@ -20786,7 +20796,7 @@
               </a:tabLst>
             </a:pPr>
             <a:r>
-              <a:rPr lang="zh-TW" sz="1800" b="0" u="none" strike="noStrike">
+              <a:rPr lang="zh-TW" sz="1400" b="0" u="none" strike="noStrike">
                 <a:solidFill>
                   <a:schemeClr val="dk1">
                     <a:lumMod val="85000"/>
@@ -20801,7 +20811,7 @@
               <a:t>清除原來的</a:t>
             </a:r>
             <a:r>
-              <a:rPr lang="en-US" sz="1800" b="0" u="none" strike="noStrike">
+              <a:rPr lang="en-US" sz="1400" b="0" u="none" strike="noStrike">
                 <a:solidFill>
                   <a:schemeClr val="dk1">
                     <a:lumMod val="85000"/>
@@ -20816,7 +20826,7 @@
               <a:t>~/tw-selfselect/.git, </a:t>
             </a:r>
             <a:r>
-              <a:rPr lang="zh-TW" sz="1800" b="0" u="none" strike="noStrike">
+              <a:rPr lang="zh-TW" sz="1400" b="0" u="none" strike="noStrike">
                 <a:solidFill>
                   <a:schemeClr val="dk1">
                     <a:lumMod val="85000"/>
@@ -20831,7 +20841,7 @@
               <a:t>強烈建議自己申請一個</a:t>
             </a:r>
             <a:r>
-              <a:rPr lang="en-US" sz="1800" b="0" u="sng" strike="noStrike">
+              <a:rPr lang="en-US" sz="1400" b="0" u="sng" strike="noStrike">
                 <a:solidFill>
                   <a:schemeClr val="dk1">
                     <a:lumMod val="85000"/>
@@ -20847,7 +20857,7 @@
               <a:t>git</a:t>
             </a:r>
             <a:r>
-              <a:rPr lang="zh-TW" sz="1800" b="0" u="sng" strike="noStrike">
+              <a:rPr lang="zh-TW" sz="1400" b="0" u="sng" strike="noStrike">
                 <a:solidFill>
                   <a:schemeClr val="dk1">
                     <a:lumMod val="85000"/>
@@ -20863,7 +20873,7 @@
               <a:t>帳戶</a:t>
             </a:r>
             <a:r>
-              <a:rPr lang="zh-TW" sz="1800" b="0" u="none" strike="noStrike">
+              <a:rPr lang="zh-TW" sz="1400" b="0" u="none" strike="noStrike">
                 <a:solidFill>
                   <a:schemeClr val="dk1">
                     <a:lumMod val="85000"/>
@@ -20878,7 +20888,7 @@
               <a:t>如果你要修改程式</a:t>
             </a:r>
             <a:r>
-              <a:rPr lang="en-US" sz="1800" b="0" u="none" strike="noStrike">
+              <a:rPr lang="en-US" sz="1400" b="0" u="none" strike="noStrike">
                 <a:solidFill>
                   <a:schemeClr val="dk1">
                     <a:lumMod val="85000"/>
@@ -20909,6 +20919,9 @@
               <a:lnSpc>
                 <a:spcPts val="2160"/>
               </a:lnSpc>
+              <a:spcAft>
+                <a:spcPts val="300"/>
+              </a:spcAft>
               <a:buClr>
                 <a:srgbClr val="595959"/>
               </a:buClr>
@@ -20920,7 +20933,7 @@
               </a:tabLst>
             </a:pPr>
             <a:r>
-              <a:rPr lang="zh-TW" sz="1800" b="0" u="none" strike="noStrike">
+              <a:rPr lang="zh-TW" sz="1400" b="0" u="none" strike="noStrike">
                 <a:solidFill>
                   <a:schemeClr val="dk1">
                     <a:lumMod val="85000"/>
@@ -20935,7 +20948,7 @@
               <a:t>打開</a:t>
             </a:r>
             <a:r>
-              <a:rPr lang="en-US" sz="1800" b="0" u="none" strike="noStrike">
+              <a:rPr lang="en-US" sz="1400" b="0" u="none" strike="noStrike">
                 <a:solidFill>
                   <a:schemeClr val="dk1">
                     <a:lumMod val="85000"/>
@@ -20950,37 +20963,39 @@
               <a:t>cmd.exe:  wsl –d ubuntu (</a:t>
             </a:r>
             <a:r>
-              <a:rPr lang="en-US" sz="1800" b="0" u="sng" strike="noStrike">
-                <a:solidFill>
-                  <a:schemeClr val="dk1">
-                    <a:lumMod val="85000"/>
-                    <a:lumOff val="15000"/>
-                  </a:schemeClr>
-                </a:solidFill>
-                <a:effectLst/>
-                <a:uFillTx/>
-                <a:latin typeface="Century Gothic"/>
-                <a:ea typeface="Century Gothic"/>
+              <a:rPr lang="en-US" sz="1400" b="0" u="sng" strike="noStrike">
+                <a:solidFill>
+                  <a:schemeClr val="dk1">
+                    <a:lumMod val="85000"/>
+                    <a:lumOff val="15000"/>
+                  </a:schemeClr>
+                </a:solidFill>
+                <a:effectLst/>
+                <a:uFillTx/>
+                <a:latin typeface="Century Gothic"/>
+                <a:ea typeface="Century Gothic"/>
+                <a:hlinkClick r:id="rId3"/>
               </a:rPr>
               <a:t>wsl</a:t>
             </a:r>
             <a:r>
-              <a:rPr lang="zh-TW" sz="1800" b="0" u="sng" strike="noStrike">
-                <a:solidFill>
-                  <a:schemeClr val="dk1">
-                    <a:lumMod val="85000"/>
-                    <a:lumOff val="15000"/>
-                  </a:schemeClr>
-                </a:solidFill>
-                <a:effectLst/>
-                <a:uFillTx/>
-                <a:latin typeface="Century Gothic"/>
-                <a:ea typeface="Century Gothic"/>
+              <a:rPr lang="zh-TW" sz="1400" b="0" u="sng" strike="noStrike">
+                <a:solidFill>
+                  <a:schemeClr val="dk1">
+                    <a:lumMod val="85000"/>
+                    <a:lumOff val="15000"/>
+                  </a:schemeClr>
+                </a:solidFill>
+                <a:effectLst/>
+                <a:uFillTx/>
+                <a:latin typeface="Century Gothic"/>
+                <a:ea typeface="Century Gothic"/>
+                <a:hlinkClick r:id="rId3"/>
               </a:rPr>
               <a:t>簡易說明</a:t>
             </a:r>
             <a:r>
-              <a:rPr lang="en-US" sz="1800" b="0" u="none" strike="noStrike">
+              <a:rPr lang="en-US" sz="1400" b="0" u="none" strike="noStrike">
                 <a:solidFill>
                   <a:schemeClr val="dk1">
                     <a:lumMod val="85000"/>
@@ -21014,6 +21029,9 @@
               <a:spcBef>
                 <a:spcPts val="1800"/>
               </a:spcBef>
+              <a:spcAft>
+                <a:spcPts val="300"/>
+              </a:spcAft>
               <a:buNone/>
               <a:tabLst>
                 <a:tab pos="0" algn="l"/>
@@ -21039,6 +21057,9 @@
               <a:spcBef>
                 <a:spcPts val="1800"/>
               </a:spcBef>
+              <a:spcAft>
+                <a:spcPts val="300"/>
+              </a:spcAft>
               <a:buNone/>
               <a:tabLst>
                 <a:tab pos="0" algn="l"/>
@@ -21064,6 +21085,9 @@
               <a:spcBef>
                 <a:spcPts val="1800"/>
               </a:spcBef>
+              <a:spcAft>
+                <a:spcPts val="300"/>
+              </a:spcAft>
               <a:buNone/>
               <a:tabLst>
                 <a:tab pos="0" algn="l"/>
@@ -21089,6 +21113,9 @@
               <a:spcBef>
                 <a:spcPts val="1800"/>
               </a:spcBef>
+              <a:spcAft>
+                <a:spcPts val="300"/>
+              </a:spcAft>
               <a:buClr>
                 <a:srgbClr val="595959"/>
               </a:buClr>
@@ -21100,7 +21127,7 @@
               </a:tabLst>
             </a:pPr>
             <a:r>
-              <a:rPr lang="zh-TW" sz="1800" b="0" u="none" strike="noStrike">
+              <a:rPr lang="zh-TW" sz="1400" b="0" u="none" strike="noStrike">
                 <a:solidFill>
                   <a:schemeClr val="dk1">
                     <a:lumMod val="85000"/>
@@ -21115,7 +21142,7 @@
               <a:t>電腦有</a:t>
             </a:r>
             <a:r>
-              <a:rPr lang="en-US" sz="1800" b="0" u="none" strike="noStrike">
+              <a:rPr lang="en-US" sz="1400" b="0" u="none" strike="noStrike">
                 <a:solidFill>
                   <a:schemeClr val="dk1">
                     <a:lumMod val="85000"/>
@@ -21130,7 +21157,7 @@
               <a:t>Linux</a:t>
             </a:r>
             <a:r>
-              <a:rPr lang="zh-TW" sz="1800" b="0" u="none" strike="noStrike">
+              <a:rPr lang="zh-TW" sz="1400" b="0" u="none" strike="noStrike">
                 <a:solidFill>
                   <a:schemeClr val="dk1">
                     <a:lumMod val="85000"/>
@@ -21145,7 +21172,7 @@
               <a:t>盤出現</a:t>
             </a:r>
             <a:r>
-              <a:rPr lang="en-US" sz="1800" b="0" u="none" strike="noStrike">
+              <a:rPr lang="en-US" sz="1400" b="0" u="none" strike="noStrike">
                 <a:solidFill>
                   <a:schemeClr val="dk1">
                     <a:lumMod val="85000"/>
@@ -21179,6 +21206,9 @@
               <a:spcBef>
                 <a:spcPts val="1800"/>
               </a:spcBef>
+              <a:spcAft>
+                <a:spcPts val="300"/>
+              </a:spcAft>
               <a:buNone/>
               <a:tabLst>
                 <a:tab pos="0" algn="l"/>
@@ -21207,6 +21237,9 @@
               <a:spcBef>
                 <a:spcPts val="1800"/>
               </a:spcBef>
+              <a:spcAft>
+                <a:spcPts val="300"/>
+              </a:spcAft>
               <a:buNone/>
               <a:tabLst>
                 <a:tab pos="0" algn="l"/>

--- a/plans/ppt/TW-SELFSELECT台股買賣自動化系統-W2-講稿版.pptx
+++ b/plans/ppt/TW-SELFSELECT台股買賣自動化系統-W2-講稿版.pptx
@@ -20449,7 +20449,7 @@
                 <a:spcPts val="2160"/>
               </a:lnSpc>
               <a:spcAft>
-                <a:spcPts val="300"/>
+                <a:spcPts val="200"/>
               </a:spcAft>
               <a:buClr>
                 <a:srgbClr val="595959"/>
@@ -20462,7 +20462,7 @@
               </a:tabLst>
             </a:pPr>
             <a:r>
-              <a:rPr lang="zh-TW" sz="1400" b="0" u="none" strike="noStrike">
+              <a:rPr lang="zh-TW" sz="1300" b="0" u="none" strike="noStrike">
                 <a:solidFill>
                   <a:schemeClr val="dk1">
                     <a:lumMod val="85000"/>
@@ -20477,7 +20477,7 @@
               <a:t>依照</a:t>
             </a:r>
             <a:r>
-              <a:rPr lang="en-US" sz="1400" b="0" u="sng" strike="noStrike">
+              <a:rPr lang="en-US" sz="1300" b="0" u="sng" strike="noStrike">
                 <a:solidFill>
                   <a:schemeClr val="dk1">
                     <a:lumMod val="85000"/>
@@ -20493,7 +20493,7 @@
               <a:t>WSL</a:t>
             </a:r>
             <a:r>
-              <a:rPr lang="zh-TW" sz="1400" b="0" u="sng" strike="noStrike">
+              <a:rPr lang="zh-TW" sz="1300" b="0" u="sng" strike="noStrike">
                 <a:solidFill>
                   <a:schemeClr val="dk1">
                     <a:lumMod val="85000"/>
@@ -20509,7 +20509,7 @@
               <a:t>恢復</a:t>
             </a:r>
             <a:r>
-              <a:rPr lang="en-US" sz="1400" b="0" u="sng" strike="noStrike">
+              <a:rPr lang="en-US" sz="1300" b="0" u="sng" strike="noStrike">
                 <a:solidFill>
                   <a:schemeClr val="dk1">
                     <a:lumMod val="85000"/>
@@ -20525,7 +20525,7 @@
               <a:t>.md</a:t>
             </a:r>
             <a:r>
-              <a:rPr lang="zh-TW" sz="1400" b="0" u="none" strike="noStrike">
+              <a:rPr lang="zh-TW" sz="1300" b="0" u="none" strike="noStrike">
                 <a:solidFill>
                   <a:schemeClr val="dk1">
                     <a:lumMod val="85000"/>
@@ -20540,7 +20540,7 @@
               <a:t>中的恢復步驟把</a:t>
             </a:r>
             <a:r>
-              <a:rPr lang="en-US" sz="1400" b="0" u="none" strike="noStrike">
+              <a:rPr lang="en-US" sz="1300" b="0" u="none" strike="noStrike">
                 <a:solidFill>
                   <a:schemeClr val="dk1">
                     <a:lumMod val="85000"/>
@@ -20555,7 +20555,7 @@
               <a:t>WSL</a:t>
             </a:r>
             <a:r>
-              <a:rPr lang="zh-TW" sz="1400" b="0" u="none" strike="noStrike">
+              <a:rPr lang="zh-TW" sz="1300" b="0" u="none" strike="noStrike">
                 <a:solidFill>
                   <a:schemeClr val="dk1">
                     <a:lumMod val="85000"/>
@@ -20570,7 +20570,7 @@
               <a:t>系統建立起來</a:t>
             </a:r>
             <a:r>
-              <a:rPr lang="en-US" sz="1400" b="0" u="none" strike="noStrike">
+              <a:rPr lang="en-US" sz="1300" b="0" u="none" strike="noStrike">
                 <a:solidFill>
                   <a:schemeClr val="dk1">
                     <a:lumMod val="85000"/>
@@ -20585,7 +20585,7 @@
               <a:t>,</a:t>
             </a:r>
             <a:r>
-              <a:rPr lang="zh-TW" sz="1400" b="0" u="none" strike="noStrike">
+              <a:rPr lang="zh-TW" sz="1300" b="0" u="none" strike="noStrike">
                 <a:solidFill>
                   <a:schemeClr val="dk1">
                     <a:lumMod val="85000"/>
@@ -20600,7 +20600,7 @@
               <a:t>其他</a:t>
             </a:r>
             <a:r>
-              <a:rPr lang="zh-TW" sz="1400" b="0" u="sng" strike="noStrike">
+              <a:rPr lang="zh-TW" sz="1300" b="0" u="sng" strike="noStrike">
                 <a:solidFill>
                   <a:schemeClr val="dk1">
                     <a:lumMod val="85000"/>
@@ -20633,7 +20633,7 @@
                 <a:spcPts val="2160"/>
               </a:lnSpc>
               <a:spcAft>
-                <a:spcPts val="300"/>
+                <a:spcPts val="200"/>
               </a:spcAft>
               <a:buClr>
                 <a:srgbClr val="595959"/>
@@ -20646,7 +20646,7 @@
               </a:tabLst>
             </a:pPr>
             <a:r>
-              <a:rPr lang="zh-TW" sz="1400" b="1" u="none" strike="noStrike">
+              <a:rPr lang="zh-TW" sz="1300" b="1" u="none" strike="noStrike">
                 <a:solidFill>
                   <a:schemeClr val="dk1">
                     <a:lumMod val="85000"/>
@@ -20661,7 +20661,7 @@
               <a:t>買家需要自己準備的</a:t>
             </a:r>
             <a:r>
-              <a:rPr lang="en-US" sz="1400" b="1" u="none" strike="noStrike">
+              <a:rPr lang="en-US" sz="1300" b="1" u="none" strike="noStrike">
                 <a:solidFill>
                   <a:schemeClr val="dk1">
                     <a:lumMod val="85000"/>
@@ -20676,7 +20676,7 @@
               <a:t>=&gt;</a:t>
             </a:r>
             <a:r>
-              <a:rPr lang="zh-TW" sz="1400" b="1" u="none" strike="noStrike">
+              <a:rPr lang="zh-TW" sz="1300" b="1" u="none" strike="noStrike">
                 <a:solidFill>
                   <a:schemeClr val="dk1">
                     <a:lumMod val="85000"/>
@@ -20691,7 +20691,7 @@
               <a:t>複製必要的</a:t>
             </a:r>
             <a:r>
-              <a:rPr lang="en-US" sz="1400" b="1" u="none" strike="noStrike">
+              <a:rPr lang="en-US" sz="1300" b="1" u="none" strike="noStrike">
                 <a:solidFill>
                   <a:schemeClr val="dk1">
                     <a:lumMod val="85000"/>
@@ -20706,7 +20706,7 @@
               <a:t>ini.example</a:t>
             </a:r>
             <a:r>
-              <a:rPr lang="zh-TW" sz="1400" b="1" u="none" strike="noStrike">
+              <a:rPr lang="zh-TW" sz="1300" b="1" u="none" strike="noStrike">
                 <a:solidFill>
                   <a:schemeClr val="dk1">
                     <a:lumMod val="85000"/>
@@ -20721,7 +20721,7 @@
               <a:t>成</a:t>
             </a:r>
             <a:r>
-              <a:rPr lang="en-US" sz="1400" b="0" u="none" strike="noStrike">
+              <a:rPr lang="en-US" sz="1300" b="0" u="none" strike="noStrike">
                 <a:solidFill>
                   <a:schemeClr val="dk1">
                     <a:lumMod val="85000"/>
@@ -20736,7 +20736,7 @@
               <a:t>config.simulation.ini,P12</a:t>
             </a:r>
             <a:r>
-              <a:rPr lang="zh-TW" sz="1400" b="0" u="none" strike="noStrike">
+              <a:rPr lang="zh-TW" sz="1300" b="0" u="none" strike="noStrike">
                 <a:solidFill>
                   <a:schemeClr val="dk1">
                     <a:lumMod val="85000"/>
@@ -20751,7 +20751,7 @@
               <a:t>檔…</a:t>
             </a:r>
             <a:r>
-              <a:rPr lang="en-US" sz="1400" b="0" u="none" strike="noStrike">
+              <a:rPr lang="en-US" sz="1300" b="0" u="none" strike="noStrike">
                 <a:solidFill>
                   <a:schemeClr val="dk1">
                     <a:lumMod val="85000"/>
@@ -20783,7 +20783,7 @@
                 <a:spcPts val="2160"/>
               </a:lnSpc>
               <a:spcAft>
-                <a:spcPts val="300"/>
+                <a:spcPts val="200"/>
               </a:spcAft>
               <a:buClr>
                 <a:srgbClr val="595959"/>
@@ -20796,7 +20796,7 @@
               </a:tabLst>
             </a:pPr>
             <a:r>
-              <a:rPr lang="zh-TW" sz="1400" b="0" u="none" strike="noStrike">
+              <a:rPr lang="zh-TW" sz="1300" b="0" u="none" strike="noStrike">
                 <a:solidFill>
                   <a:schemeClr val="dk1">
                     <a:lumMod val="85000"/>
@@ -20811,7 +20811,7 @@
               <a:t>清除原來的</a:t>
             </a:r>
             <a:r>
-              <a:rPr lang="en-US" sz="1400" b="0" u="none" strike="noStrike">
+              <a:rPr lang="en-US" sz="1300" b="0" u="none" strike="noStrike">
                 <a:solidFill>
                   <a:schemeClr val="dk1">
                     <a:lumMod val="85000"/>
@@ -20826,7 +20826,7 @@
               <a:t>~/tw-selfselect/.git, </a:t>
             </a:r>
             <a:r>
-              <a:rPr lang="zh-TW" sz="1400" b="0" u="none" strike="noStrike">
+              <a:rPr lang="zh-TW" sz="1300" b="0" u="none" strike="noStrike">
                 <a:solidFill>
                   <a:schemeClr val="dk1">
                     <a:lumMod val="85000"/>
@@ -20841,7 +20841,7 @@
               <a:t>強烈建議自己申請一個</a:t>
             </a:r>
             <a:r>
-              <a:rPr lang="en-US" sz="1400" b="0" u="sng" strike="noStrike">
+              <a:rPr lang="en-US" sz="1300" b="0" u="sng" strike="noStrike">
                 <a:solidFill>
                   <a:schemeClr val="dk1">
                     <a:lumMod val="85000"/>
@@ -20857,7 +20857,7 @@
               <a:t>git</a:t>
             </a:r>
             <a:r>
-              <a:rPr lang="zh-TW" sz="1400" b="0" u="sng" strike="noStrike">
+              <a:rPr lang="zh-TW" sz="1300" b="0" u="sng" strike="noStrike">
                 <a:solidFill>
                   <a:schemeClr val="dk1">
                     <a:lumMod val="85000"/>
@@ -20873,7 +20873,7 @@
               <a:t>帳戶</a:t>
             </a:r>
             <a:r>
-              <a:rPr lang="zh-TW" sz="1400" b="0" u="none" strike="noStrike">
+              <a:rPr lang="zh-TW" sz="1300" b="0" u="none" strike="noStrike">
                 <a:solidFill>
                   <a:schemeClr val="dk1">
                     <a:lumMod val="85000"/>
@@ -20888,7 +20888,7 @@
               <a:t>如果你要修改程式</a:t>
             </a:r>
             <a:r>
-              <a:rPr lang="en-US" sz="1400" b="0" u="none" strike="noStrike">
+              <a:rPr lang="en-US" sz="1300" b="0" u="none" strike="noStrike">
                 <a:solidFill>
                   <a:schemeClr val="dk1">
                     <a:lumMod val="85000"/>
@@ -20920,7 +20920,7 @@
                 <a:spcPts val="2160"/>
               </a:lnSpc>
               <a:spcAft>
-                <a:spcPts val="300"/>
+                <a:spcPts val="200"/>
               </a:spcAft>
               <a:buClr>
                 <a:srgbClr val="595959"/>
@@ -20933,7 +20933,7 @@
               </a:tabLst>
             </a:pPr>
             <a:r>
-              <a:rPr lang="zh-TW" sz="1400" b="0" u="none" strike="noStrike">
+              <a:rPr lang="zh-TW" sz="1300" b="0" u="none" strike="noStrike">
                 <a:solidFill>
                   <a:schemeClr val="dk1">
                     <a:lumMod val="85000"/>
@@ -20948,7 +20948,7 @@
               <a:t>打開</a:t>
             </a:r>
             <a:r>
-              <a:rPr lang="en-US" sz="1400" b="0" u="none" strike="noStrike">
+              <a:rPr lang="en-US" sz="1300" b="0" u="none" strike="noStrike">
                 <a:solidFill>
                   <a:schemeClr val="dk1">
                     <a:lumMod val="85000"/>
@@ -20963,7 +20963,7 @@
               <a:t>cmd.exe:  wsl –d ubuntu (</a:t>
             </a:r>
             <a:r>
-              <a:rPr lang="en-US" sz="1400" b="0" u="sng" strike="noStrike">
+              <a:rPr lang="en-US" sz="1300" b="0" u="sng" strike="noStrike">
                 <a:solidFill>
                   <a:schemeClr val="dk1">
                     <a:lumMod val="85000"/>
@@ -20979,7 +20979,7 @@
               <a:t>wsl</a:t>
             </a:r>
             <a:r>
-              <a:rPr lang="zh-TW" sz="1400" b="0" u="sng" strike="noStrike">
+              <a:rPr lang="zh-TW" sz="1300" b="0" u="sng" strike="noStrike">
                 <a:solidFill>
                   <a:schemeClr val="dk1">
                     <a:lumMod val="85000"/>
@@ -20995,7 +20995,7 @@
               <a:t>簡易說明</a:t>
             </a:r>
             <a:r>
-              <a:rPr lang="en-US" sz="1400" b="0" u="none" strike="noStrike">
+              <a:rPr lang="en-US" sz="1300" b="0" u="none" strike="noStrike">
                 <a:solidFill>
                   <a:schemeClr val="dk1">
                     <a:lumMod val="85000"/>
@@ -21030,7 +21030,7 @@
                 <a:spcPts val="1800"/>
               </a:spcBef>
               <a:spcAft>
-                <a:spcPts val="300"/>
+                <a:spcPts val="200"/>
               </a:spcAft>
               <a:buNone/>
               <a:tabLst>
@@ -21058,7 +21058,7 @@
                 <a:spcPts val="1800"/>
               </a:spcBef>
               <a:spcAft>
-                <a:spcPts val="300"/>
+                <a:spcPts val="200"/>
               </a:spcAft>
               <a:buNone/>
               <a:tabLst>
@@ -21086,7 +21086,7 @@
                 <a:spcPts val="1800"/>
               </a:spcBef>
               <a:spcAft>
-                <a:spcPts val="300"/>
+                <a:spcPts val="200"/>
               </a:spcAft>
               <a:buNone/>
               <a:tabLst>
@@ -21114,7 +21114,7 @@
                 <a:spcPts val="1800"/>
               </a:spcBef>
               <a:spcAft>
-                <a:spcPts val="300"/>
+                <a:spcPts val="200"/>
               </a:spcAft>
               <a:buClr>
                 <a:srgbClr val="595959"/>
@@ -21127,7 +21127,7 @@
               </a:tabLst>
             </a:pPr>
             <a:r>
-              <a:rPr lang="zh-TW" sz="1400" b="0" u="none" strike="noStrike">
+              <a:rPr lang="zh-TW" sz="1300" b="0" u="none" strike="noStrike">
                 <a:solidFill>
                   <a:schemeClr val="dk1">
                     <a:lumMod val="85000"/>
@@ -21142,7 +21142,7 @@
               <a:t>電腦有</a:t>
             </a:r>
             <a:r>
-              <a:rPr lang="en-US" sz="1400" b="0" u="none" strike="noStrike">
+              <a:rPr lang="en-US" sz="1300" b="0" u="none" strike="noStrike">
                 <a:solidFill>
                   <a:schemeClr val="dk1">
                     <a:lumMod val="85000"/>
@@ -21157,7 +21157,7 @@
               <a:t>Linux</a:t>
             </a:r>
             <a:r>
-              <a:rPr lang="zh-TW" sz="1400" b="0" u="none" strike="noStrike">
+              <a:rPr lang="zh-TW" sz="1300" b="0" u="none" strike="noStrike">
                 <a:solidFill>
                   <a:schemeClr val="dk1">
                     <a:lumMod val="85000"/>
@@ -21172,7 +21172,7 @@
               <a:t>盤出現</a:t>
             </a:r>
             <a:r>
-              <a:rPr lang="en-US" sz="1400" b="0" u="none" strike="noStrike">
+              <a:rPr lang="en-US" sz="1300" b="0" u="none" strike="noStrike">
                 <a:solidFill>
                   <a:schemeClr val="dk1">
                     <a:lumMod val="85000"/>
@@ -21207,7 +21207,7 @@
                 <a:spcPts val="1800"/>
               </a:spcBef>
               <a:spcAft>
-                <a:spcPts val="300"/>
+                <a:spcPts val="200"/>
               </a:spcAft>
               <a:buNone/>
               <a:tabLst>
@@ -21238,7 +21238,7 @@
                 <a:spcPts val="1800"/>
               </a:spcBef>
               <a:spcAft>
-                <a:spcPts val="300"/>
+                <a:spcPts val="200"/>
               </a:spcAft>
               <a:buNone/>
               <a:tabLst>
@@ -21271,8 +21271,8 @@
         </p:blipFill>
         <p:spPr>
           <a:xfrm>
-            <a:off x="1630080" y="1905480"/>
-            <a:ext cx="9672840" cy="1757880"/>
+            <a:off x="1630080" y="2121408"/>
+            <a:ext cx="9672840" cy="1600200"/>
           </a:xfrm>
           <a:prstGeom prst="rect">
             <a:avLst/>
@@ -21295,8 +21295,8 @@
         </p:blipFill>
         <p:spPr>
           <a:xfrm>
-            <a:off x="1630080" y="4038480"/>
-            <a:ext cx="9672840" cy="2669760"/>
+            <a:off x="1630080" y="3913632"/>
+            <a:ext cx="9672840" cy="2331720"/>
           </a:xfrm>
           <a:prstGeom prst="rect">
             <a:avLst/>

--- a/plans/ppt/TW-SELFSELECT台股買賣自動化系統-W2-講稿版.pptx
+++ b/plans/ppt/TW-SELFSELECT台股買賣自動化系統-W2-講稿版.pptx
@@ -21261,30 +21261,6 @@
       </p:sp>
       <p:pic>
         <p:nvPicPr>
-          <p:cNvPr id="104" name="圖片 5"/>
-          <p:cNvPicPr/>
-          <p:nvPr/>
-        </p:nvPicPr>
-        <p:blipFill>
-          <a:blip r:embed="rId6"/>
-          <a:stretch/>
-        </p:blipFill>
-        <p:spPr>
-          <a:xfrm>
-            <a:off x="1630080" y="2121408"/>
-            <a:ext cx="9672840" cy="1600200"/>
-          </a:xfrm>
-          <a:prstGeom prst="rect">
-            <a:avLst/>
-          </a:prstGeom>
-          <a:noFill/>
-          <a:ln w="0">
-            <a:noFill/>
-          </a:ln>
-        </p:spPr>
-      </p:pic>
-      <p:pic>
-        <p:nvPicPr>
           <p:cNvPr id="105" name="圖片 7"/>
           <p:cNvPicPr/>
           <p:nvPr/>
@@ -21329,6 +21305,30 @@
           </a:p>
         </p:txBody>
       </p:sp>
+      <p:pic>
+        <p:nvPicPr>
+          <p:cNvPr id="106" name="Picture 105" descr="wsl_terminal.png"/>
+          <p:cNvPicPr>
+            <a:picLocks noChangeAspect="1"/>
+          </p:cNvPicPr>
+          <p:nvPr/>
+        </p:nvPicPr>
+        <p:blipFill>
+          <a:blip r:embed="rId2"/>
+          <a:stretch>
+            <a:fillRect/>
+          </a:stretch>
+        </p:blipFill>
+        <p:spPr>
+          <a:xfrm>
+            <a:off x="1630080" y="2121408"/>
+            <a:ext cx="9672840" cy="1508502"/>
+          </a:xfrm>
+          <a:prstGeom prst="rect">
+            <a:avLst/>
+          </a:prstGeom>
+        </p:spPr>
+      </p:pic>
     </p:spTree>
   </p:cSld>
   <p:clrMapOvr>

--- a/plans/ppt/TW-SELFSELECT台股買賣自動化系統-W2-講稿版.pptx
+++ b/plans/ppt/TW-SELFSELECT台股買賣自動化系統-W2-講稿版.pptx
@@ -1486,7 +1486,7 @@
           </a:p>
           <a:p>
             <a:r>
-              <a:t>舊版的 deploy_crypted.sh／deploy_user.sh 已經不需要了——本專案是源碼部署。</a:t>
+              <a:t>本專案原始碼全部公開，直接用 ./deploy_source.sh 源碼部署（沒有加密版／源碼版之分）。</a:t>
             </a:r>
           </a:p>
           <a:p/>
@@ -1777,7 +1777,7 @@
           </a:p>
           <a:p>
             <a:r>
-              <a:t>請依照 WSL 恢復說明文件中的恢復步驟，把 WSL 系統建立起來。其他安裝程式，買家需要自己準備——例如把必要的 ini.example 複製成 config.simulation.ini、準備 P12 檔等等。</a:t>
+              <a:t>請依照 WSL 恢復說明文件中的恢復步驟，把 WSL 系統建立起來。其他安裝程式，學員需要自己準備——例如把必要的 ini.example 複製成 config.simulation.ini、準備 P12 檔等等。</a:t>
             </a:r>
           </a:p>
           <a:p>
@@ -20658,7 +20658,7 @@
                 <a:latin typeface="Century Gothic"/>
                 <a:ea typeface="Century Gothic"/>
               </a:rPr>
-              <a:t>買家需要自己準備的</a:t>
+              <a:t>學員需要自己準備的</a:t>
             </a:r>
             <a:r>
               <a:rPr lang="en-US" sz="1300" b="1" u="none" strike="noStrike">
